--- a/FPM.pptx
+++ b/FPM.pptx
@@ -4,6 +4,9 @@
   <p:sldMasterIdLst>
     <p:sldMasterId id="2147483648" r:id="rId1"/>
   </p:sldMasterIdLst>
+  <p:notesMasterIdLst>
+    <p:notesMasterId r:id="rId16"/>
+  </p:notesMasterIdLst>
   <p:sldIdLst>
     <p:sldId id="282" r:id="rId2"/>
     <p:sldId id="283" r:id="rId3"/>
@@ -11,13 +14,14 @@
     <p:sldId id="293" r:id="rId5"/>
     <p:sldId id="294" r:id="rId6"/>
     <p:sldId id="295" r:id="rId7"/>
-    <p:sldId id="286" r:id="rId8"/>
-    <p:sldId id="296" r:id="rId9"/>
+    <p:sldId id="296" r:id="rId8"/>
+    <p:sldId id="286" r:id="rId9"/>
     <p:sldId id="287" r:id="rId10"/>
     <p:sldId id="297" r:id="rId11"/>
     <p:sldId id="289" r:id="rId12"/>
-    <p:sldId id="290" r:id="rId13"/>
-    <p:sldId id="291" r:id="rId14"/>
+    <p:sldId id="299" r:id="rId13"/>
+    <p:sldId id="301" r:id="rId14"/>
+    <p:sldId id="291" r:id="rId15"/>
   </p:sldIdLst>
   <p:sldSz cx="12192000" cy="6858000"/>
   <p:notesSz cx="6858000" cy="9144000"/>
@@ -124,12 +128,521 @@
 </p:presentation>
 </file>
 
-<file path=ppt/revisionInfo.xml><?xml version="1.0" encoding="utf-8"?>
-<p1510:revInfo xmlns:a="http://schemas.openxmlformats.org/drawingml/2006/main" xmlns:r="http://schemas.openxmlformats.org/officeDocument/2006/relationships" xmlns:p1510="http://schemas.microsoft.com/office/powerpoint/2015/10/main">
-  <p1510:revLst>
-    <p1510:client id="{DA638E44-0139-4D74-AD1A-BB7CDA5B1C7F}" v="1440" dt="2026-07-23T11:34:12.866"/>
-  </p1510:revLst>
-</p1510:revInfo>
+<file path=ppt/notesMasters/notesMaster1.xml><?xml version="1.0" encoding="utf-8"?>
+<p:notesMaster xmlns:a="http://schemas.openxmlformats.org/drawingml/2006/main" xmlns:r="http://schemas.openxmlformats.org/officeDocument/2006/relationships" xmlns:p="http://schemas.openxmlformats.org/presentationml/2006/main">
+  <p:cSld>
+    <p:bg>
+      <p:bgRef idx="1001">
+        <a:schemeClr val="bg1"/>
+      </p:bgRef>
+    </p:bg>
+    <p:spTree>
+      <p:nvGrpSpPr>
+        <p:cNvPr id="1" name=""/>
+        <p:cNvGrpSpPr/>
+        <p:nvPr/>
+      </p:nvGrpSpPr>
+      <p:grpSpPr>
+        <a:xfrm>
+          <a:off x="0" y="0"/>
+          <a:ext cx="0" cy="0"/>
+          <a:chOff x="0" y="0"/>
+          <a:chExt cx="0" cy="0"/>
+        </a:xfrm>
+      </p:grpSpPr>
+      <p:sp>
+        <p:nvSpPr>
+          <p:cNvPr id="2" name="Marcador de encabezado 1"/>
+          <p:cNvSpPr>
+            <a:spLocks noGrp="1"/>
+          </p:cNvSpPr>
+          <p:nvPr>
+            <p:ph type="hdr" sz="quarter"/>
+          </p:nvPr>
+        </p:nvSpPr>
+        <p:spPr>
+          <a:xfrm>
+            <a:off x="0" y="0"/>
+            <a:ext cx="2971800" cy="458788"/>
+          </a:xfrm>
+          <a:prstGeom prst="rect">
+            <a:avLst/>
+          </a:prstGeom>
+        </p:spPr>
+        <p:txBody>
+          <a:bodyPr vert="horz" lIns="91440" tIns="45720" rIns="91440" bIns="45720" rtlCol="0"/>
+          <a:lstStyle>
+            <a:lvl1pPr algn="l">
+              <a:defRPr sz="1200"/>
+            </a:lvl1pPr>
+          </a:lstStyle>
+          <a:p>
+            <a:endParaRPr lang="es-ES"/>
+          </a:p>
+        </p:txBody>
+      </p:sp>
+      <p:sp>
+        <p:nvSpPr>
+          <p:cNvPr id="3" name="Marcador de fecha 2"/>
+          <p:cNvSpPr>
+            <a:spLocks noGrp="1"/>
+          </p:cNvSpPr>
+          <p:nvPr>
+            <p:ph type="dt" idx="1"/>
+          </p:nvPr>
+        </p:nvSpPr>
+        <p:spPr>
+          <a:xfrm>
+            <a:off x="3884613" y="0"/>
+            <a:ext cx="2971800" cy="458788"/>
+          </a:xfrm>
+          <a:prstGeom prst="rect">
+            <a:avLst/>
+          </a:prstGeom>
+        </p:spPr>
+        <p:txBody>
+          <a:bodyPr vert="horz" lIns="91440" tIns="45720" rIns="91440" bIns="45720" rtlCol="0"/>
+          <a:lstStyle>
+            <a:lvl1pPr algn="r">
+              <a:defRPr sz="1200"/>
+            </a:lvl1pPr>
+          </a:lstStyle>
+          <a:p>
+            <a:fld id="{3F88C78F-4BB1-46BE-95B1-BF506A03B8DF}" type="datetimeFigureOut">
+              <a:rPr lang="es-ES" smtClean="0"/>
+              <a:t>12/09/2026</a:t>
+            </a:fld>
+            <a:endParaRPr lang="es-ES"/>
+          </a:p>
+        </p:txBody>
+      </p:sp>
+      <p:sp>
+        <p:nvSpPr>
+          <p:cNvPr id="4" name="Marcador de imagen de diapositiva 3"/>
+          <p:cNvSpPr>
+            <a:spLocks noGrp="1" noRot="1" noChangeAspect="1"/>
+          </p:cNvSpPr>
+          <p:nvPr>
+            <p:ph type="sldImg" idx="2"/>
+          </p:nvPr>
+        </p:nvSpPr>
+        <p:spPr>
+          <a:xfrm>
+            <a:off x="685800" y="1143000"/>
+            <a:ext cx="5486400" cy="3086100"/>
+          </a:xfrm>
+          <a:prstGeom prst="rect">
+            <a:avLst/>
+          </a:prstGeom>
+          <a:noFill/>
+          <a:ln w="12700">
+            <a:solidFill>
+              <a:prstClr val="black"/>
+            </a:solidFill>
+          </a:ln>
+        </p:spPr>
+        <p:txBody>
+          <a:bodyPr vert="horz" lIns="91440" tIns="45720" rIns="91440" bIns="45720" rtlCol="0" anchor="ctr"/>
+          <a:lstStyle/>
+          <a:p>
+            <a:endParaRPr lang="es-ES"/>
+          </a:p>
+        </p:txBody>
+      </p:sp>
+      <p:sp>
+        <p:nvSpPr>
+          <p:cNvPr id="5" name="Marcador de notas 4"/>
+          <p:cNvSpPr>
+            <a:spLocks noGrp="1"/>
+          </p:cNvSpPr>
+          <p:nvPr>
+            <p:ph type="body" sz="quarter" idx="3"/>
+          </p:nvPr>
+        </p:nvSpPr>
+        <p:spPr>
+          <a:xfrm>
+            <a:off x="685800" y="4400550"/>
+            <a:ext cx="5486400" cy="3600450"/>
+          </a:xfrm>
+          <a:prstGeom prst="rect">
+            <a:avLst/>
+          </a:prstGeom>
+        </p:spPr>
+        <p:txBody>
+          <a:bodyPr vert="horz" lIns="91440" tIns="45720" rIns="91440" bIns="45720" rtlCol="0"/>
+          <a:lstStyle/>
+          <a:p>
+            <a:pPr lvl="0"/>
+            <a:r>
+              <a:rPr lang="es-ES"/>
+              <a:t>Haga clic para modificar los estilos de texto del patrón</a:t>
+            </a:r>
+          </a:p>
+          <a:p>
+            <a:pPr lvl="1"/>
+            <a:r>
+              <a:rPr lang="es-ES"/>
+              <a:t>Segundo nivel</a:t>
+            </a:r>
+          </a:p>
+          <a:p>
+            <a:pPr lvl="2"/>
+            <a:r>
+              <a:rPr lang="es-ES"/>
+              <a:t>Tercer nivel</a:t>
+            </a:r>
+          </a:p>
+          <a:p>
+            <a:pPr lvl="3"/>
+            <a:r>
+              <a:rPr lang="es-ES"/>
+              <a:t>Cuarto nivel</a:t>
+            </a:r>
+          </a:p>
+          <a:p>
+            <a:pPr lvl="4"/>
+            <a:r>
+              <a:rPr lang="es-ES"/>
+              <a:t>Quinto nivel</a:t>
+            </a:r>
+          </a:p>
+        </p:txBody>
+      </p:sp>
+      <p:sp>
+        <p:nvSpPr>
+          <p:cNvPr id="6" name="Marcador de pie de página 5"/>
+          <p:cNvSpPr>
+            <a:spLocks noGrp="1"/>
+          </p:cNvSpPr>
+          <p:nvPr>
+            <p:ph type="ftr" sz="quarter" idx="4"/>
+          </p:nvPr>
+        </p:nvSpPr>
+        <p:spPr>
+          <a:xfrm>
+            <a:off x="0" y="8685213"/>
+            <a:ext cx="2971800" cy="458787"/>
+          </a:xfrm>
+          <a:prstGeom prst="rect">
+            <a:avLst/>
+          </a:prstGeom>
+        </p:spPr>
+        <p:txBody>
+          <a:bodyPr vert="horz" lIns="91440" tIns="45720" rIns="91440" bIns="45720" rtlCol="0" anchor="b"/>
+          <a:lstStyle>
+            <a:lvl1pPr algn="l">
+              <a:defRPr sz="1200"/>
+            </a:lvl1pPr>
+          </a:lstStyle>
+          <a:p>
+            <a:endParaRPr lang="es-ES"/>
+          </a:p>
+        </p:txBody>
+      </p:sp>
+      <p:sp>
+        <p:nvSpPr>
+          <p:cNvPr id="7" name="Marcador de número de diapositiva 6"/>
+          <p:cNvSpPr>
+            <a:spLocks noGrp="1"/>
+          </p:cNvSpPr>
+          <p:nvPr>
+            <p:ph type="sldNum" sz="quarter" idx="5"/>
+          </p:nvPr>
+        </p:nvSpPr>
+        <p:spPr>
+          <a:xfrm>
+            <a:off x="3884613" y="8685213"/>
+            <a:ext cx="2971800" cy="458787"/>
+          </a:xfrm>
+          <a:prstGeom prst="rect">
+            <a:avLst/>
+          </a:prstGeom>
+        </p:spPr>
+        <p:txBody>
+          <a:bodyPr vert="horz" lIns="91440" tIns="45720" rIns="91440" bIns="45720" rtlCol="0" anchor="b"/>
+          <a:lstStyle>
+            <a:lvl1pPr algn="r">
+              <a:defRPr sz="1200"/>
+            </a:lvl1pPr>
+          </a:lstStyle>
+          <a:p>
+            <a:fld id="{7BB44893-263F-444A-857A-DD77211F12F2}" type="slidenum">
+              <a:rPr lang="es-ES" smtClean="0"/>
+              <a:t>‹Nº›</a:t>
+            </a:fld>
+            <a:endParaRPr lang="es-ES"/>
+          </a:p>
+        </p:txBody>
+      </p:sp>
+    </p:spTree>
+    <p:extLst>
+      <p:ext uri="{BB962C8B-B14F-4D97-AF65-F5344CB8AC3E}">
+        <p14:creationId xmlns:p14="http://schemas.microsoft.com/office/powerpoint/2010/main" val="3379980224"/>
+      </p:ext>
+    </p:extLst>
+  </p:cSld>
+  <p:clrMap bg1="lt1" tx1="dk1" bg2="lt2" tx2="dk2" accent1="accent1" accent2="accent2" accent3="accent3" accent4="accent4" accent5="accent5" accent6="accent6" hlink="hlink" folHlink="folHlink"/>
+  <p:notesStyle>
+    <a:lvl1pPr marL="0" algn="l" defTabSz="914400" rtl="0" eaLnBrk="1" latinLnBrk="0" hangingPunct="1">
+      <a:defRPr sz="1200" kern="1200">
+        <a:solidFill>
+          <a:schemeClr val="tx1"/>
+        </a:solidFill>
+        <a:latin typeface="+mn-lt"/>
+        <a:ea typeface="+mn-ea"/>
+        <a:cs typeface="+mn-cs"/>
+      </a:defRPr>
+    </a:lvl1pPr>
+    <a:lvl2pPr marL="457200" algn="l" defTabSz="914400" rtl="0" eaLnBrk="1" latinLnBrk="0" hangingPunct="1">
+      <a:defRPr sz="1200" kern="1200">
+        <a:solidFill>
+          <a:schemeClr val="tx1"/>
+        </a:solidFill>
+        <a:latin typeface="+mn-lt"/>
+        <a:ea typeface="+mn-ea"/>
+        <a:cs typeface="+mn-cs"/>
+      </a:defRPr>
+    </a:lvl2pPr>
+    <a:lvl3pPr marL="914400" algn="l" defTabSz="914400" rtl="0" eaLnBrk="1" latinLnBrk="0" hangingPunct="1">
+      <a:defRPr sz="1200" kern="1200">
+        <a:solidFill>
+          <a:schemeClr val="tx1"/>
+        </a:solidFill>
+        <a:latin typeface="+mn-lt"/>
+        <a:ea typeface="+mn-ea"/>
+        <a:cs typeface="+mn-cs"/>
+      </a:defRPr>
+    </a:lvl3pPr>
+    <a:lvl4pPr marL="1371600" algn="l" defTabSz="914400" rtl="0" eaLnBrk="1" latinLnBrk="0" hangingPunct="1">
+      <a:defRPr sz="1200" kern="1200">
+        <a:solidFill>
+          <a:schemeClr val="tx1"/>
+        </a:solidFill>
+        <a:latin typeface="+mn-lt"/>
+        <a:ea typeface="+mn-ea"/>
+        <a:cs typeface="+mn-cs"/>
+      </a:defRPr>
+    </a:lvl4pPr>
+    <a:lvl5pPr marL="1828800" algn="l" defTabSz="914400" rtl="0" eaLnBrk="1" latinLnBrk="0" hangingPunct="1">
+      <a:defRPr sz="1200" kern="1200">
+        <a:solidFill>
+          <a:schemeClr val="tx1"/>
+        </a:solidFill>
+        <a:latin typeface="+mn-lt"/>
+        <a:ea typeface="+mn-ea"/>
+        <a:cs typeface="+mn-cs"/>
+      </a:defRPr>
+    </a:lvl5pPr>
+    <a:lvl6pPr marL="2286000" algn="l" defTabSz="914400" rtl="0" eaLnBrk="1" latinLnBrk="0" hangingPunct="1">
+      <a:defRPr sz="1200" kern="1200">
+        <a:solidFill>
+          <a:schemeClr val="tx1"/>
+        </a:solidFill>
+        <a:latin typeface="+mn-lt"/>
+        <a:ea typeface="+mn-ea"/>
+        <a:cs typeface="+mn-cs"/>
+      </a:defRPr>
+    </a:lvl6pPr>
+    <a:lvl7pPr marL="2743200" algn="l" defTabSz="914400" rtl="0" eaLnBrk="1" latinLnBrk="0" hangingPunct="1">
+      <a:defRPr sz="1200" kern="1200">
+        <a:solidFill>
+          <a:schemeClr val="tx1"/>
+        </a:solidFill>
+        <a:latin typeface="+mn-lt"/>
+        <a:ea typeface="+mn-ea"/>
+        <a:cs typeface="+mn-cs"/>
+      </a:defRPr>
+    </a:lvl7pPr>
+    <a:lvl8pPr marL="3200400" algn="l" defTabSz="914400" rtl="0" eaLnBrk="1" latinLnBrk="0" hangingPunct="1">
+      <a:defRPr sz="1200" kern="1200">
+        <a:solidFill>
+          <a:schemeClr val="tx1"/>
+        </a:solidFill>
+        <a:latin typeface="+mn-lt"/>
+        <a:ea typeface="+mn-ea"/>
+        <a:cs typeface="+mn-cs"/>
+      </a:defRPr>
+    </a:lvl8pPr>
+    <a:lvl9pPr marL="3657600" algn="l" defTabSz="914400" rtl="0" eaLnBrk="1" latinLnBrk="0" hangingPunct="1">
+      <a:defRPr sz="1200" kern="1200">
+        <a:solidFill>
+          <a:schemeClr val="tx1"/>
+        </a:solidFill>
+        <a:latin typeface="+mn-lt"/>
+        <a:ea typeface="+mn-ea"/>
+        <a:cs typeface="+mn-cs"/>
+      </a:defRPr>
+    </a:lvl9pPr>
+  </p:notesStyle>
+</p:notesMaster>
+</file>
+
+<file path=ppt/notesSlides/notesSlide1.xml><?xml version="1.0" encoding="utf-8"?>
+<p:notes xmlns:a="http://schemas.openxmlformats.org/drawingml/2006/main" xmlns:r="http://schemas.openxmlformats.org/officeDocument/2006/relationships" xmlns:p="http://schemas.openxmlformats.org/presentationml/2006/main">
+  <p:cSld>
+    <p:spTree>
+      <p:nvGrpSpPr>
+        <p:cNvPr id="1" name=""/>
+        <p:cNvGrpSpPr/>
+        <p:nvPr/>
+      </p:nvGrpSpPr>
+      <p:grpSpPr>
+        <a:xfrm>
+          <a:off x="0" y="0"/>
+          <a:ext cx="0" cy="0"/>
+          <a:chOff x="0" y="0"/>
+          <a:chExt cx="0" cy="0"/>
+        </a:xfrm>
+      </p:grpSpPr>
+      <p:sp>
+        <p:nvSpPr>
+          <p:cNvPr id="2" name="Marcador de imagen de diapositiva 1"/>
+          <p:cNvSpPr>
+            <a:spLocks noGrp="1" noRot="1" noChangeAspect="1"/>
+          </p:cNvSpPr>
+          <p:nvPr>
+            <p:ph type="sldImg"/>
+          </p:nvPr>
+        </p:nvSpPr>
+        <p:spPr/>
+      </p:sp>
+      <p:sp>
+        <p:nvSpPr>
+          <p:cNvPr id="3" name="Marcador de notas 2"/>
+          <p:cNvSpPr>
+            <a:spLocks noGrp="1"/>
+          </p:cNvSpPr>
+          <p:nvPr>
+            <p:ph type="body" idx="1"/>
+          </p:nvPr>
+        </p:nvSpPr>
+        <p:spPr/>
+        <p:txBody>
+          <a:bodyPr/>
+          <a:lstStyle/>
+          <a:p>
+            <a:endParaRPr lang="es-ES"/>
+          </a:p>
+        </p:txBody>
+      </p:sp>
+      <p:sp>
+        <p:nvSpPr>
+          <p:cNvPr id="4" name="Marcador de número de diapositiva 3"/>
+          <p:cNvSpPr>
+            <a:spLocks noGrp="1"/>
+          </p:cNvSpPr>
+          <p:nvPr>
+            <p:ph type="sldNum" sz="quarter" idx="5"/>
+          </p:nvPr>
+        </p:nvSpPr>
+        <p:spPr/>
+        <p:txBody>
+          <a:bodyPr/>
+          <a:lstStyle/>
+          <a:p>
+            <a:fld id="{7BB44893-263F-444A-857A-DD77211F12F2}" type="slidenum">
+              <a:rPr lang="es-ES" smtClean="0"/>
+              <a:t>1</a:t>
+            </a:fld>
+            <a:endParaRPr lang="es-ES"/>
+          </a:p>
+        </p:txBody>
+      </p:sp>
+    </p:spTree>
+    <p:extLst>
+      <p:ext uri="{BB962C8B-B14F-4D97-AF65-F5344CB8AC3E}">
+        <p14:creationId xmlns:p14="http://schemas.microsoft.com/office/powerpoint/2010/main" val="2566670558"/>
+      </p:ext>
+    </p:extLst>
+  </p:cSld>
+  <p:clrMapOvr>
+    <a:masterClrMapping/>
+  </p:clrMapOvr>
+</p:notes>
+</file>
+
+<file path=ppt/notesSlides/notesSlide2.xml><?xml version="1.0" encoding="utf-8"?>
+<p:notes xmlns:a="http://schemas.openxmlformats.org/drawingml/2006/main" xmlns:r="http://schemas.openxmlformats.org/officeDocument/2006/relationships" xmlns:p="http://schemas.openxmlformats.org/presentationml/2006/main">
+  <p:cSld>
+    <p:spTree>
+      <p:nvGrpSpPr>
+        <p:cNvPr id="1" name=""/>
+        <p:cNvGrpSpPr/>
+        <p:nvPr/>
+      </p:nvGrpSpPr>
+      <p:grpSpPr>
+        <a:xfrm>
+          <a:off x="0" y="0"/>
+          <a:ext cx="0" cy="0"/>
+          <a:chOff x="0" y="0"/>
+          <a:chExt cx="0" cy="0"/>
+        </a:xfrm>
+      </p:grpSpPr>
+      <p:sp>
+        <p:nvSpPr>
+          <p:cNvPr id="2" name="Marcador de imagen de diapositiva 1"/>
+          <p:cNvSpPr>
+            <a:spLocks noGrp="1" noRot="1" noChangeAspect="1"/>
+          </p:cNvSpPr>
+          <p:nvPr>
+            <p:ph type="sldImg"/>
+          </p:nvPr>
+        </p:nvSpPr>
+        <p:spPr/>
+      </p:sp>
+      <p:sp>
+        <p:nvSpPr>
+          <p:cNvPr id="3" name="Marcador de notas 2"/>
+          <p:cNvSpPr>
+            <a:spLocks noGrp="1"/>
+          </p:cNvSpPr>
+          <p:nvPr>
+            <p:ph type="body" idx="1"/>
+          </p:nvPr>
+        </p:nvSpPr>
+        <p:spPr/>
+        <p:txBody>
+          <a:bodyPr/>
+          <a:lstStyle/>
+          <a:p>
+            <a:endParaRPr lang="es-ES"/>
+          </a:p>
+        </p:txBody>
+      </p:sp>
+      <p:sp>
+        <p:nvSpPr>
+          <p:cNvPr id="4" name="Marcador de número de diapositiva 3"/>
+          <p:cNvSpPr>
+            <a:spLocks noGrp="1"/>
+          </p:cNvSpPr>
+          <p:nvPr>
+            <p:ph type="sldNum" sz="quarter" idx="5"/>
+          </p:nvPr>
+        </p:nvSpPr>
+        <p:spPr/>
+        <p:txBody>
+          <a:bodyPr/>
+          <a:lstStyle/>
+          <a:p>
+            <a:fld id="{7BB44893-263F-444A-857A-DD77211F12F2}" type="slidenum">
+              <a:rPr lang="es-ES" smtClean="0"/>
+              <a:t>6</a:t>
+            </a:fld>
+            <a:endParaRPr lang="es-ES"/>
+          </a:p>
+        </p:txBody>
+      </p:sp>
+    </p:spTree>
+    <p:extLst>
+      <p:ext uri="{BB962C8B-B14F-4D97-AF65-F5344CB8AC3E}">
+        <p14:creationId xmlns:p14="http://schemas.microsoft.com/office/powerpoint/2010/main" val="162435188"/>
+      </p:ext>
+    </p:extLst>
+  </p:cSld>
+  <p:clrMapOvr>
+    <a:masterClrMapping/>
+  </p:clrMapOvr>
+</p:notes>
 </file>
 
 <file path=ppt/slideLayouts/slideLayout1.xml><?xml version="1.0" encoding="utf-8"?>
@@ -12383,7 +12896,7 @@
           <p:nvPr/>
         </p:nvPicPr>
         <p:blipFill>
-          <a:blip r:embed="rId2">
+          <a:blip r:embed="rId3">
             <a:extLst>
               <a:ext uri="{28A0092B-C50C-407E-A947-70E740481C1C}">
                 <a14:useLocalDpi xmlns:a14="http://schemas.microsoft.com/office/drawing/2010/main" val="0"/>
@@ -12443,8 +12956,19 @@
           <a:p>
             <a:pPr algn="ctr"/>
             <a:r>
+              <a:rPr lang="es-ES" dirty="0" err="1"/>
+              <a:t>Production</a:t>
+            </a:r>
+            <a:r>
               <a:rPr lang="es-ES" dirty="0"/>
-              <a:t>Factory Predictive Maintenance</a:t>
+              <a:t> Line </a:t>
+            </a:r>
+            <a:br>
+              <a:rPr lang="es-ES" dirty="0"/>
+            </a:br>
+            <a:r>
+              <a:rPr lang="es-ES" dirty="0"/>
+              <a:t>Predictive Maintenance</a:t>
             </a:r>
             <a:endParaRPr lang="ca-ES" dirty="0"/>
           </a:p>
@@ -12477,62 +13001,6 @@
               <a:t>Albert Olivella</a:t>
             </a:r>
             <a:endParaRPr lang="ca-ES" dirty="0"/>
-          </a:p>
-        </p:txBody>
-      </p:sp>
-      <p:sp>
-        <p:nvSpPr>
-          <p:cNvPr id="6" name="Título 3">
-            <a:extLst>
-              <a:ext uri="{FF2B5EF4-FFF2-40B4-BE49-F238E27FC236}">
-                <a16:creationId xmlns:a16="http://schemas.microsoft.com/office/drawing/2014/main" id="{19E024E7-8DAB-4933-92EF-6F0179144102}"/>
-              </a:ext>
-            </a:extLst>
-          </p:cNvPr>
-          <p:cNvSpPr txBox="1">
-            <a:spLocks/>
-          </p:cNvSpPr>
-          <p:nvPr/>
-        </p:nvSpPr>
-        <p:spPr>
-          <a:xfrm>
-            <a:off x="1876424" y="2618510"/>
-            <a:ext cx="8791575" cy="428105"/>
-          </a:xfrm>
-          <a:prstGeom prst="rect">
-            <a:avLst/>
-          </a:prstGeom>
-        </p:spPr>
-        <p:txBody>
-          <a:bodyPr vert="horz" lIns="91440" tIns="45720" rIns="91440" bIns="45720" rtlCol="0" anchor="b">
-            <a:normAutofit/>
-          </a:bodyPr>
-          <a:lstStyle>
-            <a:lvl1pPr algn="l" defTabSz="914400" rtl="0" eaLnBrk="1" latinLnBrk="0" hangingPunct="1">
-              <a:lnSpc>
-                <a:spcPct val="90000"/>
-              </a:lnSpc>
-              <a:spcBef>
-                <a:spcPct val="0"/>
-              </a:spcBef>
-              <a:buNone/>
-              <a:defRPr sz="4800" kern="1200" cap="all" baseline="0">
-                <a:solidFill>
-                  <a:schemeClr val="tx1"/>
-                </a:solidFill>
-                <a:latin typeface="+mj-lt"/>
-                <a:ea typeface="+mj-ea"/>
-                <a:cs typeface="+mj-cs"/>
-              </a:defRPr>
-            </a:lvl1pPr>
-          </a:lstStyle>
-          <a:p>
-            <a:pPr algn="ctr"/>
-            <a:r>
-              <a:rPr lang="es-ES" sz="2000" dirty="0" err="1"/>
-              <a:t>Predicting Mechanical &amp; Electrical failures 30 minutes ahead</a:t>
-            </a:r>
-            <a:endParaRPr lang="ca-ES" sz="2000" dirty="0"/>
           </a:p>
         </p:txBody>
       </p:sp>
@@ -12772,8 +13240,8 @@
         </p:nvSpPr>
         <p:spPr>
           <a:xfrm>
-            <a:off x="1844900" y="4985849"/>
-            <a:ext cx="8502192" cy="1477328"/>
+            <a:off x="1844900" y="4744505"/>
+            <a:ext cx="8502192" cy="2031325"/>
           </a:xfrm>
           <a:prstGeom prst="rect">
             <a:avLst/>
@@ -12791,15 +13259,46 @@
             </a:pPr>
             <a:r>
               <a:rPr lang="en-US" dirty="0"/>
-              <a:t>Best model for ST chosen by Recall [Detect TP and FP]</a:t>
+              <a:t>Best model for ST chosen by Recall [Detect TP / (TP + FN)]</a:t>
             </a:r>
             <a:br>
               <a:rPr lang="en-US" dirty="0"/>
             </a:br>
             <a:r>
               <a:rPr lang="en-US" dirty="0"/>
-              <a:t>In Production Dept missed failure costs more than a false alarm.</a:t>
-            </a:r>
+              <a:t>In Production Dept, missed failure costs more than a false alarm.</a:t>
+            </a:r>
+          </a:p>
+          <a:p>
+            <a:pPr marL="285750" indent="-285750">
+              <a:buFontTx/>
+              <a:buAutoNum type="arabicPeriod"/>
+            </a:pPr>
+            <a:r>
+              <a:rPr lang="en-US" dirty="0"/>
+              <a:t>Fix Recall value (80-90%) for ST to focus in the Precision. </a:t>
+            </a:r>
+            <a:br>
+              <a:rPr lang="en-US" dirty="0"/>
+            </a:br>
+            <a:r>
+              <a:rPr kumimoji="0" lang="en-US" sz="1800" b="0" i="0" u="none" strike="noStrike" kern="1200" cap="none" spc="0" normalizeH="0" baseline="0" noProof="0" dirty="0">
+                <a:ln>
+                  <a:noFill/>
+                </a:ln>
+                <a:solidFill>
+                  <a:prstClr val="white"/>
+                </a:solidFill>
+                <a:effectLst/>
+                <a:uLnTx/>
+                <a:uFillTx/>
+                <a:latin typeface="Tw Cen MT" panose="020B0602020104020603"/>
+                <a:ea typeface="+mn-ea"/>
+                <a:cs typeface="+mn-cs"/>
+              </a:rPr>
+              <a:t>Example: ST7 (1 sensor) forcing a 90% floor drops Precision to 12.8%.</a:t>
+            </a:r>
+            <a:endParaRPr lang="en-US" dirty="0"/>
           </a:p>
           <a:p>
             <a:pPr marL="285750" indent="-285750">
@@ -12807,11 +13306,11 @@
             </a:pPr>
             <a:r>
               <a:rPr lang="en-US" dirty="0"/>
-              <a:t>Fix Recall value (80-90%) for ST to focus in the Precision. </a:t>
-            </a:r>
-          </a:p>
-          <a:p>
-            <a:pPr marL="285750" indent="-285750">
+              <a:t>XGB Boost was selected:</a:t>
+            </a:r>
+          </a:p>
+          <a:p>
+            <a:pPr marL="742950" lvl="1" indent="-285750">
               <a:buAutoNum type="arabicPeriod"/>
             </a:pPr>
             <a:r>
@@ -12820,12 +13319,12 @@
             </a:r>
           </a:p>
           <a:p>
-            <a:pPr marL="285750" indent="-285750">
+            <a:pPr marL="742950" lvl="1" indent="-285750">
               <a:buAutoNum type="arabicPeriod"/>
             </a:pPr>
             <a:r>
               <a:rPr lang="en-US" dirty="0"/>
-              <a:t>Model Precision between 65-78%, that means 1 over 3 are False Positive alarm.</a:t>
+              <a:t>Model Precision between 70-78%, that means 1 over 4 are False Positive alarm.</a:t>
             </a:r>
           </a:p>
         </p:txBody>
@@ -12900,7 +13399,7 @@
         </p:blipFill>
         <p:spPr>
           <a:xfrm>
-            <a:off x="1393766" y="1688759"/>
+            <a:off x="1393766" y="1537481"/>
             <a:ext cx="4816257" cy="3163707"/>
           </a:xfrm>
           <a:prstGeom prst="rect">
@@ -12930,7 +13429,7 @@
         </p:blipFill>
         <p:spPr>
           <a:xfrm>
-            <a:off x="7669376" y="1688758"/>
+            <a:off x="7601283" y="1542913"/>
             <a:ext cx="3196948" cy="3158275"/>
           </a:xfrm>
           <a:prstGeom prst="rect">
@@ -13184,9 +13683,440 @@
                 <a:ea typeface="Cambria" pitchFamily="34" charset="-122"/>
                 <a:cs typeface="Cambria" pitchFamily="34" charset="-120"/>
               </a:rPr>
-              <a:t>07</a:t>
+              <a:t>06</a:t>
             </a:r>
             <a:endParaRPr lang="en-US" sz="5400" dirty="0"/>
+          </a:p>
+        </p:txBody>
+      </p:sp>
+      <p:sp>
+        <p:nvSpPr>
+          <p:cNvPr id="4" name="CuadroTexto 3">
+            <a:extLst>
+              <a:ext uri="{FF2B5EF4-FFF2-40B4-BE49-F238E27FC236}">
+                <a16:creationId xmlns:a16="http://schemas.microsoft.com/office/drawing/2014/main" id="{AD0943D5-8315-9F2F-B13B-E0B52F134BA4}"/>
+              </a:ext>
+            </a:extLst>
+          </p:cNvPr>
+          <p:cNvSpPr txBox="1"/>
+          <p:nvPr/>
+        </p:nvSpPr>
+        <p:spPr>
+          <a:xfrm>
+            <a:off x="1844900" y="4987447"/>
+            <a:ext cx="8502192" cy="1754326"/>
+          </a:xfrm>
+          <a:prstGeom prst="rect">
+            <a:avLst/>
+          </a:prstGeom>
+          <a:noFill/>
+        </p:spPr>
+        <p:txBody>
+          <a:bodyPr wrap="square" lIns="91440" tIns="45720" rIns="91440" bIns="45720" rtlCol="0" anchor="t">
+            <a:spAutoFit/>
+          </a:bodyPr>
+          <a:lstStyle/>
+          <a:p>
+            <a:pPr marL="285750" indent="-285750">
+              <a:buAutoNum type="arabicPeriod"/>
+            </a:pPr>
+            <a:r>
+              <a:rPr lang="en-US" dirty="0"/>
+              <a:t>Large Language Model is used for calling tools function and send proper answer to the asker. </a:t>
+            </a:r>
+          </a:p>
+          <a:p>
+            <a:pPr marL="285750" indent="-285750">
+              <a:buAutoNum type="arabicPeriod"/>
+            </a:pPr>
+            <a:endParaRPr lang="en-US" dirty="0"/>
+          </a:p>
+          <a:p>
+            <a:pPr marL="285750" indent="-285750">
+              <a:buAutoNum type="arabicPeriod"/>
+            </a:pPr>
+            <a:r>
+              <a:rPr lang="en-US" dirty="0"/>
+              <a:t>Interactive </a:t>
+            </a:r>
+            <a:r>
+              <a:rPr lang="en-US" dirty="0" err="1"/>
+              <a:t>Streamlit</a:t>
+            </a:r>
+            <a:r>
+              <a:rPr lang="en-US" dirty="0"/>
+              <a:t> dashboard:</a:t>
+            </a:r>
+          </a:p>
+          <a:p>
+            <a:pPr marL="742950" lvl="1" indent="-285750">
+              <a:buAutoNum type="arabicPeriod"/>
+            </a:pPr>
+            <a:r>
+              <a:rPr lang="en-US" dirty="0"/>
+              <a:t>Timestamp slider for simulation testing.</a:t>
+            </a:r>
+          </a:p>
+          <a:p>
+            <a:pPr marL="742950" lvl="1" indent="-285750">
+              <a:buAutoNum type="arabicPeriod"/>
+            </a:pPr>
+            <a:r>
+              <a:rPr lang="en-US" dirty="0"/>
+              <a:t>Prediction Vs Real Failure with error cause.</a:t>
+            </a:r>
+          </a:p>
+        </p:txBody>
+      </p:sp>
+      <p:sp>
+        <p:nvSpPr>
+          <p:cNvPr id="5" name="CuadroTexto 4">
+            <a:extLst>
+              <a:ext uri="{FF2B5EF4-FFF2-40B4-BE49-F238E27FC236}">
+                <a16:creationId xmlns:a16="http://schemas.microsoft.com/office/drawing/2014/main" id="{AD032CE8-43C8-82BE-3F51-595F2F6F9AB9}"/>
+              </a:ext>
+            </a:extLst>
+          </p:cNvPr>
+          <p:cNvSpPr txBox="1"/>
+          <p:nvPr/>
+        </p:nvSpPr>
+        <p:spPr>
+          <a:xfrm>
+            <a:off x="1651458" y="1124832"/>
+            <a:ext cx="8889077" cy="369332"/>
+          </a:xfrm>
+          <a:prstGeom prst="rect">
+            <a:avLst/>
+          </a:prstGeom>
+          <a:noFill/>
+        </p:spPr>
+        <p:txBody>
+          <a:bodyPr wrap="square" lIns="91440" tIns="45720" rIns="91440" bIns="45720" rtlCol="0" anchor="t">
+            <a:spAutoFit/>
+          </a:bodyPr>
+          <a:lstStyle/>
+          <a:p>
+            <a:pPr algn="ctr"/>
+            <a:r>
+              <a:rPr lang="en-US" dirty="0">
+                <a:highlight>
+                  <a:srgbClr val="000000"/>
+                </a:highlight>
+              </a:rPr>
+              <a:t>Gemini 3.7 Flash for Calling Agent</a:t>
+            </a:r>
+            <a:endParaRPr lang="es-ES" dirty="0"/>
+          </a:p>
+        </p:txBody>
+      </p:sp>
+      <p:grpSp>
+        <p:nvGrpSpPr>
+          <p:cNvPr id="17" name="Grupo 16">
+            <a:extLst>
+              <a:ext uri="{FF2B5EF4-FFF2-40B4-BE49-F238E27FC236}">
+                <a16:creationId xmlns:a16="http://schemas.microsoft.com/office/drawing/2014/main" id="{D842677A-4088-67C0-ED33-BE6ED219B26F}"/>
+              </a:ext>
+            </a:extLst>
+          </p:cNvPr>
+          <p:cNvGrpSpPr/>
+          <p:nvPr/>
+        </p:nvGrpSpPr>
+        <p:grpSpPr>
+          <a:xfrm>
+            <a:off x="1393765" y="1601675"/>
+            <a:ext cx="9404465" cy="3355836"/>
+            <a:chOff x="1393766" y="1754244"/>
+            <a:chExt cx="8223610" cy="2943187"/>
+          </a:xfrm>
+        </p:grpSpPr>
+        <p:pic>
+          <p:nvPicPr>
+            <p:cNvPr id="8" name="Imagen 7">
+              <a:extLst>
+                <a:ext uri="{FF2B5EF4-FFF2-40B4-BE49-F238E27FC236}">
+                  <a16:creationId xmlns:a16="http://schemas.microsoft.com/office/drawing/2014/main" id="{28223D4C-BDED-9805-8B56-C466A7368157}"/>
+                </a:ext>
+              </a:extLst>
+            </p:cNvPr>
+            <p:cNvPicPr>
+              <a:picLocks noChangeAspect="1"/>
+            </p:cNvPicPr>
+            <p:nvPr/>
+          </p:nvPicPr>
+          <p:blipFill>
+            <a:blip r:embed="rId4"/>
+            <a:stretch>
+              <a:fillRect/>
+            </a:stretch>
+          </p:blipFill>
+          <p:spPr>
+            <a:xfrm>
+              <a:off x="1393766" y="1754244"/>
+              <a:ext cx="8223610" cy="2943187"/>
+            </a:xfrm>
+            <a:prstGeom prst="rect">
+              <a:avLst/>
+            </a:prstGeom>
+          </p:spPr>
+        </p:pic>
+        <p:sp>
+          <p:nvSpPr>
+            <p:cNvPr id="12" name="Rectángulo 11">
+              <a:extLst>
+                <a:ext uri="{FF2B5EF4-FFF2-40B4-BE49-F238E27FC236}">
+                  <a16:creationId xmlns:a16="http://schemas.microsoft.com/office/drawing/2014/main" id="{7678C361-E243-6945-0050-3502A314ABF8}"/>
+                </a:ext>
+              </a:extLst>
+            </p:cNvPr>
+            <p:cNvSpPr/>
+            <p:nvPr/>
+          </p:nvSpPr>
+          <p:spPr>
+            <a:xfrm>
+              <a:off x="1393766" y="3850640"/>
+              <a:ext cx="2035234" cy="636033"/>
+            </a:xfrm>
+            <a:prstGeom prst="rect">
+              <a:avLst/>
+            </a:prstGeom>
+            <a:noFill/>
+            <a:ln>
+              <a:solidFill>
+                <a:srgbClr val="FF0000"/>
+              </a:solidFill>
+            </a:ln>
+          </p:spPr>
+          <p:style>
+            <a:lnRef idx="2">
+              <a:schemeClr val="accent1">
+                <a:shade val="15000"/>
+              </a:schemeClr>
+            </a:lnRef>
+            <a:fillRef idx="1">
+              <a:schemeClr val="accent1"/>
+            </a:fillRef>
+            <a:effectRef idx="0">
+              <a:schemeClr val="accent1"/>
+            </a:effectRef>
+            <a:fontRef idx="minor">
+              <a:schemeClr val="lt1"/>
+            </a:fontRef>
+          </p:style>
+          <p:txBody>
+            <a:bodyPr rtlCol="0" anchor="ctr"/>
+            <a:lstStyle/>
+            <a:p>
+              <a:pPr algn="ctr"/>
+              <a:endParaRPr lang="es-ES"/>
+            </a:p>
+          </p:txBody>
+        </p:sp>
+        <p:sp>
+          <p:nvSpPr>
+            <p:cNvPr id="13" name="Rectángulo 12">
+              <a:extLst>
+                <a:ext uri="{FF2B5EF4-FFF2-40B4-BE49-F238E27FC236}">
+                  <a16:creationId xmlns:a16="http://schemas.microsoft.com/office/drawing/2014/main" id="{1B337D94-E30E-C9EE-17CA-1407A3493120}"/>
+                </a:ext>
+              </a:extLst>
+            </p:cNvPr>
+            <p:cNvSpPr/>
+            <p:nvPr/>
+          </p:nvSpPr>
+          <p:spPr>
+            <a:xfrm>
+              <a:off x="2392680" y="3908829"/>
+              <a:ext cx="988060" cy="150091"/>
+            </a:xfrm>
+            <a:prstGeom prst="rect">
+              <a:avLst/>
+            </a:prstGeom>
+            <a:noFill/>
+            <a:ln>
+              <a:solidFill>
+                <a:srgbClr val="FF0000"/>
+              </a:solidFill>
+            </a:ln>
+          </p:spPr>
+          <p:style>
+            <a:lnRef idx="2">
+              <a:schemeClr val="accent1">
+                <a:shade val="15000"/>
+              </a:schemeClr>
+            </a:lnRef>
+            <a:fillRef idx="1">
+              <a:schemeClr val="accent1"/>
+            </a:fillRef>
+            <a:effectRef idx="0">
+              <a:schemeClr val="accent1"/>
+            </a:effectRef>
+            <a:fontRef idx="minor">
+              <a:schemeClr val="lt1"/>
+            </a:fontRef>
+          </p:style>
+          <p:txBody>
+            <a:bodyPr rtlCol="0" anchor="ctr"/>
+            <a:lstStyle/>
+            <a:p>
+              <a:pPr algn="ctr"/>
+              <a:endParaRPr lang="es-ES"/>
+            </a:p>
+          </p:txBody>
+        </p:sp>
+        <p:sp>
+          <p:nvSpPr>
+            <p:cNvPr id="15" name="Rectángulo 14">
+              <a:extLst>
+                <a:ext uri="{FF2B5EF4-FFF2-40B4-BE49-F238E27FC236}">
+                  <a16:creationId xmlns:a16="http://schemas.microsoft.com/office/drawing/2014/main" id="{4694D005-50B2-C487-4B33-6DECBE56BA79}"/>
+                </a:ext>
+              </a:extLst>
+            </p:cNvPr>
+            <p:cNvSpPr/>
+            <p:nvPr/>
+          </p:nvSpPr>
+          <p:spPr>
+            <a:xfrm>
+              <a:off x="1465580" y="4079241"/>
+              <a:ext cx="927100" cy="114300"/>
+            </a:xfrm>
+            <a:prstGeom prst="rect">
+              <a:avLst/>
+            </a:prstGeom>
+            <a:noFill/>
+            <a:ln>
+              <a:solidFill>
+                <a:srgbClr val="FF0000"/>
+              </a:solidFill>
+            </a:ln>
+          </p:spPr>
+          <p:style>
+            <a:lnRef idx="2">
+              <a:schemeClr val="accent1">
+                <a:shade val="15000"/>
+              </a:schemeClr>
+            </a:lnRef>
+            <a:fillRef idx="1">
+              <a:schemeClr val="accent1"/>
+            </a:fillRef>
+            <a:effectRef idx="0">
+              <a:schemeClr val="accent1"/>
+            </a:effectRef>
+            <a:fontRef idx="minor">
+              <a:schemeClr val="lt1"/>
+            </a:fontRef>
+          </p:style>
+          <p:txBody>
+            <a:bodyPr rtlCol="0" anchor="ctr"/>
+            <a:lstStyle/>
+            <a:p>
+              <a:pPr algn="ctr"/>
+              <a:endParaRPr lang="es-ES"/>
+            </a:p>
+          </p:txBody>
+        </p:sp>
+        <p:sp>
+          <p:nvSpPr>
+            <p:cNvPr id="16" name="Rectángulo 15">
+              <a:extLst>
+                <a:ext uri="{FF2B5EF4-FFF2-40B4-BE49-F238E27FC236}">
+                  <a16:creationId xmlns:a16="http://schemas.microsoft.com/office/drawing/2014/main" id="{F0A0A971-A4C0-7EB7-63FE-CB6122C944B7}"/>
+                </a:ext>
+              </a:extLst>
+            </p:cNvPr>
+            <p:cNvSpPr/>
+            <p:nvPr/>
+          </p:nvSpPr>
+          <p:spPr>
+            <a:xfrm>
+              <a:off x="1465580" y="4225807"/>
+              <a:ext cx="1861820" cy="227814"/>
+            </a:xfrm>
+            <a:prstGeom prst="rect">
+              <a:avLst/>
+            </a:prstGeom>
+            <a:noFill/>
+            <a:ln>
+              <a:solidFill>
+                <a:srgbClr val="FF0000"/>
+              </a:solidFill>
+            </a:ln>
+          </p:spPr>
+          <p:style>
+            <a:lnRef idx="2">
+              <a:schemeClr val="accent1">
+                <a:shade val="15000"/>
+              </a:schemeClr>
+            </a:lnRef>
+            <a:fillRef idx="1">
+              <a:schemeClr val="accent1"/>
+            </a:fillRef>
+            <a:effectRef idx="0">
+              <a:schemeClr val="accent1"/>
+            </a:effectRef>
+            <a:fontRef idx="minor">
+              <a:schemeClr val="lt1"/>
+            </a:fontRef>
+          </p:style>
+          <p:txBody>
+            <a:bodyPr rtlCol="0" anchor="ctr"/>
+            <a:lstStyle/>
+            <a:p>
+              <a:pPr algn="ctr"/>
+              <a:endParaRPr lang="es-ES"/>
+            </a:p>
+          </p:txBody>
+        </p:sp>
+      </p:grpSp>
+      <p:sp>
+        <p:nvSpPr>
+          <p:cNvPr id="18" name="Rectángulo 17">
+            <a:extLst>
+              <a:ext uri="{FF2B5EF4-FFF2-40B4-BE49-F238E27FC236}">
+                <a16:creationId xmlns:a16="http://schemas.microsoft.com/office/drawing/2014/main" id="{32BF9A01-A9B3-28F5-6BE9-18B0BA071B2F}"/>
+              </a:ext>
+            </a:extLst>
+          </p:cNvPr>
+          <p:cNvSpPr/>
+          <p:nvPr/>
+        </p:nvSpPr>
+        <p:spPr>
+          <a:xfrm>
+            <a:off x="1393764" y="2275840"/>
+            <a:ext cx="9404465" cy="725208"/>
+          </a:xfrm>
+          <a:prstGeom prst="rect">
+            <a:avLst/>
+          </a:prstGeom>
+          <a:noFill/>
+          <a:ln>
+            <a:solidFill>
+              <a:srgbClr val="FF0000"/>
+            </a:solidFill>
+          </a:ln>
+        </p:spPr>
+        <p:style>
+          <a:lnRef idx="2">
+            <a:schemeClr val="accent1">
+              <a:shade val="15000"/>
+            </a:schemeClr>
+          </a:lnRef>
+          <a:fillRef idx="1">
+            <a:schemeClr val="accent1"/>
+          </a:fillRef>
+          <a:effectRef idx="0">
+            <a:schemeClr val="accent1"/>
+          </a:effectRef>
+          <a:fontRef idx="minor">
+            <a:schemeClr val="lt1"/>
+          </a:fontRef>
+        </p:style>
+        <p:txBody>
+          <a:bodyPr rtlCol="0" anchor="ctr"/>
+          <a:lstStyle/>
+          <a:p>
+            <a:pPr algn="ctr"/>
+            <a:endParaRPr lang="es-ES"/>
           </a:p>
         </p:txBody>
       </p:sp>
@@ -13314,8 +14244,37 @@
           <a:bodyPr rtlCol="0" anchor="ctr"/>
           <a:lstStyle/>
           <a:p>
-            <a:pPr algn="ctr"/>
-            <a:endParaRPr lang="ca-ES"/>
+            <a:pPr marL="0" marR="0" lvl="0" indent="0" algn="ctr" defTabSz="457200" rtl="0" eaLnBrk="1" fontAlgn="auto" latinLnBrk="0" hangingPunct="1">
+              <a:lnSpc>
+                <a:spcPct val="100000"/>
+              </a:lnSpc>
+              <a:spcBef>
+                <a:spcPts val="0"/>
+              </a:spcBef>
+              <a:spcAft>
+                <a:spcPts val="0"/>
+              </a:spcAft>
+              <a:buClrTx/>
+              <a:buSzTx/>
+              <a:buFontTx/>
+              <a:buNone/>
+              <a:tabLst/>
+              <a:defRPr/>
+            </a:pPr>
+            <a:endParaRPr kumimoji="0" lang="ca-ES" sz="1800" b="0" i="0" u="none" strike="noStrike" kern="1200" cap="none" spc="0" normalizeH="0" baseline="0" noProof="0">
+              <a:ln>
+                <a:noFill/>
+              </a:ln>
+              <a:solidFill>
+                <a:prstClr val="white"/>
+              </a:solidFill>
+              <a:effectLst/>
+              <a:uLnTx/>
+              <a:uFillTx/>
+              <a:latin typeface="Tw Cen MT" panose="020B0602020104020603"/>
+              <a:ea typeface="+mn-ea"/>
+              <a:cs typeface="+mn-cs"/>
+            </a:endParaRPr>
           </a:p>
         </p:txBody>
       </p:sp>
@@ -13333,8 +14292,8 @@
         </p:nvSpPr>
         <p:spPr>
           <a:xfrm>
-            <a:off x="4401464" y="99996"/>
-            <a:ext cx="3389069" cy="923330"/>
+            <a:off x="3302449" y="99996"/>
+            <a:ext cx="5587107" cy="923330"/>
           </a:xfrm>
           <a:prstGeom prst="rect">
             <a:avLst/>
@@ -13347,36 +14306,159 @@
           </a:bodyPr>
           <a:lstStyle/>
           <a:p>
-            <a:pPr algn="ctr"/>
-            <a:r>
-              <a:rPr lang="es-ES" sz="5400" b="0" cap="none" spc="0" dirty="0" err="1">
+            <a:pPr marL="0" marR="0" lvl="0" indent="0" algn="ctr" defTabSz="457200" rtl="0" eaLnBrk="1" fontAlgn="auto" latinLnBrk="0" hangingPunct="1">
+              <a:lnSpc>
+                <a:spcPct val="100000"/>
+              </a:lnSpc>
+              <a:spcBef>
+                <a:spcPts val="0"/>
+              </a:spcBef>
+              <a:spcAft>
+                <a:spcPts val="0"/>
+              </a:spcAft>
+              <a:buClrTx/>
+              <a:buSzTx/>
+              <a:buFontTx/>
+              <a:buNone/>
+              <a:tabLst/>
+              <a:defRPr/>
+            </a:pPr>
+            <a:r>
+              <a:rPr kumimoji="0" lang="es-ES" sz="5400" b="0" i="0" u="none" strike="noStrike" kern="1200" cap="none" spc="0" normalizeH="0" baseline="0" noProof="0" dirty="0" err="1">
                 <a:ln w="0"/>
                 <a:solidFill>
-                  <a:schemeClr val="tx1"/>
+                  <a:prstClr val="white"/>
                 </a:solidFill>
                 <a:effectLst>
                   <a:outerShdw blurRad="38100" dist="19050" dir="2700000" algn="tl" rotWithShape="0">
-                    <a:schemeClr val="dk1">
+                    <a:prstClr val="black">
                       <a:alpha val="40000"/>
-                    </a:schemeClr>
+                    </a:prstClr>
                   </a:outerShdw>
                 </a:effectLst>
+                <a:uLnTx/>
+                <a:uFillTx/>
+                <a:latin typeface="Tw Cen MT" panose="020B0602020104020603"/>
+                <a:ea typeface="+mn-ea"/>
+                <a:cs typeface="+mn-cs"/>
               </a:rPr>
-              <a:t>Conclusions</a:t>
-            </a:r>
-            <a:r>
-              <a:rPr lang="es-ES" sz="5400" b="0" cap="none" spc="0" dirty="0">
+              <a:t>Path</a:t>
+            </a:r>
+            <a:r>
+              <a:rPr kumimoji="0" lang="es-ES" sz="5400" b="0" i="0" u="none" strike="noStrike" kern="1200" cap="none" spc="0" normalizeH="0" baseline="0" noProof="0" dirty="0">
                 <a:ln w="0"/>
                 <a:solidFill>
-                  <a:schemeClr val="tx1"/>
+                  <a:prstClr val="white"/>
                 </a:solidFill>
                 <a:effectLst>
                   <a:outerShdw blurRad="38100" dist="19050" dir="2700000" algn="tl" rotWithShape="0">
-                    <a:schemeClr val="dk1">
+                    <a:prstClr val="black">
                       <a:alpha val="40000"/>
-                    </a:schemeClr>
+                    </a:prstClr>
                   </a:outerShdw>
                 </a:effectLst>
+                <a:uLnTx/>
+                <a:uFillTx/>
+                <a:latin typeface="Tw Cen MT" panose="020B0602020104020603"/>
+                <a:ea typeface="+mn-ea"/>
+                <a:cs typeface="+mn-cs"/>
+              </a:rPr>
+              <a:t> </a:t>
+            </a:r>
+            <a:r>
+              <a:rPr kumimoji="0" lang="es-ES" sz="5400" b="0" i="0" u="none" strike="noStrike" kern="1200" cap="none" spc="0" normalizeH="0" baseline="0" noProof="0" dirty="0" err="1">
+                <a:ln w="0"/>
+                <a:solidFill>
+                  <a:prstClr val="white"/>
+                </a:solidFill>
+                <a:effectLst>
+                  <a:outerShdw blurRad="38100" dist="19050" dir="2700000" algn="tl" rotWithShape="0">
+                    <a:prstClr val="black">
+                      <a:alpha val="40000"/>
+                    </a:prstClr>
+                  </a:outerShdw>
+                </a:effectLst>
+                <a:uLnTx/>
+                <a:uFillTx/>
+                <a:latin typeface="Tw Cen MT" panose="020B0602020104020603"/>
+                <a:ea typeface="+mn-ea"/>
+                <a:cs typeface="+mn-cs"/>
+              </a:rPr>
+              <a:t>to</a:t>
+            </a:r>
+            <a:r>
+              <a:rPr kumimoji="0" lang="es-ES" sz="5400" b="0" i="0" u="none" strike="noStrike" kern="1200" cap="none" spc="0" normalizeH="0" baseline="0" noProof="0" dirty="0">
+                <a:ln w="0"/>
+                <a:solidFill>
+                  <a:prstClr val="white"/>
+                </a:solidFill>
+                <a:effectLst>
+                  <a:outerShdw blurRad="38100" dist="19050" dir="2700000" algn="tl" rotWithShape="0">
+                    <a:prstClr val="black">
+                      <a:alpha val="40000"/>
+                    </a:prstClr>
+                  </a:outerShdw>
+                </a:effectLst>
+                <a:uLnTx/>
+                <a:uFillTx/>
+                <a:latin typeface="Tw Cen MT" panose="020B0602020104020603"/>
+                <a:ea typeface="+mn-ea"/>
+                <a:cs typeface="+mn-cs"/>
+              </a:rPr>
+              <a:t> </a:t>
+            </a:r>
+            <a:r>
+              <a:rPr lang="es-ES" sz="5400" dirty="0">
+                <a:ln w="0"/>
+                <a:solidFill>
+                  <a:prstClr val="white"/>
+                </a:solidFill>
+                <a:effectLst>
+                  <a:outerShdw blurRad="38100" dist="19050" dir="2700000" algn="tl" rotWithShape="0">
+                    <a:prstClr val="black">
+                      <a:alpha val="40000"/>
+                    </a:prstClr>
+                  </a:outerShdw>
+                </a:effectLst>
+                <a:latin typeface="Tw Cen MT" panose="020B0602020104020603"/>
+              </a:rPr>
+              <a:t>Real </a:t>
+            </a:r>
+            <a:r>
+              <a:rPr lang="es-ES" sz="5400" dirty="0" err="1">
+                <a:ln w="0"/>
+                <a:solidFill>
+                  <a:prstClr val="white"/>
+                </a:solidFill>
+                <a:effectLst>
+                  <a:outerShdw blurRad="38100" dist="19050" dir="2700000" algn="tl" rotWithShape="0">
+                    <a:prstClr val="black">
+                      <a:alpha val="40000"/>
+                    </a:prstClr>
+                  </a:outerShdw>
+                </a:effectLst>
+                <a:latin typeface="Tw Cen MT" panose="020B0602020104020603"/>
+              </a:rPr>
+              <a:t>World</a:t>
+            </a:r>
+            <a:r>
+              <a:rPr kumimoji="0" lang="es-ES" sz="5400" b="0" i="0" u="none" strike="noStrike" kern="1200" cap="none" spc="0" normalizeH="0" baseline="0" noProof="0" dirty="0">
+                <a:ln w="0"/>
+                <a:solidFill>
+                  <a:prstClr val="white"/>
+                </a:solidFill>
+                <a:effectLst>
+                  <a:outerShdw blurRad="38100" dist="19050" dir="2700000" algn="tl" rotWithShape="0">
+                    <a:prstClr val="black">
+                      <a:alpha val="40000"/>
+                    </a:prstClr>
+                  </a:outerShdw>
+                </a:effectLst>
+                <a:uLnTx/>
+                <a:uFillTx/>
+                <a:latin typeface="Tw Cen MT" panose="020B0602020104020603"/>
+                <a:ea typeface="+mn-ea"/>
+                <a:cs typeface="+mn-cs"/>
               </a:rPr>
               <a:t>:</a:t>
             </a:r>
@@ -13410,28 +14492,520 @@
           <a:bodyPr wrap="square" lIns="0" tIns="0" rIns="0" bIns="0" rtlCol="0" anchor="ctr"/>
           <a:lstStyle/>
           <a:p>
-            <a:pPr marL="0" indent="0">
-              <a:buNone/>
+            <a:pPr marL="0" marR="0" lvl="0" indent="0" algn="l" defTabSz="457200" rtl="0" eaLnBrk="1" fontAlgn="auto" latinLnBrk="0" hangingPunct="1">
+              <a:lnSpc>
+                <a:spcPct val="100000"/>
+              </a:lnSpc>
+              <a:spcBef>
+                <a:spcPts val="0"/>
+              </a:spcBef>
+              <a:spcAft>
+                <a:spcPts val="0"/>
+              </a:spcAft>
+              <a:buClrTx/>
+              <a:buSzTx/>
+              <a:buFontTx/>
+              <a:buNone/>
+              <a:tabLst/>
+              <a:defRPr/>
             </a:pPr>
             <a:r>
-              <a:rPr lang="en-US" sz="5400" b="1" dirty="0">
+              <a:rPr kumimoji="0" lang="en-US" sz="5400" b="1" i="0" u="none" strike="noStrike" kern="1200" cap="none" spc="0" normalizeH="0" baseline="0" noProof="0" dirty="0">
+                <a:ln>
+                  <a:noFill/>
+                </a:ln>
                 <a:solidFill>
                   <a:srgbClr val="E07B39"/>
                 </a:solidFill>
+                <a:effectLst/>
+                <a:uLnTx/>
+                <a:uFillTx/>
                 <a:latin typeface="Cambria" pitchFamily="34" charset="0"/>
                 <a:ea typeface="Cambria" pitchFamily="34" charset="-122"/>
                 <a:cs typeface="Cambria" pitchFamily="34" charset="-120"/>
               </a:rPr>
               <a:t>07</a:t>
             </a:r>
-            <a:endParaRPr lang="en-US" sz="5400" dirty="0"/>
+            <a:endParaRPr kumimoji="0" lang="en-US" sz="5400" b="0" i="0" u="none" strike="noStrike" kern="1200" cap="none" spc="0" normalizeH="0" baseline="0" noProof="0" dirty="0">
+              <a:ln>
+                <a:noFill/>
+              </a:ln>
+              <a:solidFill>
+                <a:prstClr val="white"/>
+              </a:solidFill>
+              <a:effectLst/>
+              <a:uLnTx/>
+              <a:uFillTx/>
+              <a:latin typeface="Tw Cen MT" panose="020B0602020104020603"/>
+              <a:ea typeface="+mn-ea"/>
+              <a:cs typeface="+mn-cs"/>
+            </a:endParaRPr>
+          </a:p>
+        </p:txBody>
+      </p:sp>
+      <p:sp>
+        <p:nvSpPr>
+          <p:cNvPr id="904" name="CopiedShape904">
+            <a:extLst>
+              <a:ext uri="{FF2B5EF4-FFF2-40B4-BE49-F238E27FC236}">
+                <a16:creationId xmlns:a16="http://schemas.microsoft.com/office/drawing/2014/main" id="{D08C85EE-F8D7-88EB-4F99-BB55DCDDCB8E}"/>
+              </a:ext>
+            </a:extLst>
+          </p:cNvPr>
+          <p:cNvSpPr txBox="1"/>
+          <p:nvPr/>
+        </p:nvSpPr>
+        <p:spPr>
+          <a:xfrm>
+            <a:off x="1651458" y="1124832"/>
+            <a:ext cx="8889077" cy="369332"/>
+          </a:xfrm>
+          <a:prstGeom prst="rect">
+            <a:avLst/>
+          </a:prstGeom>
+          <a:noFill/>
+        </p:spPr>
+        <p:txBody>
+          <a:bodyPr wrap="square" lIns="91440" tIns="45720" rIns="91440" bIns="45720" rtlCol="0" anchor="t">
+            <a:spAutoFit/>
+          </a:bodyPr>
+          <a:lstStyle/>
+          <a:p>
+            <a:pPr marL="0" marR="0" lvl="0" indent="0" algn="ctr" defTabSz="457200" rtl="0" eaLnBrk="1" fontAlgn="auto" latinLnBrk="0" hangingPunct="1">
+              <a:lnSpc>
+                <a:spcPct val="100000"/>
+              </a:lnSpc>
+              <a:spcBef>
+                <a:spcPts val="0"/>
+              </a:spcBef>
+              <a:spcAft>
+                <a:spcPts val="0"/>
+              </a:spcAft>
+              <a:buClrTx/>
+              <a:buSzTx/>
+              <a:buFontTx/>
+              <a:buNone/>
+              <a:tabLst/>
+              <a:defRPr/>
+            </a:pPr>
+            <a:r>
+              <a:rPr kumimoji="0" lang="en-US" sz="1800" b="0" i="0" u="none" strike="noStrike" kern="1200" cap="none" spc="0" normalizeH="0" baseline="0" noProof="0" dirty="0">
+                <a:ln>
+                  <a:noFill/>
+                </a:ln>
+                <a:solidFill>
+                  <a:prstClr val="white"/>
+                </a:solidFill>
+                <a:effectLst/>
+                <a:highlight>
+                  <a:srgbClr val="000000"/>
+                </a:highlight>
+                <a:uLnTx/>
+                <a:uFillTx/>
+                <a:latin typeface="Tw Cen MT" panose="020B0602020104020603"/>
+                <a:ea typeface="+mn-ea"/>
+                <a:cs typeface="+mn-cs"/>
+              </a:rPr>
+              <a:t>From Simulator to Real Production</a:t>
+            </a:r>
+            <a:endParaRPr kumimoji="0" lang="es-ES" sz="1800" b="0" i="0" u="none" strike="noStrike" kern="1200" cap="none" spc="0" normalizeH="0" baseline="0" noProof="0" dirty="0">
+              <a:ln>
+                <a:noFill/>
+              </a:ln>
+              <a:solidFill>
+                <a:prstClr val="white"/>
+              </a:solidFill>
+              <a:effectLst/>
+              <a:uLnTx/>
+              <a:uFillTx/>
+              <a:latin typeface="Tw Cen MT" panose="020B0602020104020603"/>
+              <a:ea typeface="+mn-ea"/>
+              <a:cs typeface="+mn-cs"/>
+            </a:endParaRPr>
+          </a:p>
+        </p:txBody>
+      </p:sp>
+      <p:sp>
+        <p:nvSpPr>
+          <p:cNvPr id="905" name="CopiedShape905">
+            <a:extLst>
+              <a:ext uri="{FF2B5EF4-FFF2-40B4-BE49-F238E27FC236}">
+                <a16:creationId xmlns:a16="http://schemas.microsoft.com/office/drawing/2014/main" id="{01B14448-2732-066A-4BB4-225F8ABE103F}"/>
+              </a:ext>
+            </a:extLst>
+          </p:cNvPr>
+          <p:cNvSpPr txBox="1"/>
+          <p:nvPr/>
+        </p:nvSpPr>
+        <p:spPr>
+          <a:xfrm>
+            <a:off x="1844900" y="2011583"/>
+            <a:ext cx="8502192" cy="1477328"/>
+          </a:xfrm>
+          <a:prstGeom prst="rect">
+            <a:avLst/>
+          </a:prstGeom>
+          <a:noFill/>
+        </p:spPr>
+        <p:txBody>
+          <a:bodyPr wrap="square" lIns="91440" tIns="45720" rIns="91440" bIns="45720" rtlCol="0" anchor="t">
+            <a:spAutoFit/>
+          </a:bodyPr>
+          <a:lstStyle/>
+          <a:p>
+            <a:pPr marL="285750" marR="0" lvl="0" indent="-285750" algn="l" defTabSz="457200" rtl="0" eaLnBrk="1" fontAlgn="auto" latinLnBrk="0" hangingPunct="1">
+              <a:lnSpc>
+                <a:spcPct val="100000"/>
+              </a:lnSpc>
+              <a:spcBef>
+                <a:spcPts val="0"/>
+              </a:spcBef>
+              <a:spcAft>
+                <a:spcPts val="0"/>
+              </a:spcAft>
+              <a:buClrTx/>
+              <a:buSzTx/>
+              <a:buFontTx/>
+              <a:buAutoNum type="arabicPeriod"/>
+              <a:tabLst/>
+              <a:defRPr/>
+            </a:pPr>
+            <a:r>
+              <a:rPr kumimoji="0" lang="en-US" sz="1800" b="0" i="0" u="none" strike="noStrike" kern="1200" cap="none" spc="0" normalizeH="0" baseline="0" noProof="0" dirty="0">
+                <a:ln>
+                  <a:noFill/>
+                </a:ln>
+                <a:solidFill>
+                  <a:prstClr val="white"/>
+                </a:solidFill>
+                <a:effectLst/>
+                <a:uLnTx/>
+                <a:uFillTx/>
+                <a:latin typeface="Tw Cen MT" panose="020B0602020104020603"/>
+                <a:ea typeface="+mn-ea"/>
+                <a:cs typeface="+mn-cs"/>
+              </a:rPr>
+              <a:t>Machine (PLC) exports CSV periodically to the Factory Network to retrain the model.</a:t>
+            </a:r>
+          </a:p>
+          <a:p>
+            <a:pPr marL="285750" indent="-285750">
+              <a:buFontTx/>
+              <a:buAutoNum type="arabicPeriod"/>
+            </a:pPr>
+            <a:r>
+              <a:rPr kumimoji="0" lang="en-US" b="0" i="0" u="none" strike="noStrike" kern="1200" cap="none" spc="0" normalizeH="0" baseline="0" noProof="0" dirty="0">
+                <a:ln>
+                  <a:noFill/>
+                </a:ln>
+                <a:solidFill>
+                  <a:prstClr val="white"/>
+                </a:solidFill>
+                <a:effectLst/>
+                <a:uLnTx/>
+                <a:uFillTx/>
+                <a:latin typeface="Tw Cen MT" panose="020B0602020104020603"/>
+                <a:ea typeface="+mn-ea"/>
+                <a:cs typeface="+mn-cs"/>
+              </a:rPr>
+              <a:t>Upload a new model if the Precision beats the old model on the same test set.</a:t>
+            </a:r>
+          </a:p>
+          <a:p>
+            <a:pPr marL="285750" indent="-285750">
+              <a:buFontTx/>
+              <a:buAutoNum type="arabicPeriod"/>
+            </a:pPr>
+            <a:r>
+              <a:rPr kumimoji="0" lang="en-US" b="0" i="0" u="none" strike="noStrike" kern="1200" cap="none" spc="0" normalizeH="0" baseline="0" noProof="0" dirty="0">
+                <a:ln>
+                  <a:noFill/>
+                </a:ln>
+                <a:solidFill>
+                  <a:prstClr val="white"/>
+                </a:solidFill>
+                <a:effectLst/>
+                <a:uLnTx/>
+                <a:uFillTx/>
+                <a:latin typeface="Tw Cen MT" panose="020B0602020104020603"/>
+                <a:ea typeface="+mn-ea"/>
+                <a:cs typeface="+mn-cs"/>
+              </a:rPr>
+              <a:t>Validate with Maintenance engineers to get more data about failure reasons.</a:t>
+            </a:r>
+          </a:p>
+          <a:p>
+            <a:pPr marL="285750" indent="-285750">
+              <a:buFontTx/>
+              <a:buAutoNum type="arabicPeriod"/>
+            </a:pPr>
+            <a:endParaRPr lang="en-US" dirty="0">
+              <a:solidFill>
+                <a:prstClr val="white"/>
+              </a:solidFill>
+              <a:latin typeface="Tw Cen MT" panose="020B0602020104020603"/>
+            </a:endParaRPr>
+          </a:p>
+          <a:p>
+            <a:pPr marL="742950" marR="0" lvl="1" indent="-285750" algn="l" defTabSz="457200" rtl="0" eaLnBrk="1" fontAlgn="auto" latinLnBrk="0" hangingPunct="1">
+              <a:lnSpc>
+                <a:spcPct val="100000"/>
+              </a:lnSpc>
+              <a:spcBef>
+                <a:spcPts val="0"/>
+              </a:spcBef>
+              <a:spcAft>
+                <a:spcPts val="0"/>
+              </a:spcAft>
+              <a:buClrTx/>
+              <a:buSzTx/>
+              <a:buFontTx/>
+              <a:buAutoNum type="arabicPeriod"/>
+              <a:tabLst/>
+              <a:defRPr/>
+            </a:pPr>
+            <a:endParaRPr kumimoji="0" lang="en-US" sz="1800" b="0" i="0" u="none" strike="noStrike" kern="1200" cap="none" spc="0" normalizeH="0" baseline="0" noProof="0" dirty="0">
+              <a:ln>
+                <a:noFill/>
+              </a:ln>
+              <a:solidFill>
+                <a:prstClr val="white"/>
+              </a:solidFill>
+              <a:effectLst/>
+              <a:uLnTx/>
+              <a:uFillTx/>
+              <a:latin typeface="Tw Cen MT" panose="020B0602020104020603"/>
+              <a:ea typeface="+mn-ea"/>
+              <a:cs typeface="+mn-cs"/>
+            </a:endParaRPr>
+          </a:p>
+        </p:txBody>
+      </p:sp>
+      <p:sp>
+        <p:nvSpPr>
+          <p:cNvPr id="2" name="CopiedShape905">
+            <a:extLst>
+              <a:ext uri="{FF2B5EF4-FFF2-40B4-BE49-F238E27FC236}">
+                <a16:creationId xmlns:a16="http://schemas.microsoft.com/office/drawing/2014/main" id="{F16A3EAE-56B9-5791-015C-2258B3337A50}"/>
+              </a:ext>
+            </a:extLst>
+          </p:cNvPr>
+          <p:cNvSpPr txBox="1"/>
+          <p:nvPr/>
+        </p:nvSpPr>
+        <p:spPr>
+          <a:xfrm>
+            <a:off x="1844900" y="3667663"/>
+            <a:ext cx="8502192" cy="2585323"/>
+          </a:xfrm>
+          <a:prstGeom prst="rect">
+            <a:avLst/>
+          </a:prstGeom>
+          <a:noFill/>
+        </p:spPr>
+        <p:txBody>
+          <a:bodyPr wrap="square" lIns="91440" tIns="45720" rIns="91440" bIns="45720" rtlCol="0" anchor="t">
+            <a:spAutoFit/>
+          </a:bodyPr>
+          <a:lstStyle/>
+          <a:p>
+            <a:pPr marL="285750" marR="0" lvl="0" indent="-285750" algn="l" defTabSz="457200" rtl="0" eaLnBrk="1" fontAlgn="auto" latinLnBrk="0" hangingPunct="1">
+              <a:lnSpc>
+                <a:spcPct val="100000"/>
+              </a:lnSpc>
+              <a:spcBef>
+                <a:spcPts val="0"/>
+              </a:spcBef>
+              <a:spcAft>
+                <a:spcPts val="0"/>
+              </a:spcAft>
+              <a:buClrTx/>
+              <a:buSzTx/>
+              <a:buFontTx/>
+              <a:buAutoNum type="arabicPeriod"/>
+              <a:tabLst/>
+              <a:defRPr/>
+            </a:pPr>
+            <a:r>
+              <a:rPr kumimoji="0" lang="en-US" sz="1800" b="0" i="0" u="none" strike="noStrike" kern="1200" cap="none" spc="0" normalizeH="0" baseline="0" noProof="0" dirty="0">
+                <a:ln>
+                  <a:noFill/>
+                </a:ln>
+                <a:solidFill>
+                  <a:prstClr val="white"/>
+                </a:solidFill>
+                <a:effectLst/>
+                <a:uLnTx/>
+                <a:uFillTx/>
+                <a:latin typeface="Tw Cen MT" panose="020B0602020104020603"/>
+                <a:ea typeface="+mn-ea"/>
+                <a:cs typeface="+mn-cs"/>
+              </a:rPr>
+              <a:t>Work with 2 different Models:</a:t>
+            </a:r>
+          </a:p>
+          <a:p>
+            <a:pPr marL="742950" lvl="1" indent="-285750">
+              <a:buFontTx/>
+              <a:buAutoNum type="arabicPeriod"/>
+            </a:pPr>
+            <a:r>
+              <a:rPr kumimoji="0" lang="en-US" b="0" i="0" u="none" strike="noStrike" kern="1200" cap="none" spc="0" normalizeH="0" baseline="0" noProof="0" dirty="0">
+                <a:ln>
+                  <a:noFill/>
+                </a:ln>
+                <a:solidFill>
+                  <a:prstClr val="white"/>
+                </a:solidFill>
+                <a:effectLst/>
+                <a:uLnTx/>
+                <a:uFillTx/>
+                <a:latin typeface="Tw Cen MT" panose="020B0602020104020603"/>
+                <a:ea typeface="+mn-ea"/>
+                <a:cs typeface="+mn-cs"/>
+              </a:rPr>
+              <a:t>Supervised Model: [Already Built]</a:t>
+            </a:r>
+          </a:p>
+          <a:p>
+            <a:pPr marL="1200150" lvl="2" indent="-285750">
+              <a:buFontTx/>
+              <a:buAutoNum type="arabicPeriod"/>
+            </a:pPr>
+            <a:r>
+              <a:rPr lang="en-US" dirty="0">
+                <a:solidFill>
+                  <a:prstClr val="white"/>
+                </a:solidFill>
+                <a:latin typeface="Tw Cen MT" panose="020B0602020104020603"/>
+              </a:rPr>
+              <a:t>It learns with known failures.</a:t>
+            </a:r>
+          </a:p>
+          <a:p>
+            <a:pPr marL="742950" lvl="1" indent="-285750">
+              <a:buFontTx/>
+              <a:buAutoNum type="arabicPeriod"/>
+            </a:pPr>
+            <a:r>
+              <a:rPr kumimoji="0" lang="en-US" b="0" i="0" u="none" strike="noStrike" kern="1200" cap="none" spc="0" normalizeH="0" baseline="0" noProof="0" dirty="0">
+                <a:ln>
+                  <a:noFill/>
+                </a:ln>
+                <a:solidFill>
+                  <a:prstClr val="white"/>
+                </a:solidFill>
+                <a:effectLst/>
+                <a:uLnTx/>
+                <a:uFillTx/>
+                <a:latin typeface="Tw Cen MT" panose="020B0602020104020603"/>
+                <a:ea typeface="+mn-ea"/>
+                <a:cs typeface="+mn-cs"/>
+              </a:rPr>
+              <a:t>Unsupervised Model:</a:t>
+            </a:r>
+          </a:p>
+          <a:p>
+            <a:pPr marL="1200150" lvl="2" indent="-285750">
+              <a:buFontTx/>
+              <a:buAutoNum type="arabicPeriod"/>
+            </a:pPr>
+            <a:r>
+              <a:rPr lang="en-US" dirty="0">
+                <a:solidFill>
+                  <a:prstClr val="white"/>
+                </a:solidFill>
+                <a:latin typeface="Tw Cen MT" panose="020B0602020104020603"/>
+              </a:rPr>
+              <a:t>Learns the normal healthy behavior.</a:t>
+            </a:r>
+          </a:p>
+          <a:p>
+            <a:pPr marL="285750" indent="-285750">
+              <a:buFontTx/>
+              <a:buAutoNum type="arabicPeriod"/>
+            </a:pPr>
+            <a:r>
+              <a:rPr kumimoji="0" lang="en-US" b="0" i="0" u="none" strike="noStrike" kern="1200" cap="none" spc="0" normalizeH="0" baseline="0" noProof="0" dirty="0">
+                <a:ln>
+                  <a:noFill/>
+                </a:ln>
+                <a:solidFill>
+                  <a:prstClr val="white"/>
+                </a:solidFill>
+                <a:effectLst/>
+                <a:uLnTx/>
+                <a:uFillTx/>
+                <a:latin typeface="Tw Cen MT" panose="020B0602020104020603"/>
+                <a:ea typeface="+mn-ea"/>
+                <a:cs typeface="+mn-cs"/>
+              </a:rPr>
+              <a:t>Combining both could detect failures than the supervised model alone would miss.</a:t>
+            </a:r>
+          </a:p>
+          <a:p>
+            <a:pPr marL="285750" indent="-285750">
+              <a:buFontTx/>
+              <a:buAutoNum type="arabicPeriod"/>
+            </a:pPr>
+            <a:r>
+              <a:rPr lang="en-US" dirty="0" err="1">
+                <a:solidFill>
+                  <a:prstClr val="white"/>
+                </a:solidFill>
+                <a:latin typeface="Tw Cen MT" panose="020B0602020104020603"/>
+              </a:rPr>
+              <a:t>GenAI</a:t>
+            </a:r>
+            <a:r>
+              <a:rPr lang="en-US" dirty="0">
+                <a:solidFill>
+                  <a:prstClr val="white"/>
+                </a:solidFill>
+                <a:latin typeface="Tw Cen MT" panose="020B0602020104020603"/>
+              </a:rPr>
+              <a:t> will have all the manual documentation for each device in the Production Line, so Maintenance Dept could ask how to repair the failure.</a:t>
+            </a:r>
+          </a:p>
+          <a:p>
+            <a:pPr marL="742950" marR="0" lvl="1" indent="-285750" algn="l" defTabSz="457200" rtl="0" eaLnBrk="1" fontAlgn="auto" latinLnBrk="0" hangingPunct="1">
+              <a:lnSpc>
+                <a:spcPct val="100000"/>
+              </a:lnSpc>
+              <a:spcBef>
+                <a:spcPts val="0"/>
+              </a:spcBef>
+              <a:spcAft>
+                <a:spcPts val="0"/>
+              </a:spcAft>
+              <a:buClrTx/>
+              <a:buSzTx/>
+              <a:buFontTx/>
+              <a:buAutoNum type="arabicPeriod"/>
+              <a:tabLst/>
+              <a:defRPr/>
+            </a:pPr>
+            <a:endParaRPr kumimoji="0" lang="en-US" sz="1800" b="0" i="0" u="none" strike="noStrike" kern="1200" cap="none" spc="0" normalizeH="0" baseline="0" noProof="0" dirty="0">
+              <a:ln>
+                <a:noFill/>
+              </a:ln>
+              <a:solidFill>
+                <a:prstClr val="white"/>
+              </a:solidFill>
+              <a:effectLst/>
+              <a:uLnTx/>
+              <a:uFillTx/>
+              <a:latin typeface="Tw Cen MT" panose="020B0602020104020603"/>
+              <a:ea typeface="+mn-ea"/>
+              <a:cs typeface="+mn-cs"/>
+            </a:endParaRPr>
           </a:p>
         </p:txBody>
       </p:sp>
     </p:spTree>
     <p:extLst>
       <p:ext uri="{BB962C8B-B14F-4D97-AF65-F5344CB8AC3E}">
-        <p14:creationId xmlns:p14="http://schemas.microsoft.com/office/powerpoint/2010/main" val="2933236575"/>
+        <p14:creationId xmlns:p14="http://schemas.microsoft.com/office/powerpoint/2010/main" val="2130248794"/>
       </p:ext>
     </p:extLst>
   </p:cSld>
@@ -13442,6 +15016,636 @@
 </file>
 
 <file path=ppt/slides/slide13.xml><?xml version="1.0" encoding="utf-8"?>
+<p:sld xmlns:a="http://schemas.openxmlformats.org/drawingml/2006/main" xmlns:r="http://schemas.openxmlformats.org/officeDocument/2006/relationships" xmlns:p="http://schemas.openxmlformats.org/presentationml/2006/main">
+  <p:cSld>
+    <p:spTree>
+      <p:nvGrpSpPr>
+        <p:cNvPr id="1" name=""/>
+        <p:cNvGrpSpPr/>
+        <p:nvPr/>
+      </p:nvGrpSpPr>
+      <p:grpSpPr>
+        <a:xfrm>
+          <a:off x="0" y="0"/>
+          <a:ext cx="0" cy="0"/>
+          <a:chOff x="0" y="0"/>
+          <a:chExt cx="0" cy="0"/>
+        </a:xfrm>
+      </p:grpSpPr>
+      <p:pic>
+        <p:nvPicPr>
+          <p:cNvPr id="1026" name="Picture 2" descr="Learn Web Development, Data Analytics &amp; UX/UI Design | Ironhack">
+            <a:extLst>
+              <a:ext uri="{FF2B5EF4-FFF2-40B4-BE49-F238E27FC236}">
+                <a16:creationId xmlns:a16="http://schemas.microsoft.com/office/drawing/2014/main" id="{5E01E9BE-6179-4E9B-AFDA-54077CD7ED06}"/>
+              </a:ext>
+            </a:extLst>
+          </p:cNvPr>
+          <p:cNvPicPr>
+            <a:picLocks noChangeAspect="1" noChangeArrowheads="1"/>
+          </p:cNvPicPr>
+          <p:nvPr/>
+        </p:nvPicPr>
+        <p:blipFill>
+          <a:blip r:embed="rId2">
+            <a:extLst>
+              <a:ext uri="{28A0092B-C50C-407E-A947-70E740481C1C}">
+                <a14:useLocalDpi xmlns:a14="http://schemas.microsoft.com/office/drawing/2010/main" val="0"/>
+              </a:ext>
+            </a:extLst>
+          </a:blip>
+          <a:srcRect/>
+          <a:stretch>
+            <a:fillRect/>
+          </a:stretch>
+        </p:blipFill>
+        <p:spPr bwMode="auto">
+          <a:xfrm>
+            <a:off x="11205556" y="85897"/>
+            <a:ext cx="867122" cy="937429"/>
+          </a:xfrm>
+          <a:prstGeom prst="rect">
+            <a:avLst/>
+          </a:prstGeom>
+          <a:noFill/>
+          <a:extLst>
+            <a:ext uri="{909E8E84-426E-40DD-AFC4-6F175D3DCCD1}">
+              <a14:hiddenFill xmlns:a14="http://schemas.microsoft.com/office/drawing/2010/main">
+                <a:solidFill>
+                  <a:srgbClr val="FFFFFF"/>
+                </a:solidFill>
+              </a14:hiddenFill>
+            </a:ext>
+          </a:extLst>
+        </p:spPr>
+      </p:pic>
+      <p:sp>
+        <p:nvSpPr>
+          <p:cNvPr id="11" name="Rectángulo 10">
+            <a:extLst>
+              <a:ext uri="{FF2B5EF4-FFF2-40B4-BE49-F238E27FC236}">
+                <a16:creationId xmlns:a16="http://schemas.microsoft.com/office/drawing/2014/main" id="{91E00118-B49C-40D5-9A2B-B960249F409A}"/>
+              </a:ext>
+            </a:extLst>
+          </p:cNvPr>
+          <p:cNvSpPr/>
+          <p:nvPr/>
+        </p:nvSpPr>
+        <p:spPr>
+          <a:xfrm>
+            <a:off x="1393766" y="1023326"/>
+            <a:ext cx="9404465" cy="58189"/>
+          </a:xfrm>
+          <a:prstGeom prst="rect">
+            <a:avLst/>
+          </a:prstGeom>
+          <a:solidFill>
+            <a:schemeClr val="tx1"/>
+          </a:solidFill>
+          <a:ln>
+            <a:noFill/>
+          </a:ln>
+        </p:spPr>
+        <p:style>
+          <a:lnRef idx="2">
+            <a:schemeClr val="accent1">
+              <a:shade val="50000"/>
+            </a:schemeClr>
+          </a:lnRef>
+          <a:fillRef idx="1">
+            <a:schemeClr val="accent1"/>
+          </a:fillRef>
+          <a:effectRef idx="0">
+            <a:schemeClr val="accent1"/>
+          </a:effectRef>
+          <a:fontRef idx="minor">
+            <a:schemeClr val="lt1"/>
+          </a:fontRef>
+        </p:style>
+        <p:txBody>
+          <a:bodyPr rtlCol="0" anchor="ctr"/>
+          <a:lstStyle/>
+          <a:p>
+            <a:pPr marL="0" marR="0" lvl="0" indent="0" algn="ctr" defTabSz="457200" rtl="0" eaLnBrk="1" fontAlgn="auto" latinLnBrk="0" hangingPunct="1">
+              <a:lnSpc>
+                <a:spcPct val="100000"/>
+              </a:lnSpc>
+              <a:spcBef>
+                <a:spcPts val="0"/>
+              </a:spcBef>
+              <a:spcAft>
+                <a:spcPts val="0"/>
+              </a:spcAft>
+              <a:buClrTx/>
+              <a:buSzTx/>
+              <a:buFontTx/>
+              <a:buNone/>
+              <a:tabLst/>
+              <a:defRPr/>
+            </a:pPr>
+            <a:endParaRPr kumimoji="0" lang="ca-ES" sz="1800" b="0" i="0" u="none" strike="noStrike" kern="1200" cap="none" spc="0" normalizeH="0" baseline="0" noProof="0">
+              <a:ln>
+                <a:noFill/>
+              </a:ln>
+              <a:solidFill>
+                <a:prstClr val="white"/>
+              </a:solidFill>
+              <a:effectLst/>
+              <a:uLnTx/>
+              <a:uFillTx/>
+              <a:latin typeface="Tw Cen MT" panose="020B0602020104020603"/>
+              <a:ea typeface="+mn-ea"/>
+              <a:cs typeface="+mn-cs"/>
+            </a:endParaRPr>
+          </a:p>
+        </p:txBody>
+      </p:sp>
+      <p:sp>
+        <p:nvSpPr>
+          <p:cNvPr id="14" name="Rectángulo 13">
+            <a:extLst>
+              <a:ext uri="{FF2B5EF4-FFF2-40B4-BE49-F238E27FC236}">
+                <a16:creationId xmlns:a16="http://schemas.microsoft.com/office/drawing/2014/main" id="{8E858A2A-0C33-418C-849C-53BFDE89A632}"/>
+              </a:ext>
+            </a:extLst>
+          </p:cNvPr>
+          <p:cNvSpPr/>
+          <p:nvPr/>
+        </p:nvSpPr>
+        <p:spPr>
+          <a:xfrm>
+            <a:off x="4426827" y="99996"/>
+            <a:ext cx="3338351" cy="923330"/>
+          </a:xfrm>
+          <a:prstGeom prst="rect">
+            <a:avLst/>
+          </a:prstGeom>
+          <a:noFill/>
+        </p:spPr>
+        <p:txBody>
+          <a:bodyPr wrap="none" lIns="91440" tIns="45720" rIns="91440" bIns="45720">
+            <a:spAutoFit/>
+          </a:bodyPr>
+          <a:lstStyle/>
+          <a:p>
+            <a:pPr marL="0" marR="0" lvl="0" indent="0" algn="ctr" defTabSz="457200" rtl="0" eaLnBrk="1" fontAlgn="auto" latinLnBrk="0" hangingPunct="1">
+              <a:lnSpc>
+                <a:spcPct val="100000"/>
+              </a:lnSpc>
+              <a:spcBef>
+                <a:spcPts val="0"/>
+              </a:spcBef>
+              <a:spcAft>
+                <a:spcPts val="0"/>
+              </a:spcAft>
+              <a:buClrTx/>
+              <a:buSzTx/>
+              <a:buFontTx/>
+              <a:buNone/>
+              <a:tabLst/>
+              <a:defRPr/>
+            </a:pPr>
+            <a:r>
+              <a:rPr kumimoji="0" lang="es-ES" sz="5400" b="0" i="0" u="none" strike="noStrike" kern="1200" cap="none" spc="0" normalizeH="0" baseline="0" noProof="0" dirty="0" err="1">
+                <a:ln w="0"/>
+                <a:solidFill>
+                  <a:prstClr val="white"/>
+                </a:solidFill>
+                <a:effectLst>
+                  <a:outerShdw blurRad="38100" dist="19050" dir="2700000" algn="tl" rotWithShape="0">
+                    <a:prstClr val="black">
+                      <a:alpha val="40000"/>
+                    </a:prstClr>
+                  </a:outerShdw>
+                </a:effectLst>
+                <a:uLnTx/>
+                <a:uFillTx/>
+                <a:latin typeface="Tw Cen MT" panose="020B0602020104020603"/>
+                <a:ea typeface="+mn-ea"/>
+                <a:cs typeface="+mn-cs"/>
+              </a:rPr>
+              <a:t>Challenges</a:t>
+            </a:r>
+            <a:r>
+              <a:rPr kumimoji="0" lang="es-ES" sz="5400" b="0" i="0" u="none" strike="noStrike" kern="1200" cap="none" spc="0" normalizeH="0" baseline="0" noProof="0" dirty="0">
+                <a:ln w="0"/>
+                <a:solidFill>
+                  <a:prstClr val="white"/>
+                </a:solidFill>
+                <a:effectLst>
+                  <a:outerShdw blurRad="38100" dist="19050" dir="2700000" algn="tl" rotWithShape="0">
+                    <a:prstClr val="black">
+                      <a:alpha val="40000"/>
+                    </a:prstClr>
+                  </a:outerShdw>
+                </a:effectLst>
+                <a:uLnTx/>
+                <a:uFillTx/>
+                <a:latin typeface="Tw Cen MT" panose="020B0602020104020603"/>
+                <a:ea typeface="+mn-ea"/>
+                <a:cs typeface="+mn-cs"/>
+              </a:rPr>
+              <a:t>:</a:t>
+            </a:r>
+          </a:p>
+        </p:txBody>
+      </p:sp>
+      <p:sp>
+        <p:nvSpPr>
+          <p:cNvPr id="20" name="Text 3">
+            <a:extLst>
+              <a:ext uri="{FF2B5EF4-FFF2-40B4-BE49-F238E27FC236}">
+                <a16:creationId xmlns:a16="http://schemas.microsoft.com/office/drawing/2014/main" id="{81386E12-880E-4A87-9C58-72230817ED1D}"/>
+              </a:ext>
+            </a:extLst>
+          </p:cNvPr>
+          <p:cNvSpPr/>
+          <p:nvPr/>
+        </p:nvSpPr>
+        <p:spPr>
+          <a:xfrm>
+            <a:off x="232756" y="216528"/>
+            <a:ext cx="989213" cy="690265"/>
+          </a:xfrm>
+          <a:prstGeom prst="rect">
+            <a:avLst/>
+          </a:prstGeom>
+          <a:noFill/>
+          <a:ln/>
+        </p:spPr>
+        <p:txBody>
+          <a:bodyPr wrap="square" lIns="0" tIns="0" rIns="0" bIns="0" rtlCol="0" anchor="ctr"/>
+          <a:lstStyle/>
+          <a:p>
+            <a:pPr marL="0" marR="0" lvl="0" indent="0" algn="l" defTabSz="457200" rtl="0" eaLnBrk="1" fontAlgn="auto" latinLnBrk="0" hangingPunct="1">
+              <a:lnSpc>
+                <a:spcPct val="100000"/>
+              </a:lnSpc>
+              <a:spcBef>
+                <a:spcPts val="0"/>
+              </a:spcBef>
+              <a:spcAft>
+                <a:spcPts val="0"/>
+              </a:spcAft>
+              <a:buClrTx/>
+              <a:buSzTx/>
+              <a:buFontTx/>
+              <a:buNone/>
+              <a:tabLst/>
+              <a:defRPr/>
+            </a:pPr>
+            <a:r>
+              <a:rPr kumimoji="0" lang="en-US" sz="5400" b="1" i="0" u="none" strike="noStrike" kern="1200" cap="none" spc="0" normalizeH="0" baseline="0" noProof="0" dirty="0">
+                <a:ln>
+                  <a:noFill/>
+                </a:ln>
+                <a:solidFill>
+                  <a:srgbClr val="E07B39"/>
+                </a:solidFill>
+                <a:effectLst/>
+                <a:uLnTx/>
+                <a:uFillTx/>
+                <a:latin typeface="Cambria" pitchFamily="34" charset="0"/>
+                <a:ea typeface="Cambria" pitchFamily="34" charset="-122"/>
+                <a:cs typeface="Cambria" pitchFamily="34" charset="-120"/>
+              </a:rPr>
+              <a:t>08</a:t>
+            </a:r>
+            <a:endParaRPr kumimoji="0" lang="en-US" sz="5400" b="0" i="0" u="none" strike="noStrike" kern="1200" cap="none" spc="0" normalizeH="0" baseline="0" noProof="0" dirty="0">
+              <a:ln>
+                <a:noFill/>
+              </a:ln>
+              <a:solidFill>
+                <a:prstClr val="white"/>
+              </a:solidFill>
+              <a:effectLst/>
+              <a:uLnTx/>
+              <a:uFillTx/>
+              <a:latin typeface="Tw Cen MT" panose="020B0602020104020603"/>
+              <a:ea typeface="+mn-ea"/>
+              <a:cs typeface="+mn-cs"/>
+            </a:endParaRPr>
+          </a:p>
+        </p:txBody>
+      </p:sp>
+      <p:sp>
+        <p:nvSpPr>
+          <p:cNvPr id="902" name="CopiedShape902">
+            <a:extLst>
+              <a:ext uri="{FF2B5EF4-FFF2-40B4-BE49-F238E27FC236}">
+                <a16:creationId xmlns:a16="http://schemas.microsoft.com/office/drawing/2014/main" id="{01B14448-2732-066A-4BB4-225F8ABE103F}"/>
+              </a:ext>
+            </a:extLst>
+          </p:cNvPr>
+          <p:cNvSpPr txBox="1"/>
+          <p:nvPr/>
+        </p:nvSpPr>
+        <p:spPr>
+          <a:xfrm>
+            <a:off x="1844900" y="2011583"/>
+            <a:ext cx="8502192" cy="2308324"/>
+          </a:xfrm>
+          <a:prstGeom prst="rect">
+            <a:avLst/>
+          </a:prstGeom>
+          <a:noFill/>
+        </p:spPr>
+        <p:txBody>
+          <a:bodyPr wrap="square" lIns="91440" tIns="45720" rIns="91440" bIns="45720" rtlCol="0" anchor="t">
+            <a:spAutoFit/>
+          </a:bodyPr>
+          <a:lstStyle/>
+          <a:p>
+            <a:pPr marL="285750" marR="0" lvl="0" indent="-285750" algn="l" defTabSz="457200" rtl="0" eaLnBrk="1" fontAlgn="auto" latinLnBrk="0" hangingPunct="1">
+              <a:lnSpc>
+                <a:spcPct val="100000"/>
+              </a:lnSpc>
+              <a:spcBef>
+                <a:spcPts val="0"/>
+              </a:spcBef>
+              <a:spcAft>
+                <a:spcPts val="0"/>
+              </a:spcAft>
+              <a:buClrTx/>
+              <a:buSzTx/>
+              <a:buFontTx/>
+              <a:buAutoNum type="arabicPeriod"/>
+              <a:tabLst/>
+              <a:defRPr/>
+            </a:pPr>
+            <a:r>
+              <a:rPr kumimoji="0" lang="en-US" sz="1800" b="0" i="0" u="none" strike="noStrike" kern="1200" cap="none" spc="0" normalizeH="0" baseline="0" noProof="0" dirty="0">
+                <a:ln>
+                  <a:noFill/>
+                </a:ln>
+                <a:solidFill>
+                  <a:prstClr val="white"/>
+                </a:solidFill>
+                <a:effectLst/>
+                <a:uLnTx/>
+                <a:uFillTx/>
+                <a:latin typeface="Tw Cen MT" panose="020B0602020104020603"/>
+                <a:ea typeface="+mn-ea"/>
+                <a:cs typeface="+mn-cs"/>
+              </a:rPr>
+              <a:t>Huge class imbalance, only 16% of minutes were a real Mechanical/Electrical failure.</a:t>
+            </a:r>
+          </a:p>
+          <a:p>
+            <a:pPr marL="742950" marR="0" lvl="1" indent="-285750" algn="l" defTabSz="457200" rtl="0" eaLnBrk="1" fontAlgn="auto" latinLnBrk="0" hangingPunct="1">
+              <a:lnSpc>
+                <a:spcPct val="100000"/>
+              </a:lnSpc>
+              <a:spcBef>
+                <a:spcPts val="0"/>
+              </a:spcBef>
+              <a:spcAft>
+                <a:spcPts val="0"/>
+              </a:spcAft>
+              <a:buClrTx/>
+              <a:buSzTx/>
+              <a:buFontTx/>
+              <a:buAutoNum type="arabicPeriod"/>
+              <a:tabLst/>
+              <a:defRPr/>
+            </a:pPr>
+            <a:r>
+              <a:rPr kumimoji="0" lang="en-US" sz="1800" b="0" i="0" u="none" strike="noStrike" kern="1200" cap="none" spc="0" normalizeH="0" baseline="0" noProof="0" dirty="0">
+                <a:ln>
+                  <a:noFill/>
+                </a:ln>
+                <a:solidFill>
+                  <a:prstClr val="white"/>
+                </a:solidFill>
+                <a:effectLst/>
+                <a:uLnTx/>
+                <a:uFillTx/>
+                <a:latin typeface="Tw Cen MT" panose="020B0602020104020603"/>
+                <a:ea typeface="+mn-ea"/>
+                <a:cs typeface="+mn-cs"/>
+              </a:rPr>
+              <a:t>Business trade-off: a missed failure costs more than a false alarm, so Recall is prioritized.</a:t>
+            </a:r>
+          </a:p>
+          <a:p>
+            <a:pPr marL="742950" marR="0" lvl="1" indent="-285750" algn="l" defTabSz="457200" rtl="0" eaLnBrk="1" fontAlgn="auto" latinLnBrk="0" hangingPunct="1">
+              <a:lnSpc>
+                <a:spcPct val="100000"/>
+              </a:lnSpc>
+              <a:spcBef>
+                <a:spcPts val="0"/>
+              </a:spcBef>
+              <a:spcAft>
+                <a:spcPts val="0"/>
+              </a:spcAft>
+              <a:buClrTx/>
+              <a:buSzTx/>
+              <a:buFontTx/>
+              <a:buAutoNum type="arabicPeriod"/>
+              <a:tabLst/>
+              <a:defRPr/>
+            </a:pPr>
+            <a:r>
+              <a:rPr kumimoji="0" lang="en-US" sz="1800" b="0" i="0" u="none" strike="noStrike" kern="1200" cap="none" spc="0" normalizeH="0" baseline="0" noProof="0" dirty="0">
+                <a:ln>
+                  <a:noFill/>
+                </a:ln>
+                <a:solidFill>
+                  <a:prstClr val="white"/>
+                </a:solidFill>
+                <a:effectLst/>
+                <a:uLnTx/>
+                <a:uFillTx/>
+                <a:latin typeface="Tw Cen MT" panose="020B0602020104020603"/>
+                <a:ea typeface="+mn-ea"/>
+                <a:cs typeface="+mn-cs"/>
+              </a:rPr>
+              <a:t>Different stations need different Recall floors (80%-90%) because stations with fewer or less informative sensors can't sustain a high Recall without Precision collapsing.</a:t>
+            </a:r>
+            <a:br>
+              <a:rPr kumimoji="0" lang="en-US" sz="1800" b="0" i="0" u="none" strike="noStrike" kern="1200" cap="none" spc="0" normalizeH="0" baseline="0" noProof="0" dirty="0">
+                <a:ln>
+                  <a:noFill/>
+                </a:ln>
+                <a:solidFill>
+                  <a:prstClr val="white"/>
+                </a:solidFill>
+                <a:effectLst/>
+                <a:uLnTx/>
+                <a:uFillTx/>
+                <a:latin typeface="Tw Cen MT" panose="020B0602020104020603"/>
+                <a:ea typeface="+mn-ea"/>
+                <a:cs typeface="+mn-cs"/>
+              </a:rPr>
+            </a:br>
+            <a:r>
+              <a:rPr kumimoji="0" lang="en-US" sz="1800" b="0" i="0" u="none" strike="noStrike" kern="1200" cap="none" spc="0" normalizeH="0" baseline="0" noProof="0" dirty="0">
+                <a:ln>
+                  <a:noFill/>
+                </a:ln>
+                <a:solidFill>
+                  <a:prstClr val="white"/>
+                </a:solidFill>
+                <a:effectLst/>
+                <a:uLnTx/>
+                <a:uFillTx/>
+                <a:latin typeface="Tw Cen MT" panose="020B0602020104020603"/>
+                <a:ea typeface="+mn-ea"/>
+                <a:cs typeface="+mn-cs"/>
+              </a:rPr>
+              <a:t>Example: ST7 (1 sensor) forcing a 90% floor drops Precision to 12.8%.</a:t>
+            </a:r>
+          </a:p>
+          <a:p>
+            <a:pPr marL="742950" marR="0" lvl="1" indent="-285750" algn="l" defTabSz="457200" rtl="0" eaLnBrk="1" fontAlgn="auto" latinLnBrk="0" hangingPunct="1">
+              <a:lnSpc>
+                <a:spcPct val="100000"/>
+              </a:lnSpc>
+              <a:spcBef>
+                <a:spcPts val="0"/>
+              </a:spcBef>
+              <a:spcAft>
+                <a:spcPts val="0"/>
+              </a:spcAft>
+              <a:buClrTx/>
+              <a:buSzTx/>
+              <a:buFontTx/>
+              <a:buAutoNum type="arabicPeriod"/>
+              <a:tabLst/>
+              <a:defRPr/>
+            </a:pPr>
+            <a:endParaRPr kumimoji="0" lang="en-US" sz="1800" b="0" i="0" u="none" strike="noStrike" kern="1200" cap="none" spc="0" normalizeH="0" baseline="0" noProof="0" dirty="0">
+              <a:ln>
+                <a:noFill/>
+              </a:ln>
+              <a:solidFill>
+                <a:prstClr val="white"/>
+              </a:solidFill>
+              <a:effectLst/>
+              <a:uLnTx/>
+              <a:uFillTx/>
+              <a:latin typeface="Tw Cen MT" panose="020B0602020104020603"/>
+              <a:ea typeface="+mn-ea"/>
+              <a:cs typeface="+mn-cs"/>
+            </a:endParaRPr>
+          </a:p>
+        </p:txBody>
+      </p:sp>
+      <p:sp>
+        <p:nvSpPr>
+          <p:cNvPr id="903" name="CopiedShape903">
+            <a:extLst>
+              <a:ext uri="{FF2B5EF4-FFF2-40B4-BE49-F238E27FC236}">
+                <a16:creationId xmlns:a16="http://schemas.microsoft.com/office/drawing/2014/main" id="{F733A126-2BE5-98D9-74A0-D62D790477EE}"/>
+              </a:ext>
+            </a:extLst>
+          </p:cNvPr>
+          <p:cNvSpPr txBox="1"/>
+          <p:nvPr/>
+        </p:nvSpPr>
+        <p:spPr>
+          <a:xfrm>
+            <a:off x="1844900" y="4400000"/>
+            <a:ext cx="8502192" cy="1200329"/>
+          </a:xfrm>
+          <a:prstGeom prst="rect">
+            <a:avLst/>
+          </a:prstGeom>
+          <a:noFill/>
+        </p:spPr>
+        <p:txBody>
+          <a:bodyPr wrap="square" lIns="91440" tIns="45720" rIns="91440" bIns="45720" rtlCol="0" anchor="t">
+            <a:spAutoFit/>
+          </a:bodyPr>
+          <a:lstStyle/>
+          <a:p>
+            <a:pPr marL="342900" marR="0" lvl="0" indent="-342900" algn="l" defTabSz="457200" rtl="0" eaLnBrk="1" fontAlgn="auto" latinLnBrk="0" hangingPunct="1">
+              <a:lnSpc>
+                <a:spcPct val="100000"/>
+              </a:lnSpc>
+              <a:spcBef>
+                <a:spcPts val="0"/>
+              </a:spcBef>
+              <a:spcAft>
+                <a:spcPts val="0"/>
+              </a:spcAft>
+              <a:buClrTx/>
+              <a:buSzTx/>
+              <a:buFont typeface="+mj-lt"/>
+              <a:buAutoNum type="arabicPeriod" startAt="2"/>
+              <a:tabLst/>
+              <a:defRPr/>
+            </a:pPr>
+            <a:r>
+              <a:rPr kumimoji="0" lang="en-US" sz="1800" b="0" i="0" u="none" strike="noStrike" kern="1200" cap="none" spc="0" normalizeH="0" baseline="0" noProof="0" dirty="0">
+                <a:ln>
+                  <a:noFill/>
+                </a:ln>
+                <a:solidFill>
+                  <a:prstClr val="white"/>
+                </a:solidFill>
+                <a:effectLst/>
+                <a:uLnTx/>
+                <a:uFillTx/>
+                <a:latin typeface="Tw Cen MT" panose="020B0602020104020603"/>
+                <a:ea typeface="+mn-ea"/>
+                <a:cs typeface="+mn-cs"/>
+              </a:rPr>
+              <a:t>Threshold calibrated via the Precision-Recall, not the default 0.5, maximizes Precision at the required Recall.</a:t>
+            </a:r>
+          </a:p>
+          <a:p>
+            <a:pPr marL="742950" marR="0" lvl="1" indent="-285750" algn="l" defTabSz="457200" rtl="0" eaLnBrk="1" fontAlgn="auto" latinLnBrk="0" hangingPunct="1">
+              <a:lnSpc>
+                <a:spcPct val="100000"/>
+              </a:lnSpc>
+              <a:spcBef>
+                <a:spcPts val="0"/>
+              </a:spcBef>
+              <a:spcAft>
+                <a:spcPts val="0"/>
+              </a:spcAft>
+              <a:buClrTx/>
+              <a:buSzTx/>
+              <a:buFontTx/>
+              <a:buAutoNum type="arabicPeriod"/>
+              <a:tabLst/>
+              <a:defRPr/>
+            </a:pPr>
+            <a:r>
+              <a:rPr kumimoji="0" lang="en-US" sz="1800" b="0" i="0" u="none" strike="noStrike" kern="1200" cap="none" spc="0" normalizeH="0" baseline="0" noProof="0" dirty="0">
+                <a:ln>
+                  <a:noFill/>
+                </a:ln>
+                <a:solidFill>
+                  <a:prstClr val="white"/>
+                </a:solidFill>
+                <a:effectLst/>
+                <a:uLnTx/>
+                <a:uFillTx/>
+                <a:latin typeface="Tw Cen MT" panose="020B0602020104020603"/>
+                <a:ea typeface="+mn-ea"/>
+                <a:cs typeface="+mn-cs"/>
+              </a:rPr>
+              <a:t>Once Recall is fixed manually, Precision becomes the real differentiator between models.</a:t>
+            </a:r>
+          </a:p>
+        </p:txBody>
+      </p:sp>
+    </p:spTree>
+    <p:extLst>
+      <p:ext uri="{BB962C8B-B14F-4D97-AF65-F5344CB8AC3E}">
+        <p14:creationId xmlns:p14="http://schemas.microsoft.com/office/powerpoint/2010/main" val="344535667"/>
+      </p:ext>
+    </p:extLst>
+  </p:cSld>
+  <p:clrMapOvr>
+    <a:masterClrMapping/>
+  </p:clrMapOvr>
+</p:sld>
+</file>
+
+<file path=ppt/slides/slide14.xml><?xml version="1.0" encoding="utf-8"?>
 <p:sld xmlns:a="http://schemas.openxmlformats.org/drawingml/2006/main" xmlns:r="http://schemas.openxmlformats.org/officeDocument/2006/relationships" xmlns:p="http://schemas.openxmlformats.org/presentationml/2006/main">
   <p:cSld>
     <p:spTree>
@@ -14477,7 +16681,7 @@
         </p:nvSpPr>
         <p:spPr>
           <a:xfrm>
-            <a:off x="3848793" y="5407429"/>
+            <a:off x="1837113" y="5430058"/>
             <a:ext cx="4023360" cy="1051560"/>
           </a:xfrm>
           <a:prstGeom prst="roundRect">
@@ -14513,7 +16717,47 @@
                   <a:schemeClr val="bg1"/>
                 </a:solidFill>
               </a:rPr>
-              <a:t>Conclusions:</a:t>
+              <a:t>Path</a:t>
+            </a:r>
+            <a:r>
+              <a:rPr lang="es-ES" dirty="0">
+                <a:solidFill>
+                  <a:schemeClr val="bg1"/>
+                </a:solidFill>
+              </a:rPr>
+              <a:t> </a:t>
+            </a:r>
+            <a:r>
+              <a:rPr lang="es-ES" dirty="0" err="1">
+                <a:solidFill>
+                  <a:schemeClr val="bg1"/>
+                </a:solidFill>
+              </a:rPr>
+              <a:t>to</a:t>
+            </a:r>
+            <a:r>
+              <a:rPr lang="es-ES" dirty="0">
+                <a:solidFill>
+                  <a:schemeClr val="bg1"/>
+                </a:solidFill>
+              </a:rPr>
+              <a:t> Real </a:t>
+            </a:r>
+            <a:r>
+              <a:rPr lang="es-ES" dirty="0" err="1">
+                <a:solidFill>
+                  <a:schemeClr val="bg1"/>
+                </a:solidFill>
+              </a:rPr>
+              <a:t>World</a:t>
+            </a:r>
+            <a:r>
+              <a:rPr lang="es-ES" dirty="0">
+                <a:solidFill>
+                  <a:schemeClr val="bg1"/>
+                </a:solidFill>
+              </a:rPr>
+              <a:t>:</a:t>
             </a:r>
             <a:endParaRPr lang="ca-ES" dirty="0">
               <a:solidFill>
@@ -14537,7 +16781,7 @@
         </p:nvSpPr>
         <p:spPr>
           <a:xfrm>
-            <a:off x="3999807" y="5407429"/>
+            <a:off x="1988127" y="5430058"/>
             <a:ext cx="347749" cy="457200"/>
           </a:xfrm>
           <a:prstGeom prst="rect">
@@ -14563,6 +16807,119 @@
                 <a:cs typeface="Cambria" pitchFamily="34" charset="-120"/>
               </a:rPr>
               <a:t>07</a:t>
+            </a:r>
+            <a:endParaRPr lang="en-US" sz="2000" dirty="0"/>
+          </a:p>
+        </p:txBody>
+      </p:sp>
+      <p:sp>
+        <p:nvSpPr>
+          <p:cNvPr id="4" name="Shape 18">
+            <a:extLst>
+              <a:ext uri="{FF2B5EF4-FFF2-40B4-BE49-F238E27FC236}">
+                <a16:creationId xmlns:a16="http://schemas.microsoft.com/office/drawing/2014/main" id="{6AD57FF7-D70D-3ACA-E2CE-B9D32FFF4EF7}"/>
+              </a:ext>
+            </a:extLst>
+          </p:cNvPr>
+          <p:cNvSpPr/>
+          <p:nvPr/>
+        </p:nvSpPr>
+        <p:spPr>
+          <a:xfrm>
+            <a:off x="6180513" y="5463372"/>
+            <a:ext cx="4023360" cy="1051560"/>
+          </a:xfrm>
+          <a:prstGeom prst="roundRect">
+            <a:avLst>
+              <a:gd name="adj" fmla="val 6957"/>
+            </a:avLst>
+          </a:prstGeom>
+          <a:solidFill>
+            <a:srgbClr val="FFFFFF"/>
+          </a:solidFill>
+          <a:ln w="6350">
+            <a:solidFill>
+              <a:srgbClr val="E2E8F0"/>
+            </a:solidFill>
+            <a:prstDash val="solid"/>
+          </a:ln>
+          <a:effectLst>
+            <a:outerShdw blurRad="101600" dist="38100" dir="2700000" algn="bl" rotWithShape="0">
+              <a:srgbClr val="000000">
+                <a:alpha val="10000"/>
+              </a:srgbClr>
+            </a:outerShdw>
+          </a:effectLst>
+        </p:spPr>
+        <p:txBody>
+          <a:bodyPr anchor="ctr"/>
+          <a:lstStyle/>
+          <a:p>
+            <a:pPr algn="ctr"/>
+            <a:r>
+              <a:rPr lang="es-ES" dirty="0" err="1">
+                <a:solidFill>
+                  <a:schemeClr val="bg1"/>
+                </a:solidFill>
+              </a:rPr>
+              <a:t>Challenges</a:t>
+            </a:r>
+            <a:r>
+              <a:rPr lang="es-ES" dirty="0">
+                <a:solidFill>
+                  <a:schemeClr val="bg1"/>
+                </a:solidFill>
+              </a:rPr>
+              <a:t>:</a:t>
+            </a:r>
+            <a:endParaRPr lang="ca-ES" dirty="0">
+              <a:solidFill>
+                <a:schemeClr val="bg1"/>
+              </a:solidFill>
+            </a:endParaRPr>
+          </a:p>
+        </p:txBody>
+      </p:sp>
+      <p:sp>
+        <p:nvSpPr>
+          <p:cNvPr id="5" name="Text 3">
+            <a:extLst>
+              <a:ext uri="{FF2B5EF4-FFF2-40B4-BE49-F238E27FC236}">
+                <a16:creationId xmlns:a16="http://schemas.microsoft.com/office/drawing/2014/main" id="{364BCA06-CD21-843F-6CE2-353813D79487}"/>
+              </a:ext>
+            </a:extLst>
+          </p:cNvPr>
+          <p:cNvSpPr/>
+          <p:nvPr/>
+        </p:nvSpPr>
+        <p:spPr>
+          <a:xfrm>
+            <a:off x="6331527" y="5463372"/>
+            <a:ext cx="347749" cy="457200"/>
+          </a:xfrm>
+          <a:prstGeom prst="rect">
+            <a:avLst/>
+          </a:prstGeom>
+          <a:noFill/>
+          <a:ln/>
+        </p:spPr>
+        <p:txBody>
+          <a:bodyPr wrap="square" lIns="0" tIns="0" rIns="0" bIns="0" rtlCol="0" anchor="ctr"/>
+          <a:lstStyle/>
+          <a:p>
+            <a:pPr marL="0" indent="0">
+              <a:buNone/>
+            </a:pPr>
+            <a:r>
+              <a:rPr lang="en-US" sz="2000" b="1" dirty="0">
+                <a:solidFill>
+                  <a:srgbClr val="E07B39"/>
+                </a:solidFill>
+                <a:latin typeface="Cambria" pitchFamily="34" charset="0"/>
+                <a:ea typeface="Cambria" pitchFamily="34" charset="-122"/>
+                <a:cs typeface="Cambria" pitchFamily="34" charset="-120"/>
+              </a:rPr>
+              <a:t>08</a:t>
             </a:r>
             <a:endParaRPr lang="en-US" sz="2000" dirty="0"/>
           </a:p>
@@ -14775,7 +17132,7 @@
         </p:nvSpPr>
         <p:spPr>
           <a:xfrm>
-            <a:off x="2563935" y="2551837"/>
+            <a:off x="2563935" y="1532662"/>
             <a:ext cx="7064125" cy="1477328"/>
           </a:xfrm>
           <a:prstGeom prst="rect">
@@ -14821,7 +17178,7 @@
             </a:pPr>
             <a:r>
               <a:rPr lang="es-ES" dirty="0" err="1"/>
-              <a:t>Build</a:t>
+              <a:t>Modify</a:t>
             </a:r>
             <a:r>
               <a:rPr lang="es-ES" dirty="0"/>
@@ -14829,7 +17186,7 @@
             </a:r>
             <a:r>
               <a:rPr lang="es-ES" dirty="0" err="1"/>
-              <a:t>synthetic</a:t>
+              <a:t>factory</a:t>
             </a:r>
             <a:r>
               <a:rPr lang="es-ES" dirty="0"/>
@@ -14881,7 +17238,7 @@
             </a:r>
             <a:r>
               <a:rPr lang="es-ES" dirty="0"/>
-              <a:t>.</a:t>
+              <a:t>).</a:t>
             </a:r>
           </a:p>
           <a:p>
@@ -14938,6 +17295,442 @@
               <a:t>01</a:t>
             </a:r>
             <a:endParaRPr lang="en-US" sz="5400" dirty="0"/>
+          </a:p>
+        </p:txBody>
+      </p:sp>
+      <p:pic>
+        <p:nvPicPr>
+          <p:cNvPr id="23" name="Imagen 22">
+            <a:extLst>
+              <a:ext uri="{FF2B5EF4-FFF2-40B4-BE49-F238E27FC236}">
+                <a16:creationId xmlns:a16="http://schemas.microsoft.com/office/drawing/2014/main" id="{CA071068-F06B-2259-C404-30B7896A015D}"/>
+              </a:ext>
+            </a:extLst>
+          </p:cNvPr>
+          <p:cNvPicPr>
+            <a:picLocks noChangeAspect="1"/>
+          </p:cNvPicPr>
+          <p:nvPr/>
+        </p:nvPicPr>
+        <p:blipFill>
+          <a:blip r:embed="rId3"/>
+          <a:stretch>
+            <a:fillRect/>
+          </a:stretch>
+        </p:blipFill>
+        <p:spPr>
+          <a:xfrm>
+            <a:off x="4601976" y="3161088"/>
+            <a:ext cx="2990074" cy="3596916"/>
+          </a:xfrm>
+          <a:prstGeom prst="rect">
+            <a:avLst/>
+          </a:prstGeom>
+        </p:spPr>
+      </p:pic>
+      <p:sp>
+        <p:nvSpPr>
+          <p:cNvPr id="24" name="Rectángulo 23">
+            <a:extLst>
+              <a:ext uri="{FF2B5EF4-FFF2-40B4-BE49-F238E27FC236}">
+                <a16:creationId xmlns:a16="http://schemas.microsoft.com/office/drawing/2014/main" id="{5EE0CF03-815F-0928-6522-FA9568297FFE}"/>
+              </a:ext>
+            </a:extLst>
+          </p:cNvPr>
+          <p:cNvSpPr/>
+          <p:nvPr/>
+        </p:nvSpPr>
+        <p:spPr>
+          <a:xfrm>
+            <a:off x="5230179" y="3009990"/>
+            <a:ext cx="414338" cy="146220"/>
+          </a:xfrm>
+          <a:prstGeom prst="rect">
+            <a:avLst/>
+          </a:prstGeom>
+        </p:spPr>
+        <p:style>
+          <a:lnRef idx="2">
+            <a:schemeClr val="accent1">
+              <a:shade val="15000"/>
+            </a:schemeClr>
+          </a:lnRef>
+          <a:fillRef idx="1">
+            <a:schemeClr val="accent1"/>
+          </a:fillRef>
+          <a:effectRef idx="0">
+            <a:schemeClr val="accent1"/>
+          </a:effectRef>
+          <a:fontRef idx="minor">
+            <a:schemeClr val="lt1"/>
+          </a:fontRef>
+        </p:style>
+        <p:txBody>
+          <a:bodyPr wrap="none" lIns="0" tIns="0" rIns="0" bIns="0" rtlCol="0" anchor="ctr"/>
+          <a:lstStyle/>
+          <a:p>
+            <a:pPr algn="ctr"/>
+            <a:r>
+              <a:rPr lang="es-ES" sz="900" dirty="0" err="1"/>
+              <a:t>Robotics</a:t>
+            </a:r>
+            <a:endParaRPr lang="es-ES" sz="900" dirty="0"/>
+          </a:p>
+        </p:txBody>
+      </p:sp>
+      <p:sp>
+        <p:nvSpPr>
+          <p:cNvPr id="25" name="Rectángulo 24">
+            <a:extLst>
+              <a:ext uri="{FF2B5EF4-FFF2-40B4-BE49-F238E27FC236}">
+                <a16:creationId xmlns:a16="http://schemas.microsoft.com/office/drawing/2014/main" id="{796EDDB6-BCB5-0EBF-2ECA-685C5016CEE7}"/>
+              </a:ext>
+            </a:extLst>
+          </p:cNvPr>
+          <p:cNvSpPr/>
+          <p:nvPr/>
+        </p:nvSpPr>
+        <p:spPr>
+          <a:xfrm>
+            <a:off x="5644517" y="3817710"/>
+            <a:ext cx="414338" cy="146220"/>
+          </a:xfrm>
+          <a:prstGeom prst="rect">
+            <a:avLst/>
+          </a:prstGeom>
+        </p:spPr>
+        <p:style>
+          <a:lnRef idx="2">
+            <a:schemeClr val="accent1">
+              <a:shade val="15000"/>
+            </a:schemeClr>
+          </a:lnRef>
+          <a:fillRef idx="1">
+            <a:schemeClr val="accent1"/>
+          </a:fillRef>
+          <a:effectRef idx="0">
+            <a:schemeClr val="accent1"/>
+          </a:effectRef>
+          <a:fontRef idx="minor">
+            <a:schemeClr val="lt1"/>
+          </a:fontRef>
+        </p:style>
+        <p:txBody>
+          <a:bodyPr wrap="none" lIns="0" tIns="0" rIns="0" bIns="0" rtlCol="0" anchor="ctr"/>
+          <a:lstStyle/>
+          <a:p>
+            <a:pPr algn="ctr"/>
+            <a:r>
+              <a:rPr lang="es-ES" sz="900" dirty="0"/>
+              <a:t>CNC</a:t>
+            </a:r>
+          </a:p>
+        </p:txBody>
+      </p:sp>
+      <p:sp>
+        <p:nvSpPr>
+          <p:cNvPr id="26" name="Rectángulo 25">
+            <a:extLst>
+              <a:ext uri="{FF2B5EF4-FFF2-40B4-BE49-F238E27FC236}">
+                <a16:creationId xmlns:a16="http://schemas.microsoft.com/office/drawing/2014/main" id="{62D27DD1-D783-0439-2AB3-376F32A71F40}"/>
+              </a:ext>
+            </a:extLst>
+          </p:cNvPr>
+          <p:cNvSpPr/>
+          <p:nvPr/>
+        </p:nvSpPr>
+        <p:spPr>
+          <a:xfrm>
+            <a:off x="6093144" y="3009990"/>
+            <a:ext cx="414338" cy="146220"/>
+          </a:xfrm>
+          <a:prstGeom prst="rect">
+            <a:avLst/>
+          </a:prstGeom>
+        </p:spPr>
+        <p:style>
+          <a:lnRef idx="2">
+            <a:schemeClr val="accent1">
+              <a:shade val="15000"/>
+            </a:schemeClr>
+          </a:lnRef>
+          <a:fillRef idx="1">
+            <a:schemeClr val="accent1"/>
+          </a:fillRef>
+          <a:effectRef idx="0">
+            <a:schemeClr val="accent1"/>
+          </a:effectRef>
+          <a:fontRef idx="minor">
+            <a:schemeClr val="lt1"/>
+          </a:fontRef>
+        </p:style>
+        <p:txBody>
+          <a:bodyPr wrap="none" lIns="0" tIns="0" rIns="0" bIns="0" rtlCol="0" anchor="ctr"/>
+          <a:lstStyle/>
+          <a:p>
+            <a:pPr algn="ctr"/>
+            <a:r>
+              <a:rPr lang="es-ES" sz="900" dirty="0" err="1"/>
+              <a:t>Robotics</a:t>
+            </a:r>
+            <a:endParaRPr lang="es-ES" sz="900" dirty="0"/>
+          </a:p>
+        </p:txBody>
+      </p:sp>
+      <p:sp>
+        <p:nvSpPr>
+          <p:cNvPr id="27" name="Rectángulo 26">
+            <a:extLst>
+              <a:ext uri="{FF2B5EF4-FFF2-40B4-BE49-F238E27FC236}">
+                <a16:creationId xmlns:a16="http://schemas.microsoft.com/office/drawing/2014/main" id="{C028D15A-9719-5819-FDF7-CA0ED3A52261}"/>
+              </a:ext>
+            </a:extLst>
+          </p:cNvPr>
+          <p:cNvSpPr/>
+          <p:nvPr/>
+        </p:nvSpPr>
+        <p:spPr>
+          <a:xfrm>
+            <a:off x="6507481" y="3804000"/>
+            <a:ext cx="455293" cy="146220"/>
+          </a:xfrm>
+          <a:prstGeom prst="rect">
+            <a:avLst/>
+          </a:prstGeom>
+        </p:spPr>
+        <p:style>
+          <a:lnRef idx="2">
+            <a:schemeClr val="accent1">
+              <a:shade val="15000"/>
+            </a:schemeClr>
+          </a:lnRef>
+          <a:fillRef idx="1">
+            <a:schemeClr val="accent1"/>
+          </a:fillRef>
+          <a:effectRef idx="0">
+            <a:schemeClr val="accent1"/>
+          </a:effectRef>
+          <a:fontRef idx="minor">
+            <a:schemeClr val="lt1"/>
+          </a:fontRef>
+        </p:style>
+        <p:txBody>
+          <a:bodyPr wrap="none" lIns="0" tIns="0" rIns="0" bIns="0" rtlCol="0" anchor="ctr"/>
+          <a:lstStyle/>
+          <a:p>
+            <a:pPr algn="ctr"/>
+            <a:r>
+              <a:rPr lang="es-ES" sz="900" dirty="0" err="1"/>
+              <a:t>Assembly</a:t>
+            </a:r>
+            <a:endParaRPr lang="es-ES" sz="900" dirty="0"/>
+          </a:p>
+        </p:txBody>
+      </p:sp>
+      <p:sp>
+        <p:nvSpPr>
+          <p:cNvPr id="28" name="Rectángulo 27">
+            <a:extLst>
+              <a:ext uri="{FF2B5EF4-FFF2-40B4-BE49-F238E27FC236}">
+                <a16:creationId xmlns:a16="http://schemas.microsoft.com/office/drawing/2014/main" id="{1908DCE6-53F2-5CC9-8BDC-34AE3E6779C0}"/>
+              </a:ext>
+            </a:extLst>
+          </p:cNvPr>
+          <p:cNvSpPr/>
+          <p:nvPr/>
+        </p:nvSpPr>
+        <p:spPr>
+          <a:xfrm>
+            <a:off x="6526532" y="5014050"/>
+            <a:ext cx="414338" cy="146220"/>
+          </a:xfrm>
+          <a:prstGeom prst="rect">
+            <a:avLst/>
+          </a:prstGeom>
+        </p:spPr>
+        <p:style>
+          <a:lnRef idx="2">
+            <a:schemeClr val="accent1">
+              <a:shade val="15000"/>
+            </a:schemeClr>
+          </a:lnRef>
+          <a:fillRef idx="1">
+            <a:schemeClr val="accent1"/>
+          </a:fillRef>
+          <a:effectRef idx="0">
+            <a:schemeClr val="accent1"/>
+          </a:effectRef>
+          <a:fontRef idx="minor">
+            <a:schemeClr val="lt1"/>
+          </a:fontRef>
+        </p:style>
+        <p:txBody>
+          <a:bodyPr wrap="none" lIns="0" tIns="0" rIns="0" bIns="0" rtlCol="0" anchor="ctr"/>
+          <a:lstStyle/>
+          <a:p>
+            <a:pPr algn="ctr"/>
+            <a:r>
+              <a:rPr lang="es-ES" sz="900" dirty="0" err="1"/>
+              <a:t>Welding</a:t>
+            </a:r>
+            <a:endParaRPr lang="es-ES" sz="900" dirty="0"/>
+          </a:p>
+        </p:txBody>
+      </p:sp>
+      <p:sp>
+        <p:nvSpPr>
+          <p:cNvPr id="29" name="Rectángulo 28">
+            <a:extLst>
+              <a:ext uri="{FF2B5EF4-FFF2-40B4-BE49-F238E27FC236}">
+                <a16:creationId xmlns:a16="http://schemas.microsoft.com/office/drawing/2014/main" id="{C44EA110-D76E-61E2-AC2A-2C0842D98482}"/>
+              </a:ext>
+            </a:extLst>
+          </p:cNvPr>
+          <p:cNvSpPr/>
+          <p:nvPr/>
+        </p:nvSpPr>
+        <p:spPr>
+          <a:xfrm>
+            <a:off x="6112194" y="5160270"/>
+            <a:ext cx="414338" cy="298620"/>
+          </a:xfrm>
+          <a:prstGeom prst="rect">
+            <a:avLst/>
+          </a:prstGeom>
+        </p:spPr>
+        <p:style>
+          <a:lnRef idx="2">
+            <a:schemeClr val="accent1">
+              <a:shade val="15000"/>
+            </a:schemeClr>
+          </a:lnRef>
+          <a:fillRef idx="1">
+            <a:schemeClr val="accent1"/>
+          </a:fillRef>
+          <a:effectRef idx="0">
+            <a:schemeClr val="accent1"/>
+          </a:effectRef>
+          <a:fontRef idx="minor">
+            <a:schemeClr val="lt1"/>
+          </a:fontRef>
+        </p:style>
+        <p:txBody>
+          <a:bodyPr wrap="none" lIns="0" tIns="0" rIns="0" bIns="0" rtlCol="0" anchor="ctr"/>
+          <a:lstStyle/>
+          <a:p>
+            <a:pPr algn="ctr"/>
+            <a:r>
+              <a:rPr lang="es-ES" sz="900" dirty="0" err="1"/>
+              <a:t>Cooling</a:t>
+            </a:r>
+            <a:br>
+              <a:rPr lang="es-ES" sz="900" dirty="0"/>
+            </a:br>
+            <a:r>
+              <a:rPr lang="es-ES" sz="900" dirty="0" err="1"/>
+              <a:t>System</a:t>
+            </a:r>
+            <a:endParaRPr lang="es-ES" sz="900" dirty="0"/>
+          </a:p>
+        </p:txBody>
+      </p:sp>
+      <p:sp>
+        <p:nvSpPr>
+          <p:cNvPr id="30" name="Rectángulo 29">
+            <a:extLst>
+              <a:ext uri="{FF2B5EF4-FFF2-40B4-BE49-F238E27FC236}">
+                <a16:creationId xmlns:a16="http://schemas.microsoft.com/office/drawing/2014/main" id="{83DD21D4-0FE4-3AC2-A5C3-BAA923B4DC98}"/>
+              </a:ext>
+            </a:extLst>
+          </p:cNvPr>
+          <p:cNvSpPr/>
+          <p:nvPr/>
+        </p:nvSpPr>
+        <p:spPr>
+          <a:xfrm>
+            <a:off x="5651185" y="5605110"/>
+            <a:ext cx="461009" cy="146220"/>
+          </a:xfrm>
+          <a:prstGeom prst="rect">
+            <a:avLst/>
+          </a:prstGeom>
+        </p:spPr>
+        <p:style>
+          <a:lnRef idx="2">
+            <a:schemeClr val="accent1">
+              <a:shade val="15000"/>
+            </a:schemeClr>
+          </a:lnRef>
+          <a:fillRef idx="1">
+            <a:schemeClr val="accent1"/>
+          </a:fillRef>
+          <a:effectRef idx="0">
+            <a:schemeClr val="accent1"/>
+          </a:effectRef>
+          <a:fontRef idx="minor">
+            <a:schemeClr val="lt1"/>
+          </a:fontRef>
+        </p:style>
+        <p:txBody>
+          <a:bodyPr wrap="none" lIns="0" tIns="0" rIns="0" bIns="0" rtlCol="0" anchor="ctr"/>
+          <a:lstStyle/>
+          <a:p>
+            <a:pPr algn="ctr"/>
+            <a:r>
+              <a:rPr lang="es-ES" sz="900" dirty="0" err="1"/>
+              <a:t>Inspection</a:t>
+            </a:r>
+            <a:endParaRPr lang="es-ES" sz="900" dirty="0"/>
+          </a:p>
+        </p:txBody>
+      </p:sp>
+      <p:sp>
+        <p:nvSpPr>
+          <p:cNvPr id="31" name="Rectángulo 30">
+            <a:extLst>
+              <a:ext uri="{FF2B5EF4-FFF2-40B4-BE49-F238E27FC236}">
+                <a16:creationId xmlns:a16="http://schemas.microsoft.com/office/drawing/2014/main" id="{986F828C-F004-90D4-F3CF-D6DD61DE9D51}"/>
+              </a:ext>
+            </a:extLst>
+          </p:cNvPr>
+          <p:cNvSpPr/>
+          <p:nvPr/>
+        </p:nvSpPr>
+        <p:spPr>
+          <a:xfrm>
+            <a:off x="4830921" y="6515878"/>
+            <a:ext cx="494347" cy="146220"/>
+          </a:xfrm>
+          <a:prstGeom prst="rect">
+            <a:avLst/>
+          </a:prstGeom>
+        </p:spPr>
+        <p:style>
+          <a:lnRef idx="2">
+            <a:schemeClr val="accent1">
+              <a:shade val="15000"/>
+            </a:schemeClr>
+          </a:lnRef>
+          <a:fillRef idx="1">
+            <a:schemeClr val="accent1"/>
+          </a:fillRef>
+          <a:effectRef idx="0">
+            <a:schemeClr val="accent1"/>
+          </a:effectRef>
+          <a:fontRef idx="minor">
+            <a:schemeClr val="lt1"/>
+          </a:fontRef>
+        </p:style>
+        <p:txBody>
+          <a:bodyPr wrap="none" lIns="0" tIns="0" rIns="0" bIns="0" rtlCol="0" anchor="ctr"/>
+          <a:lstStyle/>
+          <a:p>
+            <a:pPr algn="ctr"/>
+            <a:r>
+              <a:rPr lang="es-ES" sz="900" dirty="0" err="1"/>
+              <a:t>Packaging</a:t>
+            </a:r>
+            <a:endParaRPr lang="es-ES" sz="900" dirty="0"/>
           </a:p>
         </p:txBody>
       </p:sp>
@@ -15285,7 +18078,7 @@
                 <a:ea typeface="+mn-ea"/>
                 <a:cs typeface="+mn-cs"/>
               </a:rPr>
-              <a:t>8 stations × 30 days × 1,440 min/</a:t>
+              <a:t>8 stations × 30 </a:t>
             </a:r>
             <a:r>
               <a:rPr kumimoji="0" lang="es-ES" b="0" i="0" u="none" strike="noStrike" kern="1200" cap="none" spc="0" normalizeH="0" baseline="0" noProof="0" dirty="0" err="1">
@@ -15302,7 +18095,7 @@
                 <a:ea typeface="+mn-ea"/>
                 <a:cs typeface="+mn-cs"/>
               </a:rPr>
-              <a:t>day</a:t>
+              <a:t>days</a:t>
             </a:r>
             <a:r>
               <a:rPr kumimoji="0" lang="es-ES" b="0" i="0" u="none" strike="noStrike" kern="1200" cap="none" spc="0" normalizeH="0" baseline="0" noProof="0" dirty="0">
@@ -16632,7 +19425,7 @@
         </p:blipFill>
         <p:spPr>
           <a:xfrm>
-            <a:off x="3258136" y="1190607"/>
+            <a:off x="3258137" y="2419967"/>
             <a:ext cx="5675721" cy="3640797"/>
           </a:xfrm>
           <a:prstGeom prst="rect">
@@ -16640,12 +19433,793 @@
           </a:prstGeom>
         </p:spPr>
       </p:pic>
+      <p:sp>
+        <p:nvSpPr>
+          <p:cNvPr id="8" name="CuadroTexto 7">
+            <a:extLst>
+              <a:ext uri="{FF2B5EF4-FFF2-40B4-BE49-F238E27FC236}">
+                <a16:creationId xmlns:a16="http://schemas.microsoft.com/office/drawing/2014/main" id="{847CE440-0238-0E9B-DEB3-2D040E52E275}"/>
+              </a:ext>
+            </a:extLst>
+          </p:cNvPr>
+          <p:cNvSpPr txBox="1"/>
+          <p:nvPr/>
+        </p:nvSpPr>
+        <p:spPr>
+          <a:xfrm>
+            <a:off x="1759788" y="1339908"/>
+            <a:ext cx="7739811" cy="646331"/>
+          </a:xfrm>
+          <a:prstGeom prst="rect">
+            <a:avLst/>
+          </a:prstGeom>
+          <a:noFill/>
+        </p:spPr>
+        <p:txBody>
+          <a:bodyPr wrap="square" rtlCol="0">
+            <a:spAutoFit/>
+          </a:bodyPr>
+          <a:lstStyle/>
+          <a:p>
+            <a:pPr marL="285750" marR="0" lvl="0" indent="-285750" algn="l" defTabSz="457200" rtl="0" eaLnBrk="1" fontAlgn="auto" latinLnBrk="0" hangingPunct="1">
+              <a:lnSpc>
+                <a:spcPct val="100000"/>
+              </a:lnSpc>
+              <a:spcBef>
+                <a:spcPts val="0"/>
+              </a:spcBef>
+              <a:spcAft>
+                <a:spcPts val="0"/>
+              </a:spcAft>
+              <a:buClrTx/>
+              <a:buSzTx/>
+              <a:buFont typeface="Arial" panose="020B0604020202020204" pitchFamily="34" charset="0"/>
+              <a:buChar char="•"/>
+              <a:tabLst/>
+              <a:defRPr/>
+            </a:pPr>
+            <a:r>
+              <a:rPr kumimoji="0" lang="es-ES" sz="1800" b="0" i="0" u="none" strike="noStrike" kern="1200" cap="none" spc="0" normalizeH="0" baseline="0" noProof="0" dirty="0">
+                <a:ln>
+                  <a:noFill/>
+                </a:ln>
+                <a:solidFill>
+                  <a:prstClr val="white"/>
+                </a:solidFill>
+                <a:effectLst/>
+                <a:uLnTx/>
+                <a:uFillTx/>
+                <a:latin typeface="Tw Cen MT" panose="020B0602020104020603"/>
+                <a:ea typeface="+mn-ea"/>
+                <a:cs typeface="+mn-cs"/>
+              </a:rPr>
+              <a:t>Split </a:t>
+            </a:r>
+            <a:r>
+              <a:rPr kumimoji="0" lang="es-ES" sz="1800" b="0" i="0" u="none" strike="noStrike" kern="1200" cap="none" spc="0" normalizeH="0" baseline="0" noProof="0" dirty="0" err="1">
+                <a:ln>
+                  <a:noFill/>
+                </a:ln>
+                <a:solidFill>
+                  <a:prstClr val="white"/>
+                </a:solidFill>
+                <a:effectLst/>
+                <a:uLnTx/>
+                <a:uFillTx/>
+                <a:latin typeface="Tw Cen MT" panose="020B0602020104020603"/>
+                <a:ea typeface="+mn-ea"/>
+                <a:cs typeface="+mn-cs"/>
+              </a:rPr>
+              <a:t>Initial</a:t>
+            </a:r>
+            <a:r>
+              <a:rPr kumimoji="0" lang="es-ES" sz="1800" b="0" i="0" u="none" strike="noStrike" kern="1200" cap="none" spc="0" normalizeH="0" baseline="0" noProof="0" dirty="0">
+                <a:ln>
+                  <a:noFill/>
+                </a:ln>
+                <a:solidFill>
+                  <a:prstClr val="white"/>
+                </a:solidFill>
+                <a:effectLst/>
+                <a:uLnTx/>
+                <a:uFillTx/>
+                <a:latin typeface="Tw Cen MT" panose="020B0602020104020603"/>
+                <a:ea typeface="+mn-ea"/>
+                <a:cs typeface="+mn-cs"/>
+              </a:rPr>
+              <a:t> </a:t>
+            </a:r>
+            <a:r>
+              <a:rPr kumimoji="0" lang="es-ES" sz="1800" b="0" i="0" u="none" strike="noStrike" kern="1200" cap="none" spc="0" normalizeH="0" baseline="0" noProof="0" dirty="0" err="1">
+                <a:ln>
+                  <a:noFill/>
+                </a:ln>
+                <a:solidFill>
+                  <a:prstClr val="white"/>
+                </a:solidFill>
+                <a:effectLst/>
+                <a:uLnTx/>
+                <a:uFillTx/>
+                <a:latin typeface="Tw Cen MT" panose="020B0602020104020603"/>
+                <a:ea typeface="+mn-ea"/>
+                <a:cs typeface="+mn-cs"/>
+              </a:rPr>
+              <a:t>df</a:t>
+            </a:r>
+            <a:r>
+              <a:rPr kumimoji="0" lang="es-ES" sz="1800" b="0" i="0" u="none" strike="noStrike" kern="1200" cap="none" spc="0" normalizeH="0" baseline="0" noProof="0" dirty="0">
+                <a:ln>
+                  <a:noFill/>
+                </a:ln>
+                <a:solidFill>
+                  <a:prstClr val="white"/>
+                </a:solidFill>
+                <a:effectLst/>
+                <a:uLnTx/>
+                <a:uFillTx/>
+                <a:latin typeface="Tw Cen MT" panose="020B0602020104020603"/>
+                <a:ea typeface="+mn-ea"/>
+                <a:cs typeface="+mn-cs"/>
+              </a:rPr>
+              <a:t> </a:t>
+            </a:r>
+            <a:r>
+              <a:rPr kumimoji="0" lang="es-ES" sz="1800" b="0" i="0" u="none" strike="noStrike" kern="1200" cap="none" spc="0" normalizeH="0" baseline="0" noProof="0" dirty="0" err="1">
+                <a:ln>
+                  <a:noFill/>
+                </a:ln>
+                <a:solidFill>
+                  <a:prstClr val="white"/>
+                </a:solidFill>
+                <a:effectLst/>
+                <a:uLnTx/>
+                <a:uFillTx/>
+                <a:latin typeface="Tw Cen MT" panose="020B0602020104020603"/>
+                <a:ea typeface="+mn-ea"/>
+                <a:cs typeface="+mn-cs"/>
+              </a:rPr>
+              <a:t>to</a:t>
+            </a:r>
+            <a:r>
+              <a:rPr kumimoji="0" lang="es-ES" sz="1800" b="0" i="0" u="none" strike="noStrike" kern="1200" cap="none" spc="0" normalizeH="0" baseline="0" noProof="0" dirty="0">
+                <a:ln>
+                  <a:noFill/>
+                </a:ln>
+                <a:solidFill>
+                  <a:prstClr val="white"/>
+                </a:solidFill>
+                <a:effectLst/>
+                <a:uLnTx/>
+                <a:uFillTx/>
+                <a:latin typeface="Tw Cen MT" panose="020B0602020104020603"/>
+                <a:ea typeface="+mn-ea"/>
+                <a:cs typeface="+mn-cs"/>
+              </a:rPr>
+              <a:t> </a:t>
+            </a:r>
+            <a:r>
+              <a:rPr kumimoji="0" lang="es-ES" sz="1800" b="0" i="0" u="none" strike="noStrike" kern="1200" cap="none" spc="0" normalizeH="0" baseline="0" noProof="0" dirty="0" err="1">
+                <a:ln>
+                  <a:noFill/>
+                </a:ln>
+                <a:solidFill>
+                  <a:prstClr val="white"/>
+                </a:solidFill>
+                <a:effectLst/>
+                <a:uLnTx/>
+                <a:uFillTx/>
+                <a:latin typeface="Tw Cen MT" panose="020B0602020104020603"/>
+                <a:ea typeface="+mn-ea"/>
+                <a:cs typeface="+mn-cs"/>
+              </a:rPr>
+              <a:t>df</a:t>
+            </a:r>
+            <a:r>
+              <a:rPr kumimoji="0" lang="es-ES" sz="1800" b="0" i="0" u="none" strike="noStrike" kern="1200" cap="none" spc="0" normalizeH="0" baseline="0" noProof="0" dirty="0">
+                <a:ln>
+                  <a:noFill/>
+                </a:ln>
+                <a:solidFill>
+                  <a:prstClr val="white"/>
+                </a:solidFill>
+                <a:effectLst/>
+                <a:uLnTx/>
+                <a:uFillTx/>
+                <a:latin typeface="Tw Cen MT" panose="020B0602020104020603"/>
+                <a:ea typeface="+mn-ea"/>
+                <a:cs typeface="+mn-cs"/>
+              </a:rPr>
+              <a:t> </a:t>
+            </a:r>
+            <a:r>
+              <a:rPr kumimoji="0" lang="es-ES" sz="1800" b="0" i="0" u="none" strike="noStrike" kern="1200" cap="none" spc="0" normalizeH="0" baseline="0" noProof="0" dirty="0" err="1">
+                <a:ln>
+                  <a:noFill/>
+                </a:ln>
+                <a:solidFill>
+                  <a:prstClr val="white"/>
+                </a:solidFill>
+                <a:effectLst/>
+                <a:uLnTx/>
+                <a:uFillTx/>
+                <a:latin typeface="Tw Cen MT" panose="020B0602020104020603"/>
+                <a:ea typeface="+mn-ea"/>
+                <a:cs typeface="+mn-cs"/>
+              </a:rPr>
+              <a:t>for</a:t>
+            </a:r>
+            <a:r>
+              <a:rPr kumimoji="0" lang="es-ES" sz="1800" b="0" i="0" u="none" strike="noStrike" kern="1200" cap="none" spc="0" normalizeH="0" baseline="0" noProof="0" dirty="0">
+                <a:ln>
+                  <a:noFill/>
+                </a:ln>
+                <a:solidFill>
+                  <a:prstClr val="white"/>
+                </a:solidFill>
+                <a:effectLst/>
+                <a:uLnTx/>
+                <a:uFillTx/>
+                <a:latin typeface="Tw Cen MT" panose="020B0602020104020603"/>
+                <a:ea typeface="+mn-ea"/>
+                <a:cs typeface="+mn-cs"/>
+              </a:rPr>
+              <a:t> </a:t>
+            </a:r>
+            <a:r>
+              <a:rPr kumimoji="0" lang="es-ES" sz="1800" b="0" i="0" u="none" strike="noStrike" kern="1200" cap="none" spc="0" normalizeH="0" baseline="0" noProof="0" dirty="0" err="1">
+                <a:ln>
+                  <a:noFill/>
+                </a:ln>
+                <a:solidFill>
+                  <a:prstClr val="white"/>
+                </a:solidFill>
+                <a:effectLst/>
+                <a:uLnTx/>
+                <a:uFillTx/>
+                <a:latin typeface="Tw Cen MT" panose="020B0602020104020603"/>
+                <a:ea typeface="+mn-ea"/>
+                <a:cs typeface="+mn-cs"/>
+              </a:rPr>
+              <a:t>each</a:t>
+            </a:r>
+            <a:r>
+              <a:rPr kumimoji="0" lang="es-ES" sz="1800" b="0" i="0" u="none" strike="noStrike" kern="1200" cap="none" spc="0" normalizeH="0" baseline="0" noProof="0" dirty="0">
+                <a:ln>
+                  <a:noFill/>
+                </a:ln>
+                <a:solidFill>
+                  <a:prstClr val="white"/>
+                </a:solidFill>
+                <a:effectLst/>
+                <a:uLnTx/>
+                <a:uFillTx/>
+                <a:latin typeface="Tw Cen MT" panose="020B0602020104020603"/>
+                <a:ea typeface="+mn-ea"/>
+                <a:cs typeface="+mn-cs"/>
+              </a:rPr>
+              <a:t> ST.</a:t>
+            </a:r>
+          </a:p>
+          <a:p>
+            <a:pPr marL="742950" lvl="1" indent="-285750">
+              <a:buFont typeface="Arial" panose="020B0604020202020204" pitchFamily="34" charset="0"/>
+              <a:buChar char="•"/>
+              <a:defRPr/>
+            </a:pPr>
+            <a:r>
+              <a:rPr lang="es-ES" dirty="0" err="1">
+                <a:solidFill>
+                  <a:prstClr val="white"/>
+                </a:solidFill>
+                <a:latin typeface="Tw Cen MT" panose="020B0602020104020603"/>
+              </a:rPr>
+              <a:t>Each</a:t>
+            </a:r>
+            <a:r>
+              <a:rPr lang="es-ES" dirty="0">
+                <a:solidFill>
+                  <a:prstClr val="white"/>
+                </a:solidFill>
+                <a:latin typeface="Tw Cen MT" panose="020B0602020104020603"/>
+              </a:rPr>
+              <a:t> ST has </a:t>
+            </a:r>
+            <a:r>
+              <a:rPr lang="es-ES" dirty="0" err="1">
+                <a:solidFill>
+                  <a:prstClr val="white"/>
+                </a:solidFill>
+                <a:latin typeface="Tw Cen MT" panose="020B0602020104020603"/>
+              </a:rPr>
+              <a:t>its</a:t>
+            </a:r>
+            <a:r>
+              <a:rPr lang="es-ES" dirty="0">
+                <a:solidFill>
+                  <a:prstClr val="white"/>
+                </a:solidFill>
+                <a:latin typeface="Tw Cen MT" panose="020B0602020104020603"/>
+              </a:rPr>
+              <a:t> </a:t>
+            </a:r>
+            <a:r>
+              <a:rPr lang="es-ES" dirty="0" err="1">
+                <a:solidFill>
+                  <a:prstClr val="white"/>
+                </a:solidFill>
+                <a:latin typeface="Tw Cen MT" panose="020B0602020104020603"/>
+              </a:rPr>
+              <a:t>owns</a:t>
+            </a:r>
+            <a:r>
+              <a:rPr lang="es-ES" dirty="0">
+                <a:solidFill>
+                  <a:prstClr val="white"/>
+                </a:solidFill>
+                <a:latin typeface="Tw Cen MT" panose="020B0602020104020603"/>
+              </a:rPr>
+              <a:t> </a:t>
+            </a:r>
+            <a:r>
+              <a:rPr lang="es-ES" dirty="0" err="1">
+                <a:solidFill>
+                  <a:prstClr val="white"/>
+                </a:solidFill>
+                <a:latin typeface="Tw Cen MT" panose="020B0602020104020603"/>
+              </a:rPr>
+              <a:t>sensors</a:t>
+            </a:r>
+            <a:r>
+              <a:rPr lang="es-ES" dirty="0">
+                <a:solidFill>
+                  <a:prstClr val="white"/>
+                </a:solidFill>
+                <a:latin typeface="Tw Cen MT" panose="020B0602020104020603"/>
+              </a:rPr>
+              <a:t> so </a:t>
+            </a:r>
+            <a:r>
+              <a:rPr lang="es-ES" dirty="0" err="1">
+                <a:solidFill>
+                  <a:prstClr val="white"/>
+                </a:solidFill>
+                <a:latin typeface="Tw Cen MT" panose="020B0602020104020603"/>
+              </a:rPr>
+              <a:t>Feature</a:t>
+            </a:r>
+            <a:r>
+              <a:rPr lang="es-ES" dirty="0">
+                <a:solidFill>
+                  <a:prstClr val="white"/>
+                </a:solidFill>
+                <a:latin typeface="Tw Cen MT" panose="020B0602020104020603"/>
+              </a:rPr>
+              <a:t> </a:t>
+            </a:r>
+            <a:r>
+              <a:rPr lang="es-ES" dirty="0" err="1">
+                <a:solidFill>
+                  <a:prstClr val="white"/>
+                </a:solidFill>
+                <a:latin typeface="Tw Cen MT" panose="020B0602020104020603"/>
+              </a:rPr>
+              <a:t>Sensors</a:t>
+            </a:r>
+            <a:r>
+              <a:rPr lang="es-ES" dirty="0">
+                <a:solidFill>
+                  <a:prstClr val="white"/>
+                </a:solidFill>
+                <a:latin typeface="Tw Cen MT" panose="020B0602020104020603"/>
+              </a:rPr>
+              <a:t> </a:t>
+            </a:r>
+            <a:r>
+              <a:rPr lang="es-ES" dirty="0" err="1">
+                <a:solidFill>
+                  <a:prstClr val="white"/>
+                </a:solidFill>
+                <a:latin typeface="Tw Cen MT" panose="020B0602020104020603"/>
+              </a:rPr>
+              <a:t>not</a:t>
+            </a:r>
+            <a:r>
+              <a:rPr lang="es-ES" dirty="0">
+                <a:solidFill>
+                  <a:prstClr val="white"/>
+                </a:solidFill>
+                <a:latin typeface="Tw Cen MT" panose="020B0602020104020603"/>
+              </a:rPr>
+              <a:t> in ST are </a:t>
+            </a:r>
+            <a:r>
+              <a:rPr lang="es-ES" dirty="0" err="1">
+                <a:solidFill>
+                  <a:prstClr val="white"/>
+                </a:solidFill>
+                <a:latin typeface="Tw Cen MT" panose="020B0602020104020603"/>
+              </a:rPr>
+              <a:t>deleted</a:t>
+            </a:r>
+            <a:r>
+              <a:rPr lang="es-ES" dirty="0">
+                <a:solidFill>
+                  <a:prstClr val="white"/>
+                </a:solidFill>
+                <a:latin typeface="Tw Cen MT" panose="020B0602020104020603"/>
+              </a:rPr>
+              <a:t>.</a:t>
+            </a:r>
+            <a:endParaRPr kumimoji="0" lang="es-ES" b="0" i="0" u="none" strike="noStrike" kern="1200" cap="none" spc="0" normalizeH="0" baseline="0" noProof="0" dirty="0">
+              <a:ln>
+                <a:noFill/>
+              </a:ln>
+              <a:solidFill>
+                <a:prstClr val="white"/>
+              </a:solidFill>
+              <a:effectLst/>
+              <a:uLnTx/>
+              <a:uFillTx/>
+              <a:latin typeface="Tw Cen MT" panose="020B0602020104020603"/>
+              <a:ea typeface="+mn-ea"/>
+              <a:cs typeface="+mn-cs"/>
+            </a:endParaRPr>
+          </a:p>
+        </p:txBody>
+      </p:sp>
+    </p:spTree>
+    <p:extLst>
+      <p:ext uri="{BB962C8B-B14F-4D97-AF65-F5344CB8AC3E}">
+        <p14:creationId xmlns:p14="http://schemas.microsoft.com/office/powerpoint/2010/main" val="1917479690"/>
+      </p:ext>
+    </p:extLst>
+  </p:cSld>
+  <p:clrMapOvr>
+    <a:masterClrMapping/>
+  </p:clrMapOvr>
+</p:sld>
+</file>
+
+<file path=ppt/slides/slide6.xml><?xml version="1.0" encoding="utf-8"?>
+<p:sld xmlns:a="http://schemas.openxmlformats.org/drawingml/2006/main" xmlns:r="http://schemas.openxmlformats.org/officeDocument/2006/relationships" xmlns:p="http://schemas.openxmlformats.org/presentationml/2006/main">
+  <p:cSld>
+    <p:spTree>
+      <p:nvGrpSpPr>
+        <p:cNvPr id="1" name=""/>
+        <p:cNvGrpSpPr/>
+        <p:nvPr/>
+      </p:nvGrpSpPr>
+      <p:grpSpPr>
+        <a:xfrm>
+          <a:off x="0" y="0"/>
+          <a:ext cx="0" cy="0"/>
+          <a:chOff x="0" y="0"/>
+          <a:chExt cx="0" cy="0"/>
+        </a:xfrm>
+      </p:grpSpPr>
       <p:pic>
         <p:nvPicPr>
-          <p:cNvPr id="7" name="Imagen 6">
+          <p:cNvPr id="1026" name="Picture 2" descr="Learn Web Development, Data Analytics &amp; UX/UI Design | Ironhack">
             <a:extLst>
               <a:ext uri="{FF2B5EF4-FFF2-40B4-BE49-F238E27FC236}">
-                <a16:creationId xmlns:a16="http://schemas.microsoft.com/office/drawing/2014/main" id="{54A22035-7390-7BE5-2089-CFE379D864F8}"/>
+                <a16:creationId xmlns:a16="http://schemas.microsoft.com/office/drawing/2014/main" id="{5E01E9BE-6179-4E9B-AFDA-54077CD7ED06}"/>
+              </a:ext>
+            </a:extLst>
+          </p:cNvPr>
+          <p:cNvPicPr>
+            <a:picLocks noChangeAspect="1" noChangeArrowheads="1"/>
+          </p:cNvPicPr>
+          <p:nvPr/>
+        </p:nvPicPr>
+        <p:blipFill>
+          <a:blip r:embed="rId3">
+            <a:extLst>
+              <a:ext uri="{28A0092B-C50C-407E-A947-70E740481C1C}">
+                <a14:useLocalDpi xmlns:a14="http://schemas.microsoft.com/office/drawing/2010/main" val="0"/>
+              </a:ext>
+            </a:extLst>
+          </a:blip>
+          <a:srcRect/>
+          <a:stretch>
+            <a:fillRect/>
+          </a:stretch>
+        </p:blipFill>
+        <p:spPr bwMode="auto">
+          <a:xfrm>
+            <a:off x="11205556" y="85897"/>
+            <a:ext cx="867122" cy="937429"/>
+          </a:xfrm>
+          <a:prstGeom prst="rect">
+            <a:avLst/>
+          </a:prstGeom>
+          <a:noFill/>
+          <a:extLst>
+            <a:ext uri="{909E8E84-426E-40DD-AFC4-6F175D3DCCD1}">
+              <a14:hiddenFill xmlns:a14="http://schemas.microsoft.com/office/drawing/2010/main">
+                <a:solidFill>
+                  <a:srgbClr val="FFFFFF"/>
+                </a:solidFill>
+              </a14:hiddenFill>
+            </a:ext>
+          </a:extLst>
+        </p:spPr>
+      </p:pic>
+      <p:sp>
+        <p:nvSpPr>
+          <p:cNvPr id="11" name="Rectángulo 10">
+            <a:extLst>
+              <a:ext uri="{FF2B5EF4-FFF2-40B4-BE49-F238E27FC236}">
+                <a16:creationId xmlns:a16="http://schemas.microsoft.com/office/drawing/2014/main" id="{91E00118-B49C-40D5-9A2B-B960249F409A}"/>
+              </a:ext>
+            </a:extLst>
+          </p:cNvPr>
+          <p:cNvSpPr/>
+          <p:nvPr/>
+        </p:nvSpPr>
+        <p:spPr>
+          <a:xfrm>
+            <a:off x="1393766" y="1023326"/>
+            <a:ext cx="9404465" cy="58189"/>
+          </a:xfrm>
+          <a:prstGeom prst="rect">
+            <a:avLst/>
+          </a:prstGeom>
+          <a:solidFill>
+            <a:schemeClr val="tx1"/>
+          </a:solidFill>
+          <a:ln>
+            <a:noFill/>
+          </a:ln>
+        </p:spPr>
+        <p:style>
+          <a:lnRef idx="2">
+            <a:schemeClr val="accent1">
+              <a:shade val="50000"/>
+            </a:schemeClr>
+          </a:lnRef>
+          <a:fillRef idx="1">
+            <a:schemeClr val="accent1"/>
+          </a:fillRef>
+          <a:effectRef idx="0">
+            <a:schemeClr val="accent1"/>
+          </a:effectRef>
+          <a:fontRef idx="minor">
+            <a:schemeClr val="lt1"/>
+          </a:fontRef>
+        </p:style>
+        <p:txBody>
+          <a:bodyPr rtlCol="0" anchor="ctr"/>
+          <a:lstStyle/>
+          <a:p>
+            <a:pPr marL="0" marR="0" lvl="0" indent="0" algn="ctr" defTabSz="457200" rtl="0" eaLnBrk="1" fontAlgn="auto" latinLnBrk="0" hangingPunct="1">
+              <a:lnSpc>
+                <a:spcPct val="100000"/>
+              </a:lnSpc>
+              <a:spcBef>
+                <a:spcPts val="0"/>
+              </a:spcBef>
+              <a:spcAft>
+                <a:spcPts val="0"/>
+              </a:spcAft>
+              <a:buClrTx/>
+              <a:buSzTx/>
+              <a:buFontTx/>
+              <a:buNone/>
+              <a:tabLst/>
+              <a:defRPr/>
+            </a:pPr>
+            <a:endParaRPr kumimoji="0" lang="ca-ES" sz="1800" b="0" i="0" u="none" strike="noStrike" kern="1200" cap="none" spc="0" normalizeH="0" baseline="0" noProof="0">
+              <a:ln>
+                <a:noFill/>
+              </a:ln>
+              <a:solidFill>
+                <a:prstClr val="white"/>
+              </a:solidFill>
+              <a:effectLst/>
+              <a:uLnTx/>
+              <a:uFillTx/>
+              <a:latin typeface="Tw Cen MT" panose="020B0602020104020603"/>
+              <a:ea typeface="+mn-ea"/>
+              <a:cs typeface="+mn-cs"/>
+            </a:endParaRPr>
+          </a:p>
+        </p:txBody>
+      </p:sp>
+      <p:sp>
+        <p:nvSpPr>
+          <p:cNvPr id="14" name="Rectángulo 13">
+            <a:extLst>
+              <a:ext uri="{FF2B5EF4-FFF2-40B4-BE49-F238E27FC236}">
+                <a16:creationId xmlns:a16="http://schemas.microsoft.com/office/drawing/2014/main" id="{8E858A2A-0C33-418C-849C-53BFDE89A632}"/>
+              </a:ext>
+            </a:extLst>
+          </p:cNvPr>
+          <p:cNvSpPr/>
+          <p:nvPr/>
+        </p:nvSpPr>
+        <p:spPr>
+          <a:xfrm>
+            <a:off x="3777101" y="99996"/>
+            <a:ext cx="4637808" cy="923330"/>
+          </a:xfrm>
+          <a:prstGeom prst="rect">
+            <a:avLst/>
+          </a:prstGeom>
+          <a:noFill/>
+        </p:spPr>
+        <p:txBody>
+          <a:bodyPr wrap="none" lIns="91440" tIns="45720" rIns="91440" bIns="45720">
+            <a:spAutoFit/>
+          </a:bodyPr>
+          <a:lstStyle/>
+          <a:p>
+            <a:pPr marL="0" marR="0" lvl="0" indent="0" algn="ctr" defTabSz="457200" rtl="0" eaLnBrk="1" fontAlgn="auto" latinLnBrk="0" hangingPunct="1">
+              <a:lnSpc>
+                <a:spcPct val="100000"/>
+              </a:lnSpc>
+              <a:spcBef>
+                <a:spcPts val="0"/>
+              </a:spcBef>
+              <a:spcAft>
+                <a:spcPts val="0"/>
+              </a:spcAft>
+              <a:buClrTx/>
+              <a:buSzTx/>
+              <a:buFontTx/>
+              <a:buNone/>
+              <a:tabLst/>
+              <a:defRPr/>
+            </a:pPr>
+            <a:r>
+              <a:rPr kumimoji="0" lang="es-ES" sz="5400" b="0" i="0" u="none" strike="noStrike" kern="1200" cap="none" spc="0" normalizeH="0" baseline="0" noProof="0" dirty="0">
+                <a:ln w="0"/>
+                <a:solidFill>
+                  <a:prstClr val="white"/>
+                </a:solidFill>
+                <a:effectLst>
+                  <a:outerShdw blurRad="38100" dist="19050" dir="2700000" algn="tl" rotWithShape="0">
+                    <a:prstClr val="black">
+                      <a:alpha val="40000"/>
+                    </a:prstClr>
+                  </a:outerShdw>
+                </a:effectLst>
+                <a:uLnTx/>
+                <a:uFillTx/>
+                <a:latin typeface="Tw Cen MT" panose="020B0602020104020603"/>
+                <a:ea typeface="+mn-ea"/>
+                <a:cs typeface="+mn-cs"/>
+              </a:rPr>
+              <a:t>Data </a:t>
+            </a:r>
+            <a:r>
+              <a:rPr kumimoji="0" lang="es-ES" sz="5400" b="0" i="0" u="none" strike="noStrike" kern="1200" cap="none" spc="0" normalizeH="0" baseline="0" noProof="0" dirty="0" err="1">
+                <a:ln w="0"/>
+                <a:solidFill>
+                  <a:prstClr val="white"/>
+                </a:solidFill>
+                <a:effectLst>
+                  <a:outerShdw blurRad="38100" dist="19050" dir="2700000" algn="tl" rotWithShape="0">
+                    <a:prstClr val="black">
+                      <a:alpha val="40000"/>
+                    </a:prstClr>
+                  </a:outerShdw>
+                </a:effectLst>
+                <a:uLnTx/>
+                <a:uFillTx/>
+                <a:latin typeface="Tw Cen MT" panose="020B0602020104020603"/>
+                <a:ea typeface="+mn-ea"/>
+                <a:cs typeface="+mn-cs"/>
+              </a:rPr>
+              <a:t>Cleanning</a:t>
+            </a:r>
+            <a:r>
+              <a:rPr kumimoji="0" lang="es-ES" sz="5400" b="0" i="0" u="none" strike="noStrike" kern="1200" cap="none" spc="0" normalizeH="0" baseline="0" noProof="0" dirty="0">
+                <a:ln w="0"/>
+                <a:solidFill>
+                  <a:prstClr val="white"/>
+                </a:solidFill>
+                <a:effectLst>
+                  <a:outerShdw blurRad="38100" dist="19050" dir="2700000" algn="tl" rotWithShape="0">
+                    <a:prstClr val="black">
+                      <a:alpha val="40000"/>
+                    </a:prstClr>
+                  </a:outerShdw>
+                </a:effectLst>
+                <a:uLnTx/>
+                <a:uFillTx/>
+                <a:latin typeface="Tw Cen MT" panose="020B0602020104020603"/>
+                <a:ea typeface="+mn-ea"/>
+                <a:cs typeface="+mn-cs"/>
+              </a:rPr>
+              <a:t>:</a:t>
+            </a:r>
+          </a:p>
+        </p:txBody>
+      </p:sp>
+      <p:sp>
+        <p:nvSpPr>
+          <p:cNvPr id="20" name="Text 3">
+            <a:extLst>
+              <a:ext uri="{FF2B5EF4-FFF2-40B4-BE49-F238E27FC236}">
+                <a16:creationId xmlns:a16="http://schemas.microsoft.com/office/drawing/2014/main" id="{81386E12-880E-4A87-9C58-72230817ED1D}"/>
+              </a:ext>
+            </a:extLst>
+          </p:cNvPr>
+          <p:cNvSpPr/>
+          <p:nvPr/>
+        </p:nvSpPr>
+        <p:spPr>
+          <a:xfrm>
+            <a:off x="232756" y="216528"/>
+            <a:ext cx="989213" cy="690265"/>
+          </a:xfrm>
+          <a:prstGeom prst="rect">
+            <a:avLst/>
+          </a:prstGeom>
+          <a:noFill/>
+          <a:ln/>
+        </p:spPr>
+        <p:txBody>
+          <a:bodyPr wrap="square" lIns="0" tIns="0" rIns="0" bIns="0" rtlCol="0" anchor="ctr"/>
+          <a:lstStyle/>
+          <a:p>
+            <a:pPr marL="0" marR="0" lvl="0" indent="0" algn="l" defTabSz="457200" rtl="0" eaLnBrk="1" fontAlgn="auto" latinLnBrk="0" hangingPunct="1">
+              <a:lnSpc>
+                <a:spcPct val="100000"/>
+              </a:lnSpc>
+              <a:spcBef>
+                <a:spcPts val="0"/>
+              </a:spcBef>
+              <a:spcAft>
+                <a:spcPts val="0"/>
+              </a:spcAft>
+              <a:buClrTx/>
+              <a:buSzTx/>
+              <a:buFontTx/>
+              <a:buNone/>
+              <a:tabLst/>
+              <a:defRPr/>
+            </a:pPr>
+            <a:r>
+              <a:rPr kumimoji="0" lang="en-US" sz="5400" b="1" i="0" u="none" strike="noStrike" kern="1200" cap="none" spc="0" normalizeH="0" baseline="0" noProof="0" dirty="0">
+                <a:ln>
+                  <a:noFill/>
+                </a:ln>
+                <a:solidFill>
+                  <a:srgbClr val="E07B39"/>
+                </a:solidFill>
+                <a:effectLst/>
+                <a:uLnTx/>
+                <a:uFillTx/>
+                <a:latin typeface="Cambria" pitchFamily="34" charset="0"/>
+                <a:ea typeface="Cambria" pitchFamily="34" charset="-122"/>
+                <a:cs typeface="Cambria" pitchFamily="34" charset="-120"/>
+              </a:rPr>
+              <a:t>03</a:t>
+            </a:r>
+            <a:endParaRPr kumimoji="0" lang="en-US" sz="5400" b="0" i="0" u="none" strike="noStrike" kern="1200" cap="none" spc="0" normalizeH="0" baseline="0" noProof="0" dirty="0">
+              <a:ln>
+                <a:noFill/>
+              </a:ln>
+              <a:solidFill>
+                <a:prstClr val="white"/>
+              </a:solidFill>
+              <a:effectLst/>
+              <a:uLnTx/>
+              <a:uFillTx/>
+              <a:latin typeface="Tw Cen MT" panose="020B0602020104020603"/>
+              <a:ea typeface="+mn-ea"/>
+              <a:cs typeface="+mn-cs"/>
+            </a:endParaRPr>
+          </a:p>
+        </p:txBody>
+      </p:sp>
+      <p:pic>
+        <p:nvPicPr>
+          <p:cNvPr id="4" name="Imagen 3">
+            <a:extLst>
+              <a:ext uri="{FF2B5EF4-FFF2-40B4-BE49-F238E27FC236}">
+                <a16:creationId xmlns:a16="http://schemas.microsoft.com/office/drawing/2014/main" id="{D4D38FFC-DEBF-CAB9-BAC6-6B65FF4D46F6}"/>
               </a:ext>
             </a:extLst>
           </p:cNvPr>
@@ -16662,8 +20236,192 @@
         </p:blipFill>
         <p:spPr>
           <a:xfrm>
-            <a:off x="4297864" y="5044322"/>
-            <a:ext cx="3596272" cy="1580703"/>
+            <a:off x="1393766" y="2295072"/>
+            <a:ext cx="3942817" cy="3882714"/>
+          </a:xfrm>
+          <a:prstGeom prst="rect">
+            <a:avLst/>
+          </a:prstGeom>
+        </p:spPr>
+      </p:pic>
+      <p:sp>
+        <p:nvSpPr>
+          <p:cNvPr id="7" name="CuadroTexto 6">
+            <a:extLst>
+              <a:ext uri="{FF2B5EF4-FFF2-40B4-BE49-F238E27FC236}">
+                <a16:creationId xmlns:a16="http://schemas.microsoft.com/office/drawing/2014/main" id="{B033C0D8-ED17-0CC1-2909-C0F037567F33}"/>
+              </a:ext>
+            </a:extLst>
+          </p:cNvPr>
+          <p:cNvSpPr txBox="1"/>
+          <p:nvPr/>
+        </p:nvSpPr>
+        <p:spPr>
+          <a:xfrm flipH="1">
+            <a:off x="3089129" y="1946656"/>
+            <a:ext cx="552089" cy="369332"/>
+          </a:xfrm>
+          <a:prstGeom prst="rect">
+            <a:avLst/>
+          </a:prstGeom>
+          <a:noFill/>
+        </p:spPr>
+        <p:txBody>
+          <a:bodyPr wrap="square" rtlCol="0">
+            <a:spAutoFit/>
+          </a:bodyPr>
+          <a:lstStyle/>
+          <a:p>
+            <a:pPr marR="0" lvl="0" algn="l" defTabSz="457200" rtl="0" eaLnBrk="1" fontAlgn="auto" latinLnBrk="0" hangingPunct="1">
+              <a:lnSpc>
+                <a:spcPct val="100000"/>
+              </a:lnSpc>
+              <a:spcBef>
+                <a:spcPts val="0"/>
+              </a:spcBef>
+              <a:spcAft>
+                <a:spcPts val="0"/>
+              </a:spcAft>
+              <a:buClrTx/>
+              <a:buSzTx/>
+              <a:tabLst/>
+              <a:defRPr/>
+            </a:pPr>
+            <a:r>
+              <a:rPr kumimoji="0" lang="es-ES" sz="1800" b="0" i="0" u="none" strike="noStrike" kern="1200" cap="none" spc="0" normalizeH="0" baseline="0" noProof="0" dirty="0">
+                <a:ln>
+                  <a:noFill/>
+                </a:ln>
+                <a:solidFill>
+                  <a:prstClr val="white"/>
+                </a:solidFill>
+                <a:effectLst/>
+                <a:uLnTx/>
+                <a:uFillTx/>
+                <a:latin typeface="Tw Cen MT" panose="020B0602020104020603"/>
+                <a:ea typeface="+mn-ea"/>
+                <a:cs typeface="+mn-cs"/>
+              </a:rPr>
+              <a:t>ST1</a:t>
+            </a:r>
+            <a:endParaRPr kumimoji="0" lang="es-ES" b="0" i="0" u="none" strike="noStrike" kern="1200" cap="none" spc="0" normalizeH="0" baseline="0" noProof="0" dirty="0">
+              <a:ln>
+                <a:noFill/>
+              </a:ln>
+              <a:solidFill>
+                <a:prstClr val="white"/>
+              </a:solidFill>
+              <a:effectLst/>
+              <a:uLnTx/>
+              <a:uFillTx/>
+              <a:latin typeface="Tw Cen MT" panose="020B0602020104020603"/>
+              <a:ea typeface="+mn-ea"/>
+              <a:cs typeface="+mn-cs"/>
+            </a:endParaRPr>
+          </a:p>
+        </p:txBody>
+      </p:sp>
+      <p:sp>
+        <p:nvSpPr>
+          <p:cNvPr id="8" name="CuadroTexto 7">
+            <a:extLst>
+              <a:ext uri="{FF2B5EF4-FFF2-40B4-BE49-F238E27FC236}">
+                <a16:creationId xmlns:a16="http://schemas.microsoft.com/office/drawing/2014/main" id="{499C93B4-7712-4AAF-9F8E-E1BA9AC067EF}"/>
+              </a:ext>
+            </a:extLst>
+          </p:cNvPr>
+          <p:cNvSpPr txBox="1"/>
+          <p:nvPr/>
+        </p:nvSpPr>
+        <p:spPr>
+          <a:xfrm flipH="1">
+            <a:off x="8574992" y="1946656"/>
+            <a:ext cx="552089" cy="369332"/>
+          </a:xfrm>
+          <a:prstGeom prst="rect">
+            <a:avLst/>
+          </a:prstGeom>
+          <a:noFill/>
+        </p:spPr>
+        <p:txBody>
+          <a:bodyPr wrap="square" rtlCol="0">
+            <a:spAutoFit/>
+          </a:bodyPr>
+          <a:lstStyle/>
+          <a:p>
+            <a:pPr marR="0" lvl="0" algn="l" defTabSz="457200" rtl="0" eaLnBrk="1" fontAlgn="auto" latinLnBrk="0" hangingPunct="1">
+              <a:lnSpc>
+                <a:spcPct val="100000"/>
+              </a:lnSpc>
+              <a:spcBef>
+                <a:spcPts val="0"/>
+              </a:spcBef>
+              <a:spcAft>
+                <a:spcPts val="0"/>
+              </a:spcAft>
+              <a:buClrTx/>
+              <a:buSzTx/>
+              <a:tabLst/>
+              <a:defRPr/>
+            </a:pPr>
+            <a:r>
+              <a:rPr kumimoji="0" lang="es-ES" sz="1800" b="0" i="0" u="none" strike="noStrike" kern="1200" cap="none" spc="0" normalizeH="0" baseline="0" noProof="0" dirty="0">
+                <a:ln>
+                  <a:noFill/>
+                </a:ln>
+                <a:solidFill>
+                  <a:prstClr val="white"/>
+                </a:solidFill>
+                <a:effectLst/>
+                <a:uLnTx/>
+                <a:uFillTx/>
+                <a:latin typeface="Tw Cen MT" panose="020B0602020104020603"/>
+                <a:ea typeface="+mn-ea"/>
+                <a:cs typeface="+mn-cs"/>
+              </a:rPr>
+              <a:t>ST7</a:t>
+            </a:r>
+            <a:endParaRPr kumimoji="0" lang="es-ES" b="0" i="0" u="none" strike="noStrike" kern="1200" cap="none" spc="0" normalizeH="0" baseline="0" noProof="0" dirty="0">
+              <a:ln>
+                <a:noFill/>
+              </a:ln>
+              <a:solidFill>
+                <a:prstClr val="white"/>
+              </a:solidFill>
+              <a:effectLst/>
+              <a:uLnTx/>
+              <a:uFillTx/>
+              <a:latin typeface="Tw Cen MT" panose="020B0602020104020603"/>
+              <a:ea typeface="+mn-ea"/>
+              <a:cs typeface="+mn-cs"/>
+            </a:endParaRPr>
+          </a:p>
+        </p:txBody>
+      </p:sp>
+      <p:pic>
+        <p:nvPicPr>
+          <p:cNvPr id="10" name="Imagen 9">
+            <a:extLst>
+              <a:ext uri="{FF2B5EF4-FFF2-40B4-BE49-F238E27FC236}">
+                <a16:creationId xmlns:a16="http://schemas.microsoft.com/office/drawing/2014/main" id="{F9EA86AB-8263-F2F2-6A44-8EA687D7A829}"/>
+              </a:ext>
+            </a:extLst>
+          </p:cNvPr>
+          <p:cNvPicPr>
+            <a:picLocks noChangeAspect="1"/>
+          </p:cNvPicPr>
+          <p:nvPr/>
+        </p:nvPicPr>
+        <p:blipFill>
+          <a:blip r:embed="rId5"/>
+          <a:stretch>
+            <a:fillRect/>
+          </a:stretch>
+        </p:blipFill>
+        <p:spPr>
+          <a:xfrm>
+            <a:off x="6742462" y="2295072"/>
+            <a:ext cx="4217148" cy="3156585"/>
           </a:xfrm>
           <a:prstGeom prst="rect">
             <a:avLst/>
@@ -16673,7 +20431,7 @@
     </p:spTree>
     <p:extLst>
       <p:ext uri="{BB962C8B-B14F-4D97-AF65-F5344CB8AC3E}">
-        <p14:creationId xmlns:p14="http://schemas.microsoft.com/office/powerpoint/2010/main" val="1917479690"/>
+        <p14:creationId xmlns:p14="http://schemas.microsoft.com/office/powerpoint/2010/main" val="144049094"/>
       </p:ext>
     </p:extLst>
   </p:cSld>
@@ -16683,7 +20441,7 @@
 </p:sld>
 </file>
 
-<file path=ppt/slides/slide6.xml><?xml version="1.0" encoding="utf-8"?>
+<file path=ppt/slides/slide7.xml><?xml version="1.0" encoding="utf-8"?>
 <p:sld xmlns:a="http://schemas.openxmlformats.org/drawingml/2006/main" xmlns:r="http://schemas.openxmlformats.org/officeDocument/2006/relationships" xmlns:p="http://schemas.openxmlformats.org/presentationml/2006/main">
   <p:cSld>
     <p:spTree>
@@ -16794,37 +20552,8 @@
           <a:bodyPr rtlCol="0" anchor="ctr"/>
           <a:lstStyle/>
           <a:p>
-            <a:pPr marL="0" marR="0" lvl="0" indent="0" algn="ctr" defTabSz="457200" rtl="0" eaLnBrk="1" fontAlgn="auto" latinLnBrk="0" hangingPunct="1">
-              <a:lnSpc>
-                <a:spcPct val="100000"/>
-              </a:lnSpc>
-              <a:spcBef>
-                <a:spcPts val="0"/>
-              </a:spcBef>
-              <a:spcAft>
-                <a:spcPts val="0"/>
-              </a:spcAft>
-              <a:buClrTx/>
-              <a:buSzTx/>
-              <a:buFontTx/>
-              <a:buNone/>
-              <a:tabLst/>
-              <a:defRPr/>
-            </a:pPr>
-            <a:endParaRPr kumimoji="0" lang="ca-ES" sz="1800" b="0" i="0" u="none" strike="noStrike" kern="1200" cap="none" spc="0" normalizeH="0" baseline="0" noProof="0">
-              <a:ln>
-                <a:noFill/>
-              </a:ln>
-              <a:solidFill>
-                <a:prstClr val="white"/>
-              </a:solidFill>
-              <a:effectLst/>
-              <a:uLnTx/>
-              <a:uFillTx/>
-              <a:latin typeface="Tw Cen MT" panose="020B0602020104020603"/>
-              <a:ea typeface="+mn-ea"/>
-              <a:cs typeface="+mn-cs"/>
-            </a:endParaRPr>
+            <a:pPr algn="ctr"/>
+            <a:endParaRPr lang="ca-ES"/>
           </a:p>
         </p:txBody>
       </p:sp>
@@ -16842,8 +20571,8 @@
         </p:nvSpPr>
         <p:spPr>
           <a:xfrm>
-            <a:off x="3777101" y="99996"/>
-            <a:ext cx="4637808" cy="923330"/>
+            <a:off x="3258243" y="99996"/>
+            <a:ext cx="5675528" cy="923330"/>
           </a:xfrm>
           <a:prstGeom prst="rect">
             <a:avLst/>
@@ -16856,85 +20585,22 @@
           </a:bodyPr>
           <a:lstStyle/>
           <a:p>
-            <a:pPr marL="0" marR="0" lvl="0" indent="0" algn="ctr" defTabSz="457200" rtl="0" eaLnBrk="1" fontAlgn="auto" latinLnBrk="0" hangingPunct="1">
-              <a:lnSpc>
-                <a:spcPct val="100000"/>
-              </a:lnSpc>
-              <a:spcBef>
-                <a:spcPts val="0"/>
-              </a:spcBef>
-              <a:spcAft>
-                <a:spcPts val="0"/>
-              </a:spcAft>
-              <a:buClrTx/>
-              <a:buSzTx/>
-              <a:buFontTx/>
-              <a:buNone/>
-              <a:tabLst/>
-              <a:defRPr/>
-            </a:pPr>
-            <a:r>
-              <a:rPr kumimoji="0" lang="es-ES" sz="5400" b="0" i="0" u="none" strike="noStrike" kern="1200" cap="none" spc="0" normalizeH="0" baseline="0" noProof="0" dirty="0">
+            <a:pPr algn="ctr"/>
+            <a:r>
+              <a:rPr lang="es-ES" sz="5400" b="0" cap="none" spc="0" dirty="0">
                 <a:ln w="0"/>
                 <a:solidFill>
-                  <a:prstClr val="white"/>
+                  <a:schemeClr val="tx1"/>
                 </a:solidFill>
                 <a:effectLst>
                   <a:outerShdw blurRad="38100" dist="19050" dir="2700000" algn="tl" rotWithShape="0">
-                    <a:prstClr val="black">
+                    <a:schemeClr val="dk1">
                       <a:alpha val="40000"/>
-                    </a:prstClr>
+                    </a:schemeClr>
                   </a:outerShdw>
                 </a:effectLst>
-                <a:uLnTx/>
-                <a:uFillTx/>
-                <a:latin typeface="Tw Cen MT" panose="020B0602020104020603"/>
-                <a:ea typeface="+mn-ea"/>
-                <a:cs typeface="+mn-cs"/>
               </a:rPr>
-              <a:t>Data </a:t>
-            </a:r>
-            <a:r>
-              <a:rPr kumimoji="0" lang="es-ES" sz="5400" b="0" i="0" u="none" strike="noStrike" kern="1200" cap="none" spc="0" normalizeH="0" baseline="0" noProof="0" dirty="0" err="1">
-                <a:ln w="0"/>
-                <a:solidFill>
-                  <a:prstClr val="white"/>
-                </a:solidFill>
-                <a:effectLst>
-                  <a:outerShdw blurRad="38100" dist="19050" dir="2700000" algn="tl" rotWithShape="0">
-                    <a:prstClr val="black">
-                      <a:alpha val="40000"/>
-                    </a:prstClr>
-                  </a:outerShdw>
-                </a:effectLst>
-                <a:uLnTx/>
-                <a:uFillTx/>
-                <a:latin typeface="Tw Cen MT" panose="020B0602020104020603"/>
-                <a:ea typeface="+mn-ea"/>
-                <a:cs typeface="+mn-cs"/>
-              </a:rPr>
-              <a:t>Cleanning</a:t>
-            </a:r>
-            <a:r>
-              <a:rPr kumimoji="0" lang="es-ES" sz="5400" b="0" i="0" u="none" strike="noStrike" kern="1200" cap="none" spc="0" normalizeH="0" baseline="0" noProof="0" dirty="0">
-                <a:ln w="0"/>
-                <a:solidFill>
-                  <a:prstClr val="white"/>
-                </a:solidFill>
-                <a:effectLst>
-                  <a:outerShdw blurRad="38100" dist="19050" dir="2700000" algn="tl" rotWithShape="0">
-                    <a:prstClr val="black">
-                      <a:alpha val="40000"/>
-                    </a:prstClr>
-                  </a:outerShdw>
-                </a:effectLst>
-                <a:uLnTx/>
-                <a:uFillTx/>
-                <a:latin typeface="Tw Cen MT" panose="020B0602020104020603"/>
-                <a:ea typeface="+mn-ea"/>
-                <a:cs typeface="+mn-cs"/>
-              </a:rPr>
-              <a:t>:</a:t>
+              <a:t>Feature Engineering:</a:t>
             </a:r>
           </a:p>
         </p:txBody>
@@ -16953,8 +20619,8 @@
         </p:nvSpPr>
         <p:spPr>
           <a:xfrm>
-            <a:off x="1759789" y="1339908"/>
-            <a:ext cx="4968816" cy="923330"/>
+            <a:off x="2299236" y="4090909"/>
+            <a:ext cx="7593521" cy="2031325"/>
           </a:xfrm>
           <a:prstGeom prst="rect">
             <a:avLst/>
@@ -16967,417 +20633,48 @@
           </a:bodyPr>
           <a:lstStyle/>
           <a:p>
-            <a:pPr marL="285750" marR="0" lvl="0" indent="-285750" algn="l" defTabSz="457200" rtl="0" eaLnBrk="1" fontAlgn="auto" latinLnBrk="0" hangingPunct="1">
-              <a:lnSpc>
-                <a:spcPct val="100000"/>
-              </a:lnSpc>
-              <a:spcBef>
-                <a:spcPts val="0"/>
-              </a:spcBef>
-              <a:spcAft>
-                <a:spcPts val="0"/>
-              </a:spcAft>
-              <a:buClrTx/>
-              <a:buSzTx/>
+            <a:pPr marL="285750" indent="-285750">
               <a:buFont typeface="Arial" panose="020B0604020202020204" pitchFamily="34" charset="0"/>
               <a:buChar char="•"/>
-              <a:tabLst/>
-              <a:defRPr/>
             </a:pPr>
             <a:r>
-              <a:rPr kumimoji="0" lang="es-ES" sz="1800" b="0" i="0" u="none" strike="noStrike" kern="1200" cap="none" spc="0" normalizeH="0" baseline="0" noProof="0" dirty="0">
-                <a:ln>
-                  <a:noFill/>
-                </a:ln>
-                <a:solidFill>
-                  <a:prstClr val="white"/>
-                </a:solidFill>
-                <a:effectLst/>
-                <a:uLnTx/>
-                <a:uFillTx/>
-                <a:latin typeface="Tw Cen MT" panose="020B0602020104020603"/>
-                <a:ea typeface="+mn-ea"/>
-                <a:cs typeface="+mn-cs"/>
-              </a:rPr>
-              <a:t>Split </a:t>
-            </a:r>
-            <a:r>
-              <a:rPr kumimoji="0" lang="es-ES" sz="1800" b="0" i="0" u="none" strike="noStrike" kern="1200" cap="none" spc="0" normalizeH="0" baseline="0" noProof="0" dirty="0" err="1">
-                <a:ln>
-                  <a:noFill/>
-                </a:ln>
-                <a:solidFill>
-                  <a:prstClr val="white"/>
-                </a:solidFill>
-                <a:effectLst/>
-                <a:uLnTx/>
-                <a:uFillTx/>
-                <a:latin typeface="Tw Cen MT" panose="020B0602020104020603"/>
-                <a:ea typeface="+mn-ea"/>
-                <a:cs typeface="+mn-cs"/>
-              </a:rPr>
-              <a:t>Initial</a:t>
-            </a:r>
-            <a:r>
-              <a:rPr kumimoji="0" lang="es-ES" sz="1800" b="0" i="0" u="none" strike="noStrike" kern="1200" cap="none" spc="0" normalizeH="0" baseline="0" noProof="0" dirty="0">
-                <a:ln>
-                  <a:noFill/>
-                </a:ln>
-                <a:solidFill>
-                  <a:prstClr val="white"/>
-                </a:solidFill>
-                <a:effectLst/>
-                <a:uLnTx/>
-                <a:uFillTx/>
-                <a:latin typeface="Tw Cen MT" panose="020B0602020104020603"/>
-                <a:ea typeface="+mn-ea"/>
-                <a:cs typeface="+mn-cs"/>
-              </a:rPr>
-              <a:t> </a:t>
-            </a:r>
-            <a:r>
-              <a:rPr kumimoji="0" lang="es-ES" sz="1800" b="0" i="0" u="none" strike="noStrike" kern="1200" cap="none" spc="0" normalizeH="0" baseline="0" noProof="0" dirty="0" err="1">
-                <a:ln>
-                  <a:noFill/>
-                </a:ln>
-                <a:solidFill>
-                  <a:prstClr val="white"/>
-                </a:solidFill>
-                <a:effectLst/>
-                <a:uLnTx/>
-                <a:uFillTx/>
-                <a:latin typeface="Tw Cen MT" panose="020B0602020104020603"/>
-                <a:ea typeface="+mn-ea"/>
-                <a:cs typeface="+mn-cs"/>
-              </a:rPr>
-              <a:t>df</a:t>
-            </a:r>
-            <a:r>
-              <a:rPr kumimoji="0" lang="es-ES" sz="1800" b="0" i="0" u="none" strike="noStrike" kern="1200" cap="none" spc="0" normalizeH="0" baseline="0" noProof="0" dirty="0">
-                <a:ln>
-                  <a:noFill/>
-                </a:ln>
-                <a:solidFill>
-                  <a:prstClr val="white"/>
-                </a:solidFill>
-                <a:effectLst/>
-                <a:uLnTx/>
-                <a:uFillTx/>
-                <a:latin typeface="Tw Cen MT" panose="020B0602020104020603"/>
-                <a:ea typeface="+mn-ea"/>
-                <a:cs typeface="+mn-cs"/>
-              </a:rPr>
-              <a:t> </a:t>
-            </a:r>
-            <a:r>
-              <a:rPr kumimoji="0" lang="es-ES" sz="1800" b="0" i="0" u="none" strike="noStrike" kern="1200" cap="none" spc="0" normalizeH="0" baseline="0" noProof="0" dirty="0" err="1">
-                <a:ln>
-                  <a:noFill/>
-                </a:ln>
-                <a:solidFill>
-                  <a:prstClr val="white"/>
-                </a:solidFill>
-                <a:effectLst/>
-                <a:uLnTx/>
-                <a:uFillTx/>
-                <a:latin typeface="Tw Cen MT" panose="020B0602020104020603"/>
-                <a:ea typeface="+mn-ea"/>
-                <a:cs typeface="+mn-cs"/>
-              </a:rPr>
-              <a:t>to</a:t>
-            </a:r>
-            <a:r>
-              <a:rPr kumimoji="0" lang="es-ES" sz="1800" b="0" i="0" u="none" strike="noStrike" kern="1200" cap="none" spc="0" normalizeH="0" baseline="0" noProof="0" dirty="0">
-                <a:ln>
-                  <a:noFill/>
-                </a:ln>
-                <a:solidFill>
-                  <a:prstClr val="white"/>
-                </a:solidFill>
-                <a:effectLst/>
-                <a:uLnTx/>
-                <a:uFillTx/>
-                <a:latin typeface="Tw Cen MT" panose="020B0602020104020603"/>
-                <a:ea typeface="+mn-ea"/>
-                <a:cs typeface="+mn-cs"/>
-              </a:rPr>
-              <a:t> </a:t>
-            </a:r>
-            <a:r>
-              <a:rPr kumimoji="0" lang="es-ES" sz="1800" b="0" i="0" u="none" strike="noStrike" kern="1200" cap="none" spc="0" normalizeH="0" baseline="0" noProof="0" dirty="0" err="1">
-                <a:ln>
-                  <a:noFill/>
-                </a:ln>
-                <a:solidFill>
-                  <a:prstClr val="white"/>
-                </a:solidFill>
-                <a:effectLst/>
-                <a:uLnTx/>
-                <a:uFillTx/>
-                <a:latin typeface="Tw Cen MT" panose="020B0602020104020603"/>
-                <a:ea typeface="+mn-ea"/>
-                <a:cs typeface="+mn-cs"/>
-              </a:rPr>
-              <a:t>df</a:t>
-            </a:r>
-            <a:r>
-              <a:rPr kumimoji="0" lang="es-ES" sz="1800" b="0" i="0" u="none" strike="noStrike" kern="1200" cap="none" spc="0" normalizeH="0" baseline="0" noProof="0" dirty="0">
-                <a:ln>
-                  <a:noFill/>
-                </a:ln>
-                <a:solidFill>
-                  <a:prstClr val="white"/>
-                </a:solidFill>
-                <a:effectLst/>
-                <a:uLnTx/>
-                <a:uFillTx/>
-                <a:latin typeface="Tw Cen MT" panose="020B0602020104020603"/>
-                <a:ea typeface="+mn-ea"/>
-                <a:cs typeface="+mn-cs"/>
-              </a:rPr>
-              <a:t> </a:t>
-            </a:r>
-            <a:r>
-              <a:rPr kumimoji="0" lang="es-ES" sz="1800" b="0" i="0" u="none" strike="noStrike" kern="1200" cap="none" spc="0" normalizeH="0" baseline="0" noProof="0" dirty="0" err="1">
-                <a:ln>
-                  <a:noFill/>
-                </a:ln>
-                <a:solidFill>
-                  <a:prstClr val="white"/>
-                </a:solidFill>
-                <a:effectLst/>
-                <a:uLnTx/>
-                <a:uFillTx/>
-                <a:latin typeface="Tw Cen MT" panose="020B0602020104020603"/>
-                <a:ea typeface="+mn-ea"/>
-                <a:cs typeface="+mn-cs"/>
-              </a:rPr>
-              <a:t>for</a:t>
-            </a:r>
-            <a:r>
-              <a:rPr kumimoji="0" lang="es-ES" sz="1800" b="0" i="0" u="none" strike="noStrike" kern="1200" cap="none" spc="0" normalizeH="0" baseline="0" noProof="0" dirty="0">
-                <a:ln>
-                  <a:noFill/>
-                </a:ln>
-                <a:solidFill>
-                  <a:prstClr val="white"/>
-                </a:solidFill>
-                <a:effectLst/>
-                <a:uLnTx/>
-                <a:uFillTx/>
-                <a:latin typeface="Tw Cen MT" panose="020B0602020104020603"/>
-                <a:ea typeface="+mn-ea"/>
-                <a:cs typeface="+mn-cs"/>
-              </a:rPr>
-              <a:t> </a:t>
-            </a:r>
-            <a:r>
-              <a:rPr kumimoji="0" lang="es-ES" sz="1800" b="0" i="0" u="none" strike="noStrike" kern="1200" cap="none" spc="0" normalizeH="0" baseline="0" noProof="0" dirty="0" err="1">
-                <a:ln>
-                  <a:noFill/>
-                </a:ln>
-                <a:solidFill>
-                  <a:prstClr val="white"/>
-                </a:solidFill>
-                <a:effectLst/>
-                <a:uLnTx/>
-                <a:uFillTx/>
-                <a:latin typeface="Tw Cen MT" panose="020B0602020104020603"/>
-                <a:ea typeface="+mn-ea"/>
-                <a:cs typeface="+mn-cs"/>
-              </a:rPr>
-              <a:t>each</a:t>
-            </a:r>
-            <a:r>
-              <a:rPr kumimoji="0" lang="es-ES" sz="1800" b="0" i="0" u="none" strike="noStrike" kern="1200" cap="none" spc="0" normalizeH="0" baseline="0" noProof="0" dirty="0">
-                <a:ln>
-                  <a:noFill/>
-                </a:ln>
-                <a:solidFill>
-                  <a:prstClr val="white"/>
-                </a:solidFill>
-                <a:effectLst/>
-                <a:uLnTx/>
-                <a:uFillTx/>
-                <a:latin typeface="Tw Cen MT" panose="020B0602020104020603"/>
-                <a:ea typeface="+mn-ea"/>
-                <a:cs typeface="+mn-cs"/>
-              </a:rPr>
-              <a:t> ST.</a:t>
+              <a:rPr lang="en-US" dirty="0"/>
+              <a:t>Define the target: Look 30 minutes AHEAD, if a failure occurs at any point within that window, target = 1.</a:t>
             </a:r>
           </a:p>
           <a:p>
             <a:pPr marL="742950" lvl="1" indent="-285750">
               <a:buFont typeface="Arial" panose="020B0604020202020204" pitchFamily="34" charset="0"/>
               <a:buChar char="•"/>
-              <a:defRPr/>
             </a:pPr>
             <a:r>
-              <a:rPr lang="es-ES" dirty="0" err="1">
-                <a:solidFill>
-                  <a:prstClr val="white"/>
-                </a:solidFill>
-                <a:latin typeface="Tw Cen MT" panose="020B0602020104020603"/>
-              </a:rPr>
-              <a:t>Each</a:t>
-            </a:r>
-            <a:r>
-              <a:rPr lang="es-ES" dirty="0">
-                <a:solidFill>
-                  <a:prstClr val="white"/>
-                </a:solidFill>
-                <a:latin typeface="Tw Cen MT" panose="020B0602020104020603"/>
-              </a:rPr>
-              <a:t> ST has </a:t>
-            </a:r>
-            <a:r>
-              <a:rPr lang="es-ES" dirty="0" err="1">
-                <a:solidFill>
-                  <a:prstClr val="white"/>
-                </a:solidFill>
-                <a:latin typeface="Tw Cen MT" panose="020B0602020104020603"/>
-              </a:rPr>
-              <a:t>its</a:t>
-            </a:r>
-            <a:r>
-              <a:rPr lang="es-ES" dirty="0">
-                <a:solidFill>
-                  <a:prstClr val="white"/>
-                </a:solidFill>
-                <a:latin typeface="Tw Cen MT" panose="020B0602020104020603"/>
-              </a:rPr>
-              <a:t> </a:t>
-            </a:r>
-            <a:r>
-              <a:rPr lang="es-ES" dirty="0" err="1">
-                <a:solidFill>
-                  <a:prstClr val="white"/>
-                </a:solidFill>
-                <a:latin typeface="Tw Cen MT" panose="020B0602020104020603"/>
-              </a:rPr>
-              <a:t>owns</a:t>
-            </a:r>
-            <a:r>
-              <a:rPr lang="es-ES" dirty="0">
-                <a:solidFill>
-                  <a:prstClr val="white"/>
-                </a:solidFill>
-                <a:latin typeface="Tw Cen MT" panose="020B0602020104020603"/>
-              </a:rPr>
-              <a:t> </a:t>
-            </a:r>
-            <a:r>
-              <a:rPr lang="es-ES" dirty="0" err="1">
-                <a:solidFill>
-                  <a:prstClr val="white"/>
-                </a:solidFill>
-                <a:latin typeface="Tw Cen MT" panose="020B0602020104020603"/>
-              </a:rPr>
-              <a:t>sensors</a:t>
-            </a:r>
-            <a:r>
-              <a:rPr lang="es-ES" dirty="0">
-                <a:solidFill>
-                  <a:prstClr val="white"/>
-                </a:solidFill>
-                <a:latin typeface="Tw Cen MT" panose="020B0602020104020603"/>
-              </a:rPr>
-              <a:t>.</a:t>
+              <a:rPr lang="en-US" dirty="0"/>
+              <a:t>Failure = Mechanical or Electrical Cause.</a:t>
             </a:r>
             <a:br>
-              <a:rPr lang="es-ES" dirty="0">
-                <a:solidFill>
-                  <a:prstClr val="white"/>
-                </a:solidFill>
-                <a:latin typeface="Tw Cen MT" panose="020B0602020104020603"/>
-              </a:rPr>
+              <a:rPr lang="en-US" dirty="0"/>
             </a:br>
-            <a:r>
-              <a:rPr lang="es-ES" dirty="0" err="1">
-                <a:solidFill>
-                  <a:prstClr val="white"/>
-                </a:solidFill>
-                <a:latin typeface="Tw Cen MT" panose="020B0602020104020603"/>
-              </a:rPr>
-              <a:t>Feature</a:t>
-            </a:r>
-            <a:r>
-              <a:rPr lang="es-ES" dirty="0">
-                <a:solidFill>
-                  <a:prstClr val="white"/>
-                </a:solidFill>
-                <a:latin typeface="Tw Cen MT" panose="020B0602020104020603"/>
-              </a:rPr>
-              <a:t> </a:t>
-            </a:r>
-            <a:r>
-              <a:rPr lang="es-ES" dirty="0" err="1">
-                <a:solidFill>
-                  <a:prstClr val="white"/>
-                </a:solidFill>
-                <a:latin typeface="Tw Cen MT" panose="020B0602020104020603"/>
-              </a:rPr>
-              <a:t>Sensors</a:t>
-            </a:r>
-            <a:r>
-              <a:rPr lang="es-ES" dirty="0">
-                <a:solidFill>
-                  <a:prstClr val="white"/>
-                </a:solidFill>
-                <a:latin typeface="Tw Cen MT" panose="020B0602020104020603"/>
-              </a:rPr>
-              <a:t> </a:t>
-            </a:r>
-            <a:r>
-              <a:rPr lang="es-ES" dirty="0" err="1">
-                <a:solidFill>
-                  <a:prstClr val="white"/>
-                </a:solidFill>
-                <a:latin typeface="Tw Cen MT" panose="020B0602020104020603"/>
-              </a:rPr>
-              <a:t>not</a:t>
-            </a:r>
-            <a:r>
-              <a:rPr lang="es-ES" dirty="0">
-                <a:solidFill>
-                  <a:prstClr val="white"/>
-                </a:solidFill>
-                <a:latin typeface="Tw Cen MT" panose="020B0602020104020603"/>
-              </a:rPr>
-              <a:t> in ST are </a:t>
-            </a:r>
-            <a:r>
-              <a:rPr lang="es-ES" dirty="0" err="1">
-                <a:solidFill>
-                  <a:prstClr val="white"/>
-                </a:solidFill>
-                <a:latin typeface="Tw Cen MT" panose="020B0602020104020603"/>
-              </a:rPr>
-              <a:t>deleted</a:t>
-            </a:r>
-            <a:r>
-              <a:rPr lang="es-ES" dirty="0">
-                <a:solidFill>
-                  <a:prstClr val="white"/>
-                </a:solidFill>
-                <a:latin typeface="Tw Cen MT" panose="020B0602020104020603"/>
-              </a:rPr>
-              <a:t>.</a:t>
-            </a:r>
-            <a:endParaRPr kumimoji="0" lang="es-ES" b="0" i="0" u="none" strike="noStrike" kern="1200" cap="none" spc="0" normalizeH="0" baseline="0" noProof="0" dirty="0">
-              <a:ln>
-                <a:noFill/>
-              </a:ln>
-              <a:solidFill>
-                <a:prstClr val="white"/>
-              </a:solidFill>
-              <a:effectLst/>
-              <a:uLnTx/>
-              <a:uFillTx/>
-              <a:latin typeface="Tw Cen MT" panose="020B0602020104020603"/>
-              <a:ea typeface="+mn-ea"/>
-              <a:cs typeface="+mn-cs"/>
-            </a:endParaRPr>
+            <a:endParaRPr lang="en-US" dirty="0"/>
+          </a:p>
+          <a:p>
+            <a:pPr marL="285750" indent="-285750">
+              <a:buFont typeface="Arial" panose="020B0604020202020204" pitchFamily="34" charset="0"/>
+              <a:buChar char="•"/>
+            </a:pPr>
+            <a:r>
+              <a:rPr lang="en-US" dirty="0"/>
+              <a:t>Build news feature to predict future, reading the sensor behavior from past (15 min before) &amp; present.</a:t>
+            </a:r>
+          </a:p>
+          <a:p>
+            <a:pPr marL="742950" lvl="1" indent="-285750">
+              <a:buFont typeface="Arial" panose="020B0604020202020204" pitchFamily="34" charset="0"/>
+              <a:buChar char="•"/>
+            </a:pPr>
+            <a:r>
+              <a:rPr lang="en-US" dirty="0"/>
+              <a:t>Predictors features: mean15, std15, slope15 and current measure.</a:t>
+            </a:r>
           </a:p>
         </p:txBody>
       </p:sp>
@@ -17408,54 +20705,21 @@
           <a:bodyPr wrap="square" lIns="0" tIns="0" rIns="0" bIns="0" rtlCol="0" anchor="ctr"/>
           <a:lstStyle/>
           <a:p>
-            <a:pPr marL="0" marR="0" lvl="0" indent="0" algn="l" defTabSz="457200" rtl="0" eaLnBrk="1" fontAlgn="auto" latinLnBrk="0" hangingPunct="1">
-              <a:lnSpc>
-                <a:spcPct val="100000"/>
-              </a:lnSpc>
-              <a:spcBef>
-                <a:spcPts val="0"/>
-              </a:spcBef>
-              <a:spcAft>
-                <a:spcPts val="0"/>
-              </a:spcAft>
-              <a:buClrTx/>
-              <a:buSzTx/>
-              <a:buFontTx/>
-              <a:buNone/>
-              <a:tabLst/>
-              <a:defRPr/>
+            <a:pPr marL="0" indent="0">
+              <a:buNone/>
             </a:pPr>
             <a:r>
-              <a:rPr kumimoji="0" lang="en-US" sz="5400" b="1" i="0" u="none" strike="noStrike" kern="1200" cap="none" spc="0" normalizeH="0" baseline="0" noProof="0" dirty="0">
-                <a:ln>
-                  <a:noFill/>
-                </a:ln>
+              <a:rPr lang="en-US" sz="5400" b="1" dirty="0">
                 <a:solidFill>
                   <a:srgbClr val="E07B39"/>
                 </a:solidFill>
-                <a:effectLst/>
-                <a:uLnTx/>
-                <a:uFillTx/>
                 <a:latin typeface="Cambria" pitchFamily="34" charset="0"/>
                 <a:ea typeface="Cambria" pitchFamily="34" charset="-122"/>
                 <a:cs typeface="Cambria" pitchFamily="34" charset="-120"/>
               </a:rPr>
-              <a:t>03</a:t>
-            </a:r>
-            <a:endParaRPr kumimoji="0" lang="en-US" sz="5400" b="0" i="0" u="none" strike="noStrike" kern="1200" cap="none" spc="0" normalizeH="0" baseline="0" noProof="0" dirty="0">
-              <a:ln>
-                <a:noFill/>
-              </a:ln>
-              <a:solidFill>
-                <a:prstClr val="white"/>
-              </a:solidFill>
-              <a:effectLst/>
-              <a:uLnTx/>
-              <a:uFillTx/>
-              <a:latin typeface="Tw Cen MT" panose="020B0602020104020603"/>
-              <a:ea typeface="+mn-ea"/>
-              <a:cs typeface="+mn-cs"/>
-            </a:endParaRPr>
+              <a:t>04</a:t>
+            </a:r>
+            <a:endParaRPr lang="en-US" sz="5400" dirty="0"/>
           </a:p>
         </p:txBody>
       </p:sp>
@@ -17464,7 +20728,7 @@
           <p:cNvPr id="4" name="Imagen 3">
             <a:extLst>
               <a:ext uri="{FF2B5EF4-FFF2-40B4-BE49-F238E27FC236}">
-                <a16:creationId xmlns:a16="http://schemas.microsoft.com/office/drawing/2014/main" id="{D4D38FFC-DEBF-CAB9-BAC6-6B65FF4D46F6}"/>
+                <a16:creationId xmlns:a16="http://schemas.microsoft.com/office/drawing/2014/main" id="{5832A986-6D84-30FF-7E73-546F3A825950}"/>
               </a:ext>
             </a:extLst>
           </p:cNvPr>
@@ -17481,8 +20745,8 @@
         </p:blipFill>
         <p:spPr>
           <a:xfrm>
-            <a:off x="1393766" y="2745633"/>
-            <a:ext cx="3942817" cy="3882714"/>
+            <a:off x="3037953" y="1585414"/>
+            <a:ext cx="6116086" cy="2414244"/>
           </a:xfrm>
           <a:prstGeom prst="rect">
             <a:avLst/>
@@ -17491,10 +20755,10 @@
       </p:pic>
       <p:sp>
         <p:nvSpPr>
-          <p:cNvPr id="7" name="CuadroTexto 6">
+          <p:cNvPr id="2" name="CuadroTexto 1">
             <a:extLst>
               <a:ext uri="{FF2B5EF4-FFF2-40B4-BE49-F238E27FC236}">
-                <a16:creationId xmlns:a16="http://schemas.microsoft.com/office/drawing/2014/main" id="{B033C0D8-ED17-0CC1-2909-C0F037567F33}"/>
+                <a16:creationId xmlns:a16="http://schemas.microsoft.com/office/drawing/2014/main" id="{CC6FE73B-5E89-A681-FADB-7828BD84A4BF}"/>
               </a:ext>
             </a:extLst>
           </p:cNvPr>
@@ -17502,9 +20766,9 @@
           <p:nvPr/>
         </p:nvSpPr>
         <p:spPr>
-          <a:xfrm flipH="1">
-            <a:off x="3089129" y="2397217"/>
-            <a:ext cx="552089" cy="369332"/>
+          <a:xfrm>
+            <a:off x="1651458" y="1124832"/>
+            <a:ext cx="8889077" cy="369332"/>
           </a:xfrm>
           <a:prstGeom prst="rect">
             <a:avLst/>
@@ -17512,171 +20776,28 @@
           <a:noFill/>
         </p:spPr>
         <p:txBody>
-          <a:bodyPr wrap="square" rtlCol="0">
+          <a:bodyPr wrap="square" lIns="91440" tIns="45720" rIns="91440" bIns="45720" rtlCol="0" anchor="t">
             <a:spAutoFit/>
           </a:bodyPr>
           <a:lstStyle/>
           <a:p>
-            <a:pPr marR="0" lvl="0" algn="l" defTabSz="457200" rtl="0" eaLnBrk="1" fontAlgn="auto" latinLnBrk="0" hangingPunct="1">
-              <a:lnSpc>
-                <a:spcPct val="100000"/>
-              </a:lnSpc>
-              <a:spcBef>
-                <a:spcPts val="0"/>
-              </a:spcBef>
-              <a:spcAft>
-                <a:spcPts val="0"/>
-              </a:spcAft>
-              <a:buClrTx/>
-              <a:buSzTx/>
-              <a:tabLst/>
-              <a:defRPr/>
-            </a:pPr>
-            <a:r>
-              <a:rPr kumimoji="0" lang="es-ES" sz="1800" b="0" i="0" u="none" strike="noStrike" kern="1200" cap="none" spc="0" normalizeH="0" baseline="0" noProof="0" dirty="0">
-                <a:ln>
-                  <a:noFill/>
-                </a:ln>
-                <a:solidFill>
-                  <a:prstClr val="white"/>
-                </a:solidFill>
-                <a:effectLst/>
-                <a:uLnTx/>
-                <a:uFillTx/>
-                <a:latin typeface="Tw Cen MT" panose="020B0602020104020603"/>
-                <a:ea typeface="+mn-ea"/>
-                <a:cs typeface="+mn-cs"/>
+            <a:pPr algn="ctr"/>
+            <a:r>
+              <a:rPr lang="en-US" dirty="0">
+                <a:highlight>
+                  <a:srgbClr val="000000"/>
+                </a:highlight>
               </a:rPr>
-              <a:t>ST1</a:t>
-            </a:r>
-            <a:endParaRPr kumimoji="0" lang="es-ES" b="0" i="0" u="none" strike="noStrike" kern="1200" cap="none" spc="0" normalizeH="0" baseline="0" noProof="0" dirty="0">
-              <a:ln>
-                <a:noFill/>
-              </a:ln>
-              <a:solidFill>
-                <a:prstClr val="white"/>
-              </a:solidFill>
-              <a:effectLst/>
-              <a:uLnTx/>
-              <a:uFillTx/>
-              <a:latin typeface="Tw Cen MT" panose="020B0602020104020603"/>
-              <a:ea typeface="+mn-ea"/>
-              <a:cs typeface="+mn-cs"/>
-            </a:endParaRPr>
+              <a:t>Find when the fail is triggered for each ST. </a:t>
+            </a:r>
+            <a:endParaRPr lang="es-ES" dirty="0"/>
           </a:p>
         </p:txBody>
       </p:sp>
-      <p:sp>
-        <p:nvSpPr>
-          <p:cNvPr id="8" name="CuadroTexto 7">
-            <a:extLst>
-              <a:ext uri="{FF2B5EF4-FFF2-40B4-BE49-F238E27FC236}">
-                <a16:creationId xmlns:a16="http://schemas.microsoft.com/office/drawing/2014/main" id="{499C93B4-7712-4AAF-9F8E-E1BA9AC067EF}"/>
-              </a:ext>
-            </a:extLst>
-          </p:cNvPr>
-          <p:cNvSpPr txBox="1"/>
-          <p:nvPr/>
-        </p:nvSpPr>
-        <p:spPr>
-          <a:xfrm flipH="1">
-            <a:off x="8574992" y="2397217"/>
-            <a:ext cx="552089" cy="369332"/>
-          </a:xfrm>
-          <a:prstGeom prst="rect">
-            <a:avLst/>
-          </a:prstGeom>
-          <a:noFill/>
-        </p:spPr>
-        <p:txBody>
-          <a:bodyPr wrap="square" rtlCol="0">
-            <a:spAutoFit/>
-          </a:bodyPr>
-          <a:lstStyle/>
-          <a:p>
-            <a:pPr marR="0" lvl="0" algn="l" defTabSz="457200" rtl="0" eaLnBrk="1" fontAlgn="auto" latinLnBrk="0" hangingPunct="1">
-              <a:lnSpc>
-                <a:spcPct val="100000"/>
-              </a:lnSpc>
-              <a:spcBef>
-                <a:spcPts val="0"/>
-              </a:spcBef>
-              <a:spcAft>
-                <a:spcPts val="0"/>
-              </a:spcAft>
-              <a:buClrTx/>
-              <a:buSzTx/>
-              <a:tabLst/>
-              <a:defRPr/>
-            </a:pPr>
-            <a:r>
-              <a:rPr kumimoji="0" lang="es-ES" sz="1800" b="0" i="0" u="none" strike="noStrike" kern="1200" cap="none" spc="0" normalizeH="0" baseline="0" noProof="0" dirty="0">
-                <a:ln>
-                  <a:noFill/>
-                </a:ln>
-                <a:solidFill>
-                  <a:prstClr val="white"/>
-                </a:solidFill>
-                <a:effectLst/>
-                <a:uLnTx/>
-                <a:uFillTx/>
-                <a:latin typeface="Tw Cen MT" panose="020B0602020104020603"/>
-                <a:ea typeface="+mn-ea"/>
-                <a:cs typeface="+mn-cs"/>
-              </a:rPr>
-              <a:t>ST8</a:t>
-            </a:r>
-            <a:endParaRPr kumimoji="0" lang="es-ES" b="0" i="0" u="none" strike="noStrike" kern="1200" cap="none" spc="0" normalizeH="0" baseline="0" noProof="0" dirty="0">
-              <a:ln>
-                <a:noFill/>
-              </a:ln>
-              <a:solidFill>
-                <a:prstClr val="white"/>
-              </a:solidFill>
-              <a:effectLst/>
-              <a:uLnTx/>
-              <a:uFillTx/>
-              <a:latin typeface="Tw Cen MT" panose="020B0602020104020603"/>
-              <a:ea typeface="+mn-ea"/>
-              <a:cs typeface="+mn-cs"/>
-            </a:endParaRPr>
-          </a:p>
-        </p:txBody>
-      </p:sp>
-      <p:pic>
-        <p:nvPicPr>
-          <p:cNvPr id="10" name="Imagen 9">
-            <a:extLst>
-              <a:ext uri="{FF2B5EF4-FFF2-40B4-BE49-F238E27FC236}">
-                <a16:creationId xmlns:a16="http://schemas.microsoft.com/office/drawing/2014/main" id="{F9EA86AB-8263-F2F2-6A44-8EA687D7A829}"/>
-              </a:ext>
-            </a:extLst>
-          </p:cNvPr>
-          <p:cNvPicPr>
-            <a:picLocks noChangeAspect="1"/>
-          </p:cNvPicPr>
-          <p:nvPr/>
-        </p:nvPicPr>
-        <p:blipFill>
-          <a:blip r:embed="rId4"/>
-          <a:stretch>
-            <a:fillRect/>
-          </a:stretch>
-        </p:blipFill>
-        <p:spPr>
-          <a:xfrm>
-            <a:off x="6742462" y="2745633"/>
-            <a:ext cx="4217148" cy="3156585"/>
-          </a:xfrm>
-          <a:prstGeom prst="rect">
-            <a:avLst/>
-          </a:prstGeom>
-        </p:spPr>
-      </p:pic>
     </p:spTree>
     <p:extLst>
       <p:ext uri="{BB962C8B-B14F-4D97-AF65-F5344CB8AC3E}">
-        <p14:creationId xmlns:p14="http://schemas.microsoft.com/office/powerpoint/2010/main" val="144049094"/>
+        <p14:creationId xmlns:p14="http://schemas.microsoft.com/office/powerpoint/2010/main" val="1837488698"/>
       </p:ext>
     </p:extLst>
   </p:cSld>
@@ -17686,7 +20807,7 @@
 </p:sld>
 </file>
 
-<file path=ppt/slides/slide7.xml><?xml version="1.0" encoding="utf-8"?>
+<file path=ppt/slides/slide8.xml><?xml version="1.0" encoding="utf-8"?>
 <p:sld xmlns:a="http://schemas.openxmlformats.org/drawingml/2006/main" xmlns:r="http://schemas.openxmlformats.org/officeDocument/2006/relationships" xmlns:p="http://schemas.openxmlformats.org/presentationml/2006/main">
   <p:cSld>
     <p:spTree>
@@ -18069,331 +21190,6 @@
 </p:sld>
 </file>
 
-<file path=ppt/slides/slide8.xml><?xml version="1.0" encoding="utf-8"?>
-<p:sld xmlns:a="http://schemas.openxmlformats.org/drawingml/2006/main" xmlns:r="http://schemas.openxmlformats.org/officeDocument/2006/relationships" xmlns:p="http://schemas.openxmlformats.org/presentationml/2006/main">
-  <p:cSld>
-    <p:spTree>
-      <p:nvGrpSpPr>
-        <p:cNvPr id="1" name=""/>
-        <p:cNvGrpSpPr/>
-        <p:nvPr/>
-      </p:nvGrpSpPr>
-      <p:grpSpPr>
-        <a:xfrm>
-          <a:off x="0" y="0"/>
-          <a:ext cx="0" cy="0"/>
-          <a:chOff x="0" y="0"/>
-          <a:chExt cx="0" cy="0"/>
-        </a:xfrm>
-      </p:grpSpPr>
-      <p:pic>
-        <p:nvPicPr>
-          <p:cNvPr id="1026" name="Picture 2" descr="Learn Web Development, Data Analytics &amp; UX/UI Design | Ironhack">
-            <a:extLst>
-              <a:ext uri="{FF2B5EF4-FFF2-40B4-BE49-F238E27FC236}">
-                <a16:creationId xmlns:a16="http://schemas.microsoft.com/office/drawing/2014/main" id="{5E01E9BE-6179-4E9B-AFDA-54077CD7ED06}"/>
-              </a:ext>
-            </a:extLst>
-          </p:cNvPr>
-          <p:cNvPicPr>
-            <a:picLocks noChangeAspect="1" noChangeArrowheads="1"/>
-          </p:cNvPicPr>
-          <p:nvPr/>
-        </p:nvPicPr>
-        <p:blipFill>
-          <a:blip r:embed="rId2">
-            <a:extLst>
-              <a:ext uri="{28A0092B-C50C-407E-A947-70E740481C1C}">
-                <a14:useLocalDpi xmlns:a14="http://schemas.microsoft.com/office/drawing/2010/main" val="0"/>
-              </a:ext>
-            </a:extLst>
-          </a:blip>
-          <a:srcRect/>
-          <a:stretch>
-            <a:fillRect/>
-          </a:stretch>
-        </p:blipFill>
-        <p:spPr bwMode="auto">
-          <a:xfrm>
-            <a:off x="11205556" y="85897"/>
-            <a:ext cx="867122" cy="937429"/>
-          </a:xfrm>
-          <a:prstGeom prst="rect">
-            <a:avLst/>
-          </a:prstGeom>
-          <a:noFill/>
-          <a:extLst>
-            <a:ext uri="{909E8E84-426E-40DD-AFC4-6F175D3DCCD1}">
-              <a14:hiddenFill xmlns:a14="http://schemas.microsoft.com/office/drawing/2010/main">
-                <a:solidFill>
-                  <a:srgbClr val="FFFFFF"/>
-                </a:solidFill>
-              </a14:hiddenFill>
-            </a:ext>
-          </a:extLst>
-        </p:spPr>
-      </p:pic>
-      <p:sp>
-        <p:nvSpPr>
-          <p:cNvPr id="11" name="Rectángulo 10">
-            <a:extLst>
-              <a:ext uri="{FF2B5EF4-FFF2-40B4-BE49-F238E27FC236}">
-                <a16:creationId xmlns:a16="http://schemas.microsoft.com/office/drawing/2014/main" id="{91E00118-B49C-40D5-9A2B-B960249F409A}"/>
-              </a:ext>
-            </a:extLst>
-          </p:cNvPr>
-          <p:cNvSpPr/>
-          <p:nvPr/>
-        </p:nvSpPr>
-        <p:spPr>
-          <a:xfrm>
-            <a:off x="1393766" y="1023326"/>
-            <a:ext cx="9404465" cy="58189"/>
-          </a:xfrm>
-          <a:prstGeom prst="rect">
-            <a:avLst/>
-          </a:prstGeom>
-          <a:solidFill>
-            <a:schemeClr val="tx1"/>
-          </a:solidFill>
-          <a:ln>
-            <a:noFill/>
-          </a:ln>
-        </p:spPr>
-        <p:style>
-          <a:lnRef idx="2">
-            <a:schemeClr val="accent1">
-              <a:shade val="50000"/>
-            </a:schemeClr>
-          </a:lnRef>
-          <a:fillRef idx="1">
-            <a:schemeClr val="accent1"/>
-          </a:fillRef>
-          <a:effectRef idx="0">
-            <a:schemeClr val="accent1"/>
-          </a:effectRef>
-          <a:fontRef idx="minor">
-            <a:schemeClr val="lt1"/>
-          </a:fontRef>
-        </p:style>
-        <p:txBody>
-          <a:bodyPr rtlCol="0" anchor="ctr"/>
-          <a:lstStyle/>
-          <a:p>
-            <a:pPr algn="ctr"/>
-            <a:endParaRPr lang="ca-ES"/>
-          </a:p>
-        </p:txBody>
-      </p:sp>
-      <p:sp>
-        <p:nvSpPr>
-          <p:cNvPr id="14" name="Rectángulo 13">
-            <a:extLst>
-              <a:ext uri="{FF2B5EF4-FFF2-40B4-BE49-F238E27FC236}">
-                <a16:creationId xmlns:a16="http://schemas.microsoft.com/office/drawing/2014/main" id="{8E858A2A-0C33-418C-849C-53BFDE89A632}"/>
-              </a:ext>
-            </a:extLst>
-          </p:cNvPr>
-          <p:cNvSpPr/>
-          <p:nvPr/>
-        </p:nvSpPr>
-        <p:spPr>
-          <a:xfrm>
-            <a:off x="3258243" y="99996"/>
-            <a:ext cx="5675528" cy="923330"/>
-          </a:xfrm>
-          <a:prstGeom prst="rect">
-            <a:avLst/>
-          </a:prstGeom>
-          <a:noFill/>
-        </p:spPr>
-        <p:txBody>
-          <a:bodyPr wrap="none" lIns="91440" tIns="45720" rIns="91440" bIns="45720">
-            <a:spAutoFit/>
-          </a:bodyPr>
-          <a:lstStyle/>
-          <a:p>
-            <a:pPr algn="ctr"/>
-            <a:r>
-              <a:rPr lang="es-ES" sz="5400" b="0" cap="none" spc="0" dirty="0">
-                <a:ln w="0"/>
-                <a:solidFill>
-                  <a:schemeClr val="tx1"/>
-                </a:solidFill>
-                <a:effectLst>
-                  <a:outerShdw blurRad="38100" dist="19050" dir="2700000" algn="tl" rotWithShape="0">
-                    <a:schemeClr val="dk1">
-                      <a:alpha val="40000"/>
-                    </a:schemeClr>
-                  </a:outerShdw>
-                </a:effectLst>
-              </a:rPr>
-              <a:t>Feature Engineering:</a:t>
-            </a:r>
-          </a:p>
-        </p:txBody>
-      </p:sp>
-      <p:sp>
-        <p:nvSpPr>
-          <p:cNvPr id="18" name="CuadroTexto 17">
-            <a:extLst>
-              <a:ext uri="{FF2B5EF4-FFF2-40B4-BE49-F238E27FC236}">
-                <a16:creationId xmlns:a16="http://schemas.microsoft.com/office/drawing/2014/main" id="{018E4B1F-04F2-477A-8787-C71D49E53D58}"/>
-              </a:ext>
-            </a:extLst>
-          </p:cNvPr>
-          <p:cNvSpPr txBox="1"/>
-          <p:nvPr/>
-        </p:nvSpPr>
-        <p:spPr>
-          <a:xfrm>
-            <a:off x="2299236" y="4090909"/>
-            <a:ext cx="7593521" cy="2031325"/>
-          </a:xfrm>
-          <a:prstGeom prst="rect">
-            <a:avLst/>
-          </a:prstGeom>
-          <a:noFill/>
-        </p:spPr>
-        <p:txBody>
-          <a:bodyPr wrap="square" rtlCol="0">
-            <a:spAutoFit/>
-          </a:bodyPr>
-          <a:lstStyle/>
-          <a:p>
-            <a:pPr marL="285750" indent="-285750">
-              <a:buFont typeface="Arial" panose="020B0604020202020204" pitchFamily="34" charset="0"/>
-              <a:buChar char="•"/>
-            </a:pPr>
-            <a:r>
-              <a:rPr lang="en-US" dirty="0"/>
-              <a:t>Define the target: Look 30 minutes AHEAD, if a failure occurs at any point within that window, target = 1.</a:t>
-            </a:r>
-          </a:p>
-          <a:p>
-            <a:pPr marL="742950" lvl="1" indent="-285750">
-              <a:buFont typeface="Arial" panose="020B0604020202020204" pitchFamily="34" charset="0"/>
-              <a:buChar char="•"/>
-            </a:pPr>
-            <a:r>
-              <a:rPr lang="en-US" dirty="0"/>
-              <a:t>Failure = Mechanical or Electrical Cause.</a:t>
-            </a:r>
-            <a:br>
-              <a:rPr lang="en-US" dirty="0"/>
-            </a:br>
-            <a:endParaRPr lang="en-US" dirty="0"/>
-          </a:p>
-          <a:p>
-            <a:pPr marL="285750" indent="-285750">
-              <a:buFont typeface="Arial" panose="020B0604020202020204" pitchFamily="34" charset="0"/>
-              <a:buChar char="•"/>
-            </a:pPr>
-            <a:r>
-              <a:rPr lang="en-US" dirty="0"/>
-              <a:t>Build news feature to predict future, reading the sensor behavior from past (15 min before) &amp; present.</a:t>
-            </a:r>
-          </a:p>
-          <a:p>
-            <a:pPr marL="742950" lvl="1" indent="-285750">
-              <a:buFont typeface="Arial" panose="020B0604020202020204" pitchFamily="34" charset="0"/>
-              <a:buChar char="•"/>
-            </a:pPr>
-            <a:r>
-              <a:rPr lang="en-US" dirty="0"/>
-              <a:t>Predictors features: mean15, std15, slope15 and current measure.</a:t>
-            </a:r>
-          </a:p>
-        </p:txBody>
-      </p:sp>
-      <p:sp>
-        <p:nvSpPr>
-          <p:cNvPr id="20" name="Text 3">
-            <a:extLst>
-              <a:ext uri="{FF2B5EF4-FFF2-40B4-BE49-F238E27FC236}">
-                <a16:creationId xmlns:a16="http://schemas.microsoft.com/office/drawing/2014/main" id="{81386E12-880E-4A87-9C58-72230817ED1D}"/>
-              </a:ext>
-            </a:extLst>
-          </p:cNvPr>
-          <p:cNvSpPr/>
-          <p:nvPr/>
-        </p:nvSpPr>
-        <p:spPr>
-          <a:xfrm>
-            <a:off x="232756" y="216528"/>
-            <a:ext cx="989213" cy="690265"/>
-          </a:xfrm>
-          <a:prstGeom prst="rect">
-            <a:avLst/>
-          </a:prstGeom>
-          <a:noFill/>
-          <a:ln/>
-        </p:spPr>
-        <p:txBody>
-          <a:bodyPr wrap="square" lIns="0" tIns="0" rIns="0" bIns="0" rtlCol="0" anchor="ctr"/>
-          <a:lstStyle/>
-          <a:p>
-            <a:pPr marL="0" indent="0">
-              <a:buNone/>
-            </a:pPr>
-            <a:r>
-              <a:rPr lang="en-US" sz="5400" b="1" dirty="0">
-                <a:solidFill>
-                  <a:srgbClr val="E07B39"/>
-                </a:solidFill>
-                <a:latin typeface="Cambria" pitchFamily="34" charset="0"/>
-                <a:ea typeface="Cambria" pitchFamily="34" charset="-122"/>
-                <a:cs typeface="Cambria" pitchFamily="34" charset="-120"/>
-              </a:rPr>
-              <a:t>04</a:t>
-            </a:r>
-            <a:endParaRPr lang="en-US" sz="5400" dirty="0"/>
-          </a:p>
-        </p:txBody>
-      </p:sp>
-      <p:pic>
-        <p:nvPicPr>
-          <p:cNvPr id="4" name="Imagen 3">
-            <a:extLst>
-              <a:ext uri="{FF2B5EF4-FFF2-40B4-BE49-F238E27FC236}">
-                <a16:creationId xmlns:a16="http://schemas.microsoft.com/office/drawing/2014/main" id="{5832A986-6D84-30FF-7E73-546F3A825950}"/>
-              </a:ext>
-            </a:extLst>
-          </p:cNvPr>
-          <p:cNvPicPr>
-            <a:picLocks noChangeAspect="1"/>
-          </p:cNvPicPr>
-          <p:nvPr/>
-        </p:nvPicPr>
-        <p:blipFill>
-          <a:blip r:embed="rId3"/>
-          <a:stretch>
-            <a:fillRect/>
-          </a:stretch>
-        </p:blipFill>
-        <p:spPr>
-          <a:xfrm>
-            <a:off x="3037954" y="1379090"/>
-            <a:ext cx="6116086" cy="2414244"/>
-          </a:xfrm>
-          <a:prstGeom prst="rect">
-            <a:avLst/>
-          </a:prstGeom>
-        </p:spPr>
-      </p:pic>
-    </p:spTree>
-    <p:extLst>
-      <p:ext uri="{BB962C8B-B14F-4D97-AF65-F5344CB8AC3E}">
-        <p14:creationId xmlns:p14="http://schemas.microsoft.com/office/powerpoint/2010/main" val="1837488698"/>
-      </p:ext>
-    </p:extLst>
-  </p:cSld>
-  <p:clrMapOvr>
-    <a:masterClrMapping/>
-  </p:clrMapOvr>
-</p:sld>
-</file>
-
 <file path=ppt/slides/slide9.xml><?xml version="1.0" encoding="utf-8"?>
 <p:sld xmlns:a="http://schemas.openxmlformats.org/drawingml/2006/main" xmlns:r="http://schemas.openxmlformats.org/officeDocument/2006/relationships" xmlns:p="http://schemas.openxmlformats.org/presentationml/2006/main">
   <p:cSld>
@@ -18666,7 +21462,7 @@
         <p:spPr>
           <a:xfrm>
             <a:off x="1844900" y="2011583"/>
-            <a:ext cx="8502192" cy="1477328"/>
+            <a:ext cx="8502192" cy="1754326"/>
           </a:xfrm>
           <a:prstGeom prst="rect">
             <a:avLst/>
@@ -18705,12 +21501,21 @@
             </a:r>
           </a:p>
           <a:p>
+            <a:pPr marL="1200150" lvl="2" indent="-285750">
+              <a:buAutoNum type="arabicPeriod"/>
+            </a:pPr>
+            <a:r>
+              <a:rPr lang="en-US" dirty="0"/>
+              <a:t>Features has different ranges measures, RF and XGB don’t need Normalization.</a:t>
+            </a:r>
+          </a:p>
+          <a:p>
             <a:pPr marL="742950" lvl="1" indent="-285750">
               <a:buAutoNum type="arabicPeriod"/>
             </a:pPr>
             <a:r>
               <a:rPr lang="en-US" dirty="0"/>
-              <a:t>Features has different ranges measures, RF and XGB don’t need Normalization.</a:t>
+              <a:t>Works well with unbalanced classes.</a:t>
             </a:r>
           </a:p>
           <a:p>
@@ -18719,16 +21524,7 @@
             </a:pPr>
             <a:r>
               <a:rPr lang="en-US" dirty="0"/>
-              <a:t>RF and XGB works well with unbalanced classes.</a:t>
-            </a:r>
-          </a:p>
-          <a:p>
-            <a:pPr marL="742950" lvl="1" indent="-285750">
-              <a:buAutoNum type="arabicPeriod"/>
-            </a:pPr>
-            <a:r>
-              <a:rPr lang="en-US" dirty="0"/>
-              <a:t>RF and XGB are fast models to train.</a:t>
+              <a:t>Fast models to train.</a:t>
             </a:r>
           </a:p>
         </p:txBody>
@@ -18833,7 +21629,7 @@
             </a:pPr>
             <a:r>
               <a:rPr lang="en-US" dirty="0"/>
-              <a:t>20% will be used to validate model and for the “Simulation prediction”</a:t>
+              <a:t>20% has been used to validate model and for the “Simulation prediction”</a:t>
             </a:r>
           </a:p>
         </p:txBody>
@@ -19100,4 +21896,319 @@
     </a:ext>
   </a:extLst>
 </a:theme>
+</file>
+
+<file path=ppt/theme/theme2.xml><?xml version="1.0" encoding="utf-8"?>
+<a:theme xmlns:a="http://schemas.openxmlformats.org/drawingml/2006/main" name="Tema de Office">
+  <a:themeElements>
+    <a:clrScheme name="Office">
+      <a:dk1>
+        <a:sysClr val="windowText" lastClr="000000"/>
+      </a:dk1>
+      <a:lt1>
+        <a:sysClr val="window" lastClr="FFFFFF"/>
+      </a:lt1>
+      <a:dk2>
+        <a:srgbClr val="0E2841"/>
+      </a:dk2>
+      <a:lt2>
+        <a:srgbClr val="E8E8E8"/>
+      </a:lt2>
+      <a:accent1>
+        <a:srgbClr val="156082"/>
+      </a:accent1>
+      <a:accent2>
+        <a:srgbClr val="E97132"/>
+      </a:accent2>
+      <a:accent3>
+        <a:srgbClr val="196B24"/>
+      </a:accent3>
+      <a:accent4>
+        <a:srgbClr val="0F9ED5"/>
+      </a:accent4>
+      <a:accent5>
+        <a:srgbClr val="A02B93"/>
+      </a:accent5>
+      <a:accent6>
+        <a:srgbClr val="4EA72E"/>
+      </a:accent6>
+      <a:hlink>
+        <a:srgbClr val="467886"/>
+      </a:hlink>
+      <a:folHlink>
+        <a:srgbClr val="96607D"/>
+      </a:folHlink>
+    </a:clrScheme>
+    <a:fontScheme name="Office">
+      <a:majorFont>
+        <a:latin typeface="Aptos Display" panose="02110004020202020204"/>
+        <a:ea typeface=""/>
+        <a:cs typeface=""/>
+        <a:font script="Jpan" typeface="游ゴシック Light"/>
+        <a:font script="Hang" typeface="맑은 고딕"/>
+        <a:font script="Hans" typeface="等线 Light"/>
+        <a:font script="Hant" typeface="新細明體"/>
+        <a:font script="Arab" typeface="Times New Roman"/>
+        <a:font script="Hebr" typeface="Times New Roman"/>
+        <a:font script="Thai" typeface="Angsana New"/>
+        <a:font script="Ethi" typeface="Nyala"/>
+        <a:font script="Beng" typeface="Vrinda"/>
+        <a:font script="Gujr" typeface="Shruti"/>
+        <a:font script="Khmr" typeface="MoolBoran"/>
+        <a:font script="Knda" typeface="Tunga"/>
+        <a:font script="Guru" typeface="Raavi"/>
+        <a:font script="Cans" typeface="Euphemia"/>
+        <a:font script="Cher" typeface="Plantagenet Cherokee"/>
+        <a:font script="Yiii" typeface="Microsoft Yi Baiti"/>
+        <a:font script="Tibt" typeface="Microsoft Himalaya"/>
+        <a:font script="Thaa" typeface="MV Boli"/>
+        <a:font script="Deva" typeface="Mangal"/>
+        <a:font script="Telu" typeface="Gautami"/>
+        <a:font script="Taml" typeface="Latha"/>
+        <a:font script="Syrc" typeface="Estrangelo Edessa"/>
+        <a:font script="Orya" typeface="Kalinga"/>
+        <a:font script="Mlym" typeface="Kartika"/>
+        <a:font script="Laoo" typeface="DokChampa"/>
+        <a:font script="Sinh" typeface="Iskoola Pota"/>
+        <a:font script="Mong" typeface="Mongolian Baiti"/>
+        <a:font script="Viet" typeface="Times New Roman"/>
+        <a:font script="Uigh" typeface="Microsoft Uighur"/>
+        <a:font script="Geor" typeface="Sylfaen"/>
+        <a:font script="Armn" typeface="Arial"/>
+        <a:font script="Bugi" typeface="Leelawadee UI"/>
+        <a:font script="Bopo" typeface="Microsoft JhengHei"/>
+        <a:font script="Java" typeface="Javanese Text"/>
+        <a:font script="Lisu" typeface="Segoe UI"/>
+        <a:font script="Mymr" typeface="Myanmar Text"/>
+        <a:font script="Nkoo" typeface="Ebrima"/>
+        <a:font script="Olck" typeface="Nirmala UI"/>
+        <a:font script="Osma" typeface="Ebrima"/>
+        <a:font script="Phag" typeface="Phagspa"/>
+        <a:font script="Syrn" typeface="Estrangelo Edessa"/>
+        <a:font script="Syrj" typeface="Estrangelo Edessa"/>
+        <a:font script="Syre" typeface="Estrangelo Edessa"/>
+        <a:font script="Sora" typeface="Nirmala UI"/>
+        <a:font script="Tale" typeface="Microsoft Tai Le"/>
+        <a:font script="Talu" typeface="Microsoft New Tai Lue"/>
+        <a:font script="Tfng" typeface="Ebrima"/>
+      </a:majorFont>
+      <a:minorFont>
+        <a:latin typeface="Aptos" panose="02110004020202020204"/>
+        <a:ea typeface=""/>
+        <a:cs typeface=""/>
+        <a:font script="Jpan" typeface="游ゴシック"/>
+        <a:font script="Hang" typeface="맑은 고딕"/>
+        <a:font script="Hans" typeface="等线"/>
+        <a:font script="Hant" typeface="新細明體"/>
+        <a:font script="Arab" typeface="Arial"/>
+        <a:font script="Hebr" typeface="Arial"/>
+        <a:font script="Thai" typeface="Cordia New"/>
+        <a:font script="Ethi" typeface="Nyala"/>
+        <a:font script="Beng" typeface="Vrinda"/>
+        <a:font script="Gujr" typeface="Shruti"/>
+        <a:font script="Khmr" typeface="DaunPenh"/>
+        <a:font script="Knda" typeface="Tunga"/>
+        <a:font script="Guru" typeface="Raavi"/>
+        <a:font script="Cans" typeface="Euphemia"/>
+        <a:font script="Cher" typeface="Plantagenet Cherokee"/>
+        <a:font script="Yiii" typeface="Microsoft Yi Baiti"/>
+        <a:font script="Tibt" typeface="Microsoft Himalaya"/>
+        <a:font script="Thaa" typeface="MV Boli"/>
+        <a:font script="Deva" typeface="Mangal"/>
+        <a:font script="Telu" typeface="Gautami"/>
+        <a:font script="Taml" typeface="Latha"/>
+        <a:font script="Syrc" typeface="Estrangelo Edessa"/>
+        <a:font script="Orya" typeface="Kalinga"/>
+        <a:font script="Mlym" typeface="Kartika"/>
+        <a:font script="Laoo" typeface="DokChampa"/>
+        <a:font script="Sinh" typeface="Iskoola Pota"/>
+        <a:font script="Mong" typeface="Mongolian Baiti"/>
+        <a:font script="Viet" typeface="Arial"/>
+        <a:font script="Uigh" typeface="Microsoft Uighur"/>
+        <a:font script="Geor" typeface="Sylfaen"/>
+        <a:font script="Armn" typeface="Arial"/>
+        <a:font script="Bugi" typeface="Leelawadee UI"/>
+        <a:font script="Bopo" typeface="Microsoft JhengHei"/>
+        <a:font script="Java" typeface="Javanese Text"/>
+        <a:font script="Lisu" typeface="Segoe UI"/>
+        <a:font script="Mymr" typeface="Myanmar Text"/>
+        <a:font script="Nkoo" typeface="Ebrima"/>
+        <a:font script="Olck" typeface="Nirmala UI"/>
+        <a:font script="Osma" typeface="Ebrima"/>
+        <a:font script="Phag" typeface="Phagspa"/>
+        <a:font script="Syrn" typeface="Estrangelo Edessa"/>
+        <a:font script="Syrj" typeface="Estrangelo Edessa"/>
+        <a:font script="Syre" typeface="Estrangelo Edessa"/>
+        <a:font script="Sora" typeface="Nirmala UI"/>
+        <a:font script="Tale" typeface="Microsoft Tai Le"/>
+        <a:font script="Talu" typeface="Microsoft New Tai Lue"/>
+        <a:font script="Tfng" typeface="Ebrima"/>
+      </a:minorFont>
+    </a:fontScheme>
+    <a:fmtScheme name="Office">
+      <a:fillStyleLst>
+        <a:solidFill>
+          <a:schemeClr val="phClr"/>
+        </a:solidFill>
+        <a:gradFill rotWithShape="1">
+          <a:gsLst>
+            <a:gs pos="0">
+              <a:schemeClr val="phClr">
+                <a:lumMod val="110000"/>
+                <a:satMod val="105000"/>
+                <a:tint val="67000"/>
+              </a:schemeClr>
+            </a:gs>
+            <a:gs pos="50000">
+              <a:schemeClr val="phClr">
+                <a:lumMod val="105000"/>
+                <a:satMod val="103000"/>
+                <a:tint val="73000"/>
+              </a:schemeClr>
+            </a:gs>
+            <a:gs pos="100000">
+              <a:schemeClr val="phClr">
+                <a:lumMod val="105000"/>
+                <a:satMod val="109000"/>
+                <a:tint val="81000"/>
+              </a:schemeClr>
+            </a:gs>
+          </a:gsLst>
+          <a:lin ang="5400000" scaled="0"/>
+        </a:gradFill>
+        <a:gradFill rotWithShape="1">
+          <a:gsLst>
+            <a:gs pos="0">
+              <a:schemeClr val="phClr">
+                <a:satMod val="103000"/>
+                <a:lumMod val="102000"/>
+                <a:tint val="94000"/>
+              </a:schemeClr>
+            </a:gs>
+            <a:gs pos="50000">
+              <a:schemeClr val="phClr">
+                <a:satMod val="110000"/>
+                <a:lumMod val="100000"/>
+                <a:shade val="100000"/>
+              </a:schemeClr>
+            </a:gs>
+            <a:gs pos="100000">
+              <a:schemeClr val="phClr">
+                <a:lumMod val="99000"/>
+                <a:satMod val="120000"/>
+                <a:shade val="78000"/>
+              </a:schemeClr>
+            </a:gs>
+          </a:gsLst>
+          <a:lin ang="5400000" scaled="0"/>
+        </a:gradFill>
+      </a:fillStyleLst>
+      <a:lnStyleLst>
+        <a:ln w="12700" cap="flat" cmpd="sng" algn="ctr">
+          <a:solidFill>
+            <a:schemeClr val="phClr"/>
+          </a:solidFill>
+          <a:prstDash val="solid"/>
+          <a:miter lim="800000"/>
+        </a:ln>
+        <a:ln w="19050" cap="flat" cmpd="sng" algn="ctr">
+          <a:solidFill>
+            <a:schemeClr val="phClr"/>
+          </a:solidFill>
+          <a:prstDash val="solid"/>
+          <a:miter lim="800000"/>
+        </a:ln>
+        <a:ln w="25400" cap="flat" cmpd="sng" algn="ctr">
+          <a:solidFill>
+            <a:schemeClr val="phClr"/>
+          </a:solidFill>
+          <a:prstDash val="solid"/>
+          <a:miter lim="800000"/>
+        </a:ln>
+      </a:lnStyleLst>
+      <a:effectStyleLst>
+        <a:effectStyle>
+          <a:effectLst/>
+        </a:effectStyle>
+        <a:effectStyle>
+          <a:effectLst/>
+        </a:effectStyle>
+        <a:effectStyle>
+          <a:effectLst>
+            <a:outerShdw blurRad="57150" dist="19050" dir="5400000" algn="ctr" rotWithShape="0">
+              <a:srgbClr val="000000">
+                <a:alpha val="63000"/>
+              </a:srgbClr>
+            </a:outerShdw>
+          </a:effectLst>
+        </a:effectStyle>
+      </a:effectStyleLst>
+      <a:bgFillStyleLst>
+        <a:solidFill>
+          <a:schemeClr val="phClr"/>
+        </a:solidFill>
+        <a:solidFill>
+          <a:schemeClr val="phClr">
+            <a:tint val="95000"/>
+            <a:satMod val="170000"/>
+          </a:schemeClr>
+        </a:solidFill>
+        <a:gradFill rotWithShape="1">
+          <a:gsLst>
+            <a:gs pos="0">
+              <a:schemeClr val="phClr">
+                <a:tint val="93000"/>
+                <a:satMod val="150000"/>
+                <a:shade val="98000"/>
+                <a:lumMod val="102000"/>
+              </a:schemeClr>
+            </a:gs>
+            <a:gs pos="50000">
+              <a:schemeClr val="phClr">
+                <a:tint val="98000"/>
+                <a:satMod val="130000"/>
+                <a:shade val="90000"/>
+                <a:lumMod val="103000"/>
+              </a:schemeClr>
+            </a:gs>
+            <a:gs pos="100000">
+              <a:schemeClr val="phClr">
+                <a:shade val="63000"/>
+                <a:satMod val="120000"/>
+              </a:schemeClr>
+            </a:gs>
+          </a:gsLst>
+          <a:lin ang="5400000" scaled="0"/>
+        </a:gradFill>
+      </a:bgFillStyleLst>
+    </a:fmtScheme>
+  </a:themeElements>
+  <a:objectDefaults>
+    <a:lnDef>
+      <a:spPr/>
+      <a:bodyPr/>
+      <a:lstStyle/>
+      <a:style>
+        <a:lnRef idx="2">
+          <a:schemeClr val="accent1"/>
+        </a:lnRef>
+        <a:fillRef idx="0">
+          <a:schemeClr val="accent1"/>
+        </a:fillRef>
+        <a:effectRef idx="1">
+          <a:schemeClr val="accent1"/>
+        </a:effectRef>
+        <a:fontRef idx="minor">
+          <a:schemeClr val="tx1"/>
+        </a:fontRef>
+      </a:style>
+    </a:lnDef>
+  </a:objectDefaults>
+  <a:extraClrSchemeLst/>
+  <a:extLst>
+    <a:ext uri="{05A4C25C-085E-4340-85A3-A5531E510DB2}">
+      <thm15:themeFamily xmlns:thm15="http://schemas.microsoft.com/office/thememl/2012/main" name="Office Theme" id="{2E142A2C-CD16-42D6-873A-C26D2A0506FA}" vid="{1BDDFF52-6CD6-40A5-AB3C-68EB2F1E4D0A}"/>
+    </a:ext>
+  </a:extLst>
+</a:theme>
 </file>